--- a/frontend/public/presentation-templates/modern-geometric-v2.pptx
+++ b/frontend/public/presentation-templates/modern-geometric-v2.pptx
@@ -2,30 +2,30 @@
 <file path=ppt/presentation.xml><?xml version="1.0" encoding="utf-8"?>
 <p:presentation xmlns:p="http://schemas.openxmlformats.org/presentationml/2006/main">
   <p:sldMasterIdLst>
-    <p:sldMasterId xmlns:r="http://schemas.openxmlformats.org/officeDocument/2006/relationships" id="2147483648" r:id="Rc2f889eacb32432a"/>
+    <p:sldMasterId xmlns:r="http://schemas.openxmlformats.org/officeDocument/2006/relationships" id="2147483648" r:id="Rea8cd6d1db2a4543"/>
   </p:sldMasterIdLst>
   <p:notesMasterIdLst>
-    <p:notesMasterId xmlns:r="http://schemas.openxmlformats.org/officeDocument/2006/relationships" r:id="R4cd59bd38ef0421f"/>
+    <p:notesMasterId xmlns:r="http://schemas.openxmlformats.org/officeDocument/2006/relationships" r:id="R347103fc6b044994"/>
   </p:notesMasterIdLst>
   <p:sldIdLst>
-    <p:sldId xmlns:r="http://schemas.openxmlformats.org/officeDocument/2006/relationships" id="256" r:id="R53037554eac840d6"/>
-    <p:sldId xmlns:r="http://schemas.openxmlformats.org/officeDocument/2006/relationships" id="257" r:id="Re5859a192f9c4923"/>
-    <p:sldId xmlns:r="http://schemas.openxmlformats.org/officeDocument/2006/relationships" id="258" r:id="R02d1facd2e53423c"/>
-    <p:sldId xmlns:r="http://schemas.openxmlformats.org/officeDocument/2006/relationships" id="259" r:id="R3c6f170eecbc48d1"/>
-    <p:sldId xmlns:r="http://schemas.openxmlformats.org/officeDocument/2006/relationships" id="260" r:id="R0529a5d41e924128"/>
-    <p:sldId xmlns:r="http://schemas.openxmlformats.org/officeDocument/2006/relationships" id="261" r:id="R3d8ea1feb1604385"/>
-    <p:sldId xmlns:r="http://schemas.openxmlformats.org/officeDocument/2006/relationships" id="262" r:id="R9a1fd6b471424f9b"/>
-    <p:sldId xmlns:r="http://schemas.openxmlformats.org/officeDocument/2006/relationships" id="263" r:id="R7949324be87a44de"/>
-    <p:sldId xmlns:r="http://schemas.openxmlformats.org/officeDocument/2006/relationships" id="264" r:id="R8d344579a7ac4969"/>
-    <p:sldId xmlns:r="http://schemas.openxmlformats.org/officeDocument/2006/relationships" id="265" r:id="R25ee3a631a004254"/>
-    <p:sldId xmlns:r="http://schemas.openxmlformats.org/officeDocument/2006/relationships" id="266" r:id="Rc38da777432d442d"/>
-    <p:sldId xmlns:r="http://schemas.openxmlformats.org/officeDocument/2006/relationships" id="267" r:id="R4c29dc5050024416"/>
-    <p:sldId xmlns:r="http://schemas.openxmlformats.org/officeDocument/2006/relationships" id="268" r:id="R60d672d22021457c"/>
-    <p:sldId xmlns:r="http://schemas.openxmlformats.org/officeDocument/2006/relationships" id="269" r:id="Rc8b9af7f73bb45b3"/>
-    <p:sldId xmlns:r="http://schemas.openxmlformats.org/officeDocument/2006/relationships" id="270" r:id="Raef37a36422149e6"/>
-    <p:sldId xmlns:r="http://schemas.openxmlformats.org/officeDocument/2006/relationships" id="271" r:id="R66a4403f5a8a44e8"/>
-    <p:sldId xmlns:r="http://schemas.openxmlformats.org/officeDocument/2006/relationships" id="272" r:id="R592b0206fd04447c"/>
-    <p:sldId xmlns:r="http://schemas.openxmlformats.org/officeDocument/2006/relationships" id="273" r:id="R3d9d0eb97cb54ccf"/>
+    <p:sldId xmlns:r="http://schemas.openxmlformats.org/officeDocument/2006/relationships" id="256" r:id="Rc873a847553c4d59"/>
+    <p:sldId xmlns:r="http://schemas.openxmlformats.org/officeDocument/2006/relationships" id="257" r:id="R10ac38a823704ae0"/>
+    <p:sldId xmlns:r="http://schemas.openxmlformats.org/officeDocument/2006/relationships" id="258" r:id="R444c1fe94cf24d34"/>
+    <p:sldId xmlns:r="http://schemas.openxmlformats.org/officeDocument/2006/relationships" id="259" r:id="R64403b6f8084454d"/>
+    <p:sldId xmlns:r="http://schemas.openxmlformats.org/officeDocument/2006/relationships" id="260" r:id="Ra21e6b60cad64cbe"/>
+    <p:sldId xmlns:r="http://schemas.openxmlformats.org/officeDocument/2006/relationships" id="261" r:id="Re90c6848a0bd4545"/>
+    <p:sldId xmlns:r="http://schemas.openxmlformats.org/officeDocument/2006/relationships" id="262" r:id="R0ccad27b321d4483"/>
+    <p:sldId xmlns:r="http://schemas.openxmlformats.org/officeDocument/2006/relationships" id="263" r:id="R179123cab12e4922"/>
+    <p:sldId xmlns:r="http://schemas.openxmlformats.org/officeDocument/2006/relationships" id="264" r:id="R81d5c356f789424f"/>
+    <p:sldId xmlns:r="http://schemas.openxmlformats.org/officeDocument/2006/relationships" id="265" r:id="R22b8e4cbe4a14dd1"/>
+    <p:sldId xmlns:r="http://schemas.openxmlformats.org/officeDocument/2006/relationships" id="266" r:id="R1af1bcbfcfde4e66"/>
+    <p:sldId xmlns:r="http://schemas.openxmlformats.org/officeDocument/2006/relationships" id="267" r:id="Ra47a1430e1834848"/>
+    <p:sldId xmlns:r="http://schemas.openxmlformats.org/officeDocument/2006/relationships" id="268" r:id="Rf23a0c3b3c1942f4"/>
+    <p:sldId xmlns:r="http://schemas.openxmlformats.org/officeDocument/2006/relationships" id="269" r:id="R9d70c412f4f6484f"/>
+    <p:sldId xmlns:r="http://schemas.openxmlformats.org/officeDocument/2006/relationships" id="270" r:id="R66a2a0fc622b4b18"/>
+    <p:sldId xmlns:r="http://schemas.openxmlformats.org/officeDocument/2006/relationships" id="271" r:id="R35bd3fa7e8c143b2"/>
+    <p:sldId xmlns:r="http://schemas.openxmlformats.org/officeDocument/2006/relationships" id="272" r:id="R3351327a59d24419"/>
+    <p:sldId xmlns:r="http://schemas.openxmlformats.org/officeDocument/2006/relationships" id="273" r:id="R2f5cbec1bd5f42dc"/>
   </p:sldIdLst>
   <p:sldSz cx="12192000" cy="6858000"/>
   <p:notesSz cx="6858000" cy="9144000"/>
@@ -1897,7 +1897,7 @@
   </p:cSld>
   <p:clrMap bg1="lt1" tx1="dk1" bg2="lt2" tx2="dk2" accent1="accent1" accent2="accent2" accent3="accent3" accent4="accent4" accent5="accent5" accent6="accent6" hlink="hlink" folHlink="folHlink"/>
   <p:sldLayoutIdLst>
-    <p:sldLayoutId xmlns:r="http://schemas.openxmlformats.org/officeDocument/2006/relationships" id="2147483649" r:id="R251d9a56faf346f2"/>
+    <p:sldLayoutId xmlns:r="http://schemas.openxmlformats.org/officeDocument/2006/relationships" id="2147483649" r:id="R09c74df949524afd"/>
   </p:sldLayoutIdLst>
   <p:txStyles>
     <p:titleStyle>
@@ -2445,7 +2445,7 @@
           <p:nvPr/>
         </p:nvPicPr>
         <p:blipFill>
-          <a:blip xmlns:r="http://schemas.openxmlformats.org/officeDocument/2006/relationships" xmlns:a="http://schemas.openxmlformats.org/drawingml/2006/main" r:embed="Rae6cfbb4b54445e1"/>
+          <a:blip xmlns:r="http://schemas.openxmlformats.org/officeDocument/2006/relationships" xmlns:a="http://schemas.openxmlformats.org/drawingml/2006/main" r:embed="R3ef381077b704a11"/>
           <a:srcRect xmlns:a="http://schemas.openxmlformats.org/drawingml/2006/main" l="0" t="0" r="0" b="0"/>
           <a:stretch xmlns:a="http://schemas.openxmlformats.org/drawingml/2006/main">
             <a:fillRect l="0" t="0" r="0" b="0"/>
@@ -2466,7 +2466,7 @@
           <p:cNvPr id="2" name="">
             <a:extLst xmlns:a="http://schemas.openxmlformats.org/drawingml/2006/main">
               <a:ext uri="{FF2B5EF4-FFF2-40B4-BE49-F238E27FC236}">
-                <a16:creationId xmlns:a16="http://schemas.microsoft.com/office/drawing/2014/main" id="{4B9173AA-EB6E-4965-9B13-A5152AAFF0D2}"/>
+                <a16:creationId xmlns:a16="http://schemas.microsoft.com/office/drawing/2014/main" id="{29909D7A-0EFD-4B54-805F-4165FA66B294}"/>
               </a:ext>
             </a:extLst>
           </p:cNvPr>
@@ -2528,7 +2528,7 @@
           <p:cNvPr id="3" name="">
             <a:extLst xmlns:a="http://schemas.openxmlformats.org/drawingml/2006/main">
               <a:ext uri="{FF2B5EF4-FFF2-40B4-BE49-F238E27FC236}">
-                <a16:creationId xmlns:a16="http://schemas.microsoft.com/office/drawing/2014/main" id="{D88C18D1-5F75-4D4F-A18A-F1EB86402849}"/>
+                <a16:creationId xmlns:a16="http://schemas.microsoft.com/office/drawing/2014/main" id="{BD154146-7D1F-4913-8D33-8BE213A6ED47}"/>
               </a:ext>
             </a:extLst>
           </p:cNvPr>
@@ -2540,7 +2540,7 @@
         <p:spPr>
           <a:xfrm xmlns:a="http://schemas.openxmlformats.org/drawingml/2006/main">
             <a:off x="876300" y="1885950"/>
-            <a:ext cx="6572250" cy="1524000"/>
+            <a:ext cx="7620000" cy="1524000"/>
           </a:xfrm>
           <a:prstGeom xmlns:a="http://schemas.openxmlformats.org/drawingml/2006/main" prst="rect">
             <a:avLst/>
@@ -2590,7 +2590,7 @@
           <p:cNvPr id="4" name="">
             <a:extLst xmlns:a="http://schemas.openxmlformats.org/drawingml/2006/main">
               <a:ext uri="{FF2B5EF4-FFF2-40B4-BE49-F238E27FC236}">
-                <a16:creationId xmlns:a16="http://schemas.microsoft.com/office/drawing/2014/main" id="{E0D0E893-C9F4-486C-ADDD-560D2F0D4B50}"/>
+                <a16:creationId xmlns:a16="http://schemas.microsoft.com/office/drawing/2014/main" id="{1D2742CC-95D2-4A3F-9BA4-1E17CEDBC18A}"/>
               </a:ext>
             </a:extLst>
           </p:cNvPr>
@@ -2652,7 +2652,7 @@
           <p:cNvPr id="5" name="">
             <a:extLst xmlns:a="http://schemas.openxmlformats.org/drawingml/2006/main">
               <a:ext uri="{FF2B5EF4-FFF2-40B4-BE49-F238E27FC236}">
-                <a16:creationId xmlns:a16="http://schemas.microsoft.com/office/drawing/2014/main" id="{FA6C46C4-02B1-4AA1-BE7D-4A5959F087DF}"/>
+                <a16:creationId xmlns:a16="http://schemas.microsoft.com/office/drawing/2014/main" id="{9C3DB8D5-EE1D-4D80-8A64-C77362816E98}"/>
               </a:ext>
             </a:extLst>
           </p:cNvPr>
@@ -2714,7 +2714,7 @@
           <p:cNvPr id="6" name="">
             <a:extLst xmlns:a="http://schemas.openxmlformats.org/drawingml/2006/main">
               <a:ext uri="{FF2B5EF4-FFF2-40B4-BE49-F238E27FC236}">
-                <a16:creationId xmlns:a16="http://schemas.microsoft.com/office/drawing/2014/main" id="{0DDF12E9-FEC9-4D57-99C1-DC03F6E1D20E}"/>
+                <a16:creationId xmlns:a16="http://schemas.microsoft.com/office/drawing/2014/main" id="{DA394C06-B563-405B-8A3F-CDB1C006BDA7}"/>
               </a:ext>
             </a:extLst>
           </p:cNvPr>
@@ -2774,7 +2774,7 @@
     </p:spTree>
     <p:extLst>
       <p:ext uri="{BB962C8B-B14F-4D97-AF65-F5344CB8AC3E}">
-        <p14:creationId xmlns:p14="http://schemas.microsoft.com/office/powerpoint/2010/main" val="247581257"/>
+        <p14:creationId xmlns:p14="http://schemas.microsoft.com/office/powerpoint/2010/main" val="2082864003"/>
       </p:ext>
     </p:extLst>
   </p:cSld>
@@ -2802,7 +2802,7 @@
           <p:nvPr/>
         </p:nvPicPr>
         <p:blipFill>
-          <a:blip xmlns:r="http://schemas.openxmlformats.org/officeDocument/2006/relationships" xmlns:a="http://schemas.openxmlformats.org/drawingml/2006/main" r:embed="R3c425f1554674e44"/>
+          <a:blip xmlns:r="http://schemas.openxmlformats.org/officeDocument/2006/relationships" xmlns:a="http://schemas.openxmlformats.org/drawingml/2006/main" r:embed="Re6d6104213c74413"/>
           <a:srcRect xmlns:a="http://schemas.openxmlformats.org/drawingml/2006/main" l="0" t="0" r="0" b="0"/>
           <a:stretch xmlns:a="http://schemas.openxmlformats.org/drawingml/2006/main">
             <a:fillRect l="0" t="0" r="0" b="0"/>
@@ -2823,7 +2823,7 @@
           <p:cNvPr id="2" name="">
             <a:extLst xmlns:a="http://schemas.openxmlformats.org/drawingml/2006/main">
               <a:ext uri="{FF2B5EF4-FFF2-40B4-BE49-F238E27FC236}">
-                <a16:creationId xmlns:a16="http://schemas.microsoft.com/office/drawing/2014/main" id="{863BFABA-25AF-4C4A-85B6-9E4032946C9E}"/>
+                <a16:creationId xmlns:a16="http://schemas.microsoft.com/office/drawing/2014/main" id="{3334880F-3C7A-47ED-86E8-AF1D0FB18B2C}"/>
               </a:ext>
             </a:extLst>
           </p:cNvPr>
@@ -2885,7 +2885,7 @@
           <p:cNvPr id="3" name="">
             <a:extLst xmlns:a="http://schemas.openxmlformats.org/drawingml/2006/main">
               <a:ext uri="{FF2B5EF4-FFF2-40B4-BE49-F238E27FC236}">
-                <a16:creationId xmlns:a16="http://schemas.microsoft.com/office/drawing/2014/main" id="{890EE6FA-01BC-44FE-AF91-0B25904339D0}"/>
+                <a16:creationId xmlns:a16="http://schemas.microsoft.com/office/drawing/2014/main" id="{363035CA-F8B2-46A6-86F5-3F22D54F206D}"/>
               </a:ext>
             </a:extLst>
           </p:cNvPr>
@@ -2947,7 +2947,7 @@
           <p:cNvPr id="4" name="">
             <a:extLst xmlns:a="http://schemas.openxmlformats.org/drawingml/2006/main">
               <a:ext uri="{FF2B5EF4-FFF2-40B4-BE49-F238E27FC236}">
-                <a16:creationId xmlns:a16="http://schemas.microsoft.com/office/drawing/2014/main" id="{54F08577-9BBE-42DC-A97F-3709BDDB8F4E}"/>
+                <a16:creationId xmlns:a16="http://schemas.microsoft.com/office/drawing/2014/main" id="{76932A17-8AEF-4E17-A607-A257EB981289}"/>
               </a:ext>
             </a:extLst>
           </p:cNvPr>
@@ -3009,7 +3009,7 @@
           <p:cNvPr id="5" name="">
             <a:extLst xmlns:a="http://schemas.openxmlformats.org/drawingml/2006/main">
               <a:ext uri="{FF2B5EF4-FFF2-40B4-BE49-F238E27FC236}">
-                <a16:creationId xmlns:a16="http://schemas.microsoft.com/office/drawing/2014/main" id="{10A1AEDB-D509-48DD-9BFF-D2A84D19325E}"/>
+                <a16:creationId xmlns:a16="http://schemas.microsoft.com/office/drawing/2014/main" id="{F6D7D808-C359-44BE-9AB9-4448FD936DCF}"/>
               </a:ext>
             </a:extLst>
           </p:cNvPr>
@@ -3040,7 +3040,7 @@
           <p:cNvPr id="6" name="">
             <a:extLst xmlns:a="http://schemas.openxmlformats.org/drawingml/2006/main">
               <a:ext uri="{FF2B5EF4-FFF2-40B4-BE49-F238E27FC236}">
-                <a16:creationId xmlns:a16="http://schemas.microsoft.com/office/drawing/2014/main" id="{1E4DC3A7-3B10-4F5F-8382-E9DEF8F4252E}"/>
+                <a16:creationId xmlns:a16="http://schemas.microsoft.com/office/drawing/2014/main" id="{C14979F0-1EB6-45DF-B0FE-88D03758C49B}"/>
               </a:ext>
             </a:extLst>
           </p:cNvPr>
@@ -3102,7 +3102,7 @@
           <p:cNvPr id="7" name="">
             <a:extLst xmlns:a="http://schemas.openxmlformats.org/drawingml/2006/main">
               <a:ext uri="{FF2B5EF4-FFF2-40B4-BE49-F238E27FC236}">
-                <a16:creationId xmlns:a16="http://schemas.microsoft.com/office/drawing/2014/main" id="{3654B353-B199-435F-B869-8DCCB7C9D177}"/>
+                <a16:creationId xmlns:a16="http://schemas.microsoft.com/office/drawing/2014/main" id="{88DC0F4C-5898-4A47-BD0D-E71D15F98048}"/>
               </a:ext>
             </a:extLst>
           </p:cNvPr>
@@ -3135,7 +3135,7 @@
           <p:cNvPr id="8" name="">
             <a:extLst xmlns:a="http://schemas.openxmlformats.org/drawingml/2006/main">
               <a:ext uri="{FF2B5EF4-FFF2-40B4-BE49-F238E27FC236}">
-                <a16:creationId xmlns:a16="http://schemas.microsoft.com/office/drawing/2014/main" id="{B49A3E1E-3088-4AC4-915E-BBE730015CD3}"/>
+                <a16:creationId xmlns:a16="http://schemas.microsoft.com/office/drawing/2014/main" id="{A80A321E-A959-4D8E-9531-BE5EFD65F98C}"/>
               </a:ext>
             </a:extLst>
           </p:cNvPr>
@@ -3170,7 +3170,7 @@
           <p:cNvPr id="9" name="">
             <a:extLst xmlns:a="http://schemas.openxmlformats.org/drawingml/2006/main">
               <a:ext uri="{FF2B5EF4-FFF2-40B4-BE49-F238E27FC236}">
-                <a16:creationId xmlns:a16="http://schemas.microsoft.com/office/drawing/2014/main" id="{F0138D77-73F2-46EE-99C5-D7979430936B}"/>
+                <a16:creationId xmlns:a16="http://schemas.microsoft.com/office/drawing/2014/main" id="{FD0102D8-CDDB-43BE-9370-7A1695BAE34E}"/>
               </a:ext>
             </a:extLst>
           </p:cNvPr>
@@ -3201,7 +3201,7 @@
           <p:cNvPr id="10" name="">
             <a:extLst xmlns:a="http://schemas.openxmlformats.org/drawingml/2006/main">
               <a:ext uri="{FF2B5EF4-FFF2-40B4-BE49-F238E27FC236}">
-                <a16:creationId xmlns:a16="http://schemas.microsoft.com/office/drawing/2014/main" id="{270E316D-B7DC-45C1-905F-B2FB0D4CBC9B}"/>
+                <a16:creationId xmlns:a16="http://schemas.microsoft.com/office/drawing/2014/main" id="{12B654CA-6E61-4549-8BF9-CEF4B8DDDAC2}"/>
               </a:ext>
             </a:extLst>
           </p:cNvPr>
@@ -3263,7 +3263,7 @@
           <p:cNvPr id="11" name="">
             <a:extLst xmlns:a="http://schemas.openxmlformats.org/drawingml/2006/main">
               <a:ext uri="{FF2B5EF4-FFF2-40B4-BE49-F238E27FC236}">
-                <a16:creationId xmlns:a16="http://schemas.microsoft.com/office/drawing/2014/main" id="{CB581C8A-9E50-4C0C-B7F0-D37CA14D4C9C}"/>
+                <a16:creationId xmlns:a16="http://schemas.microsoft.com/office/drawing/2014/main" id="{8B799A38-3115-4A9B-9A2C-7C1733E678B5}"/>
               </a:ext>
             </a:extLst>
           </p:cNvPr>
@@ -3325,7 +3325,7 @@
           <p:cNvPr id="12" name="">
             <a:extLst xmlns:a="http://schemas.openxmlformats.org/drawingml/2006/main">
               <a:ext uri="{FF2B5EF4-FFF2-40B4-BE49-F238E27FC236}">
-                <a16:creationId xmlns:a16="http://schemas.microsoft.com/office/drawing/2014/main" id="{2AE3E3E0-41F8-4C6A-8880-43B51AD7A33F}"/>
+                <a16:creationId xmlns:a16="http://schemas.microsoft.com/office/drawing/2014/main" id="{A38B4518-7CB8-464A-AA4C-C274E3709D99}"/>
               </a:ext>
             </a:extLst>
           </p:cNvPr>
@@ -3358,7 +3358,7 @@
           <p:cNvPr id="13" name="">
             <a:extLst xmlns:a="http://schemas.openxmlformats.org/drawingml/2006/main">
               <a:ext uri="{FF2B5EF4-FFF2-40B4-BE49-F238E27FC236}">
-                <a16:creationId xmlns:a16="http://schemas.microsoft.com/office/drawing/2014/main" id="{F703A16D-F3F4-495A-9EAC-F8A8EFECE949}"/>
+                <a16:creationId xmlns:a16="http://schemas.microsoft.com/office/drawing/2014/main" id="{51F668EC-5780-4781-BFC5-EFE0D50D276C}"/>
               </a:ext>
             </a:extLst>
           </p:cNvPr>
@@ -3393,7 +3393,7 @@
           <p:cNvPr id="14" name="">
             <a:extLst xmlns:a="http://schemas.openxmlformats.org/drawingml/2006/main">
               <a:ext uri="{FF2B5EF4-FFF2-40B4-BE49-F238E27FC236}">
-                <a16:creationId xmlns:a16="http://schemas.microsoft.com/office/drawing/2014/main" id="{80A56EA6-490A-42D3-8119-4C2AE903A87D}"/>
+                <a16:creationId xmlns:a16="http://schemas.microsoft.com/office/drawing/2014/main" id="{C4DF2955-7B73-4A15-8F9B-C37B8D70D552}"/>
               </a:ext>
             </a:extLst>
           </p:cNvPr>
@@ -3424,7 +3424,7 @@
           <p:cNvPr id="15" name="">
             <a:extLst xmlns:a="http://schemas.openxmlformats.org/drawingml/2006/main">
               <a:ext uri="{FF2B5EF4-FFF2-40B4-BE49-F238E27FC236}">
-                <a16:creationId xmlns:a16="http://schemas.microsoft.com/office/drawing/2014/main" id="{16FD7DCA-BAAF-4A52-A7A3-510C4D025D4C}"/>
+                <a16:creationId xmlns:a16="http://schemas.microsoft.com/office/drawing/2014/main" id="{C61B3E9D-7E39-4A10-8756-81201E05E153}"/>
               </a:ext>
             </a:extLst>
           </p:cNvPr>
@@ -3486,7 +3486,7 @@
           <p:cNvPr id="16" name="">
             <a:extLst xmlns:a="http://schemas.openxmlformats.org/drawingml/2006/main">
               <a:ext uri="{FF2B5EF4-FFF2-40B4-BE49-F238E27FC236}">
-                <a16:creationId xmlns:a16="http://schemas.microsoft.com/office/drawing/2014/main" id="{32C4F1E9-E9F8-4410-ABFC-BA7BE2D48349}"/>
+                <a16:creationId xmlns:a16="http://schemas.microsoft.com/office/drawing/2014/main" id="{B205EF1B-7995-4F80-9DA4-65DD4BD01010}"/>
               </a:ext>
             </a:extLst>
           </p:cNvPr>
@@ -3548,7 +3548,7 @@
           <p:cNvPr id="17" name="">
             <a:extLst xmlns:a="http://schemas.openxmlformats.org/drawingml/2006/main">
               <a:ext uri="{FF2B5EF4-FFF2-40B4-BE49-F238E27FC236}">
-                <a16:creationId xmlns:a16="http://schemas.microsoft.com/office/drawing/2014/main" id="{F4FE6D26-ED08-4F58-8BA3-452AE89768A9}"/>
+                <a16:creationId xmlns:a16="http://schemas.microsoft.com/office/drawing/2014/main" id="{10F4EB30-4E8D-4F1D-B247-853FFE7A174E}"/>
               </a:ext>
             </a:extLst>
           </p:cNvPr>
@@ -3610,7 +3610,7 @@
           <p:cNvPr id="18" name="">
             <a:extLst xmlns:a="http://schemas.openxmlformats.org/drawingml/2006/main">
               <a:ext uri="{FF2B5EF4-FFF2-40B4-BE49-F238E27FC236}">
-                <a16:creationId xmlns:a16="http://schemas.microsoft.com/office/drawing/2014/main" id="{44DA35AF-FFFC-40FD-8780-5E695F66E34B}"/>
+                <a16:creationId xmlns:a16="http://schemas.microsoft.com/office/drawing/2014/main" id="{915BB671-787C-4FDD-A660-40B3319FAD8E}"/>
               </a:ext>
             </a:extLst>
           </p:cNvPr>
@@ -3670,7 +3670,7 @@
     </p:spTree>
     <p:extLst>
       <p:ext uri="{BB962C8B-B14F-4D97-AF65-F5344CB8AC3E}">
-        <p14:creationId xmlns:p14="http://schemas.microsoft.com/office/powerpoint/2010/main" val="821869609"/>
+        <p14:creationId xmlns:p14="http://schemas.microsoft.com/office/powerpoint/2010/main" val="532652545"/>
       </p:ext>
     </p:extLst>
   </p:cSld>
@@ -3698,7 +3698,7 @@
           <p:nvPr/>
         </p:nvPicPr>
         <p:blipFill>
-          <a:blip xmlns:r="http://schemas.openxmlformats.org/officeDocument/2006/relationships" xmlns:a="http://schemas.openxmlformats.org/drawingml/2006/main" r:embed="R962c423e5efd4f22"/>
+          <a:blip xmlns:r="http://schemas.openxmlformats.org/officeDocument/2006/relationships" xmlns:a="http://schemas.openxmlformats.org/drawingml/2006/main" r:embed="R63034a60e33040ae"/>
           <a:srcRect xmlns:a="http://schemas.openxmlformats.org/drawingml/2006/main" l="0" t="0" r="0" b="0"/>
           <a:stretch xmlns:a="http://schemas.openxmlformats.org/drawingml/2006/main">
             <a:fillRect l="0" t="0" r="0" b="0"/>
@@ -3719,7 +3719,7 @@
           <p:cNvPr id="2" name="">
             <a:extLst xmlns:a="http://schemas.openxmlformats.org/drawingml/2006/main">
               <a:ext uri="{FF2B5EF4-FFF2-40B4-BE49-F238E27FC236}">
-                <a16:creationId xmlns:a16="http://schemas.microsoft.com/office/drawing/2014/main" id="{37018695-8798-48A0-A21C-FBE665234A60}"/>
+                <a16:creationId xmlns:a16="http://schemas.microsoft.com/office/drawing/2014/main" id="{7AD9338C-1F2B-4C2D-AB2B-F0C76860E094}"/>
               </a:ext>
             </a:extLst>
           </p:cNvPr>
@@ -3781,7 +3781,7 @@
           <p:cNvPr id="3" name="">
             <a:extLst xmlns:a="http://schemas.openxmlformats.org/drawingml/2006/main">
               <a:ext uri="{FF2B5EF4-FFF2-40B4-BE49-F238E27FC236}">
-                <a16:creationId xmlns:a16="http://schemas.microsoft.com/office/drawing/2014/main" id="{4BAFE61A-9040-41AA-9E18-77FEF113A4EF}"/>
+                <a16:creationId xmlns:a16="http://schemas.microsoft.com/office/drawing/2014/main" id="{37D41709-13B8-48D0-B997-5A06F8E223EE}"/>
               </a:ext>
             </a:extLst>
           </p:cNvPr>
@@ -3843,7 +3843,7 @@
           <p:cNvPr id="4" name="">
             <a:extLst xmlns:a="http://schemas.openxmlformats.org/drawingml/2006/main">
               <a:ext uri="{FF2B5EF4-FFF2-40B4-BE49-F238E27FC236}">
-                <a16:creationId xmlns:a16="http://schemas.microsoft.com/office/drawing/2014/main" id="{FC016948-AC4B-4BF8-8694-779A16005970}"/>
+                <a16:creationId xmlns:a16="http://schemas.microsoft.com/office/drawing/2014/main" id="{121D84E8-90DB-4C42-9DA3-C01AF2BBC0A4}"/>
               </a:ext>
             </a:extLst>
           </p:cNvPr>
@@ -3905,7 +3905,7 @@
           <p:cNvPr id="5" name="">
             <a:extLst xmlns:a="http://schemas.openxmlformats.org/drawingml/2006/main">
               <a:ext uri="{FF2B5EF4-FFF2-40B4-BE49-F238E27FC236}">
-                <a16:creationId xmlns:a16="http://schemas.microsoft.com/office/drawing/2014/main" id="{B302B069-B1B0-4CAF-ADA7-8C055F8EE785}"/>
+                <a16:creationId xmlns:a16="http://schemas.microsoft.com/office/drawing/2014/main" id="{3CA44CED-EE58-407A-8B81-5254FE99049B}"/>
               </a:ext>
             </a:extLst>
           </p:cNvPr>
@@ -3936,7 +3936,7 @@
           <p:cNvPr id="6" name="">
             <a:extLst xmlns:a="http://schemas.openxmlformats.org/drawingml/2006/main">
               <a:ext uri="{FF2B5EF4-FFF2-40B4-BE49-F238E27FC236}">
-                <a16:creationId xmlns:a16="http://schemas.microsoft.com/office/drawing/2014/main" id="{3485779F-0807-4186-9AD7-127912FBE2BF}"/>
+                <a16:creationId xmlns:a16="http://schemas.microsoft.com/office/drawing/2014/main" id="{13900EED-24A6-4104-B992-6C7E002FFC1D}"/>
               </a:ext>
             </a:extLst>
           </p:cNvPr>
@@ -3998,7 +3998,7 @@
           <p:cNvPr id="7" name="">
             <a:extLst xmlns:a="http://schemas.openxmlformats.org/drawingml/2006/main">
               <a:ext uri="{FF2B5EF4-FFF2-40B4-BE49-F238E27FC236}">
-                <a16:creationId xmlns:a16="http://schemas.microsoft.com/office/drawing/2014/main" id="{A0D1919E-FAE5-4F25-BCAE-781F9A9B52F6}"/>
+                <a16:creationId xmlns:a16="http://schemas.microsoft.com/office/drawing/2014/main" id="{40BF20B4-1888-45C0-A0AD-2D1A44F7677F}"/>
               </a:ext>
             </a:extLst>
           </p:cNvPr>
@@ -4031,7 +4031,7 @@
           <p:cNvPr id="8" name="">
             <a:extLst xmlns:a="http://schemas.openxmlformats.org/drawingml/2006/main">
               <a:ext uri="{FF2B5EF4-FFF2-40B4-BE49-F238E27FC236}">
-                <a16:creationId xmlns:a16="http://schemas.microsoft.com/office/drawing/2014/main" id="{51FB96FF-F5F4-4D92-97C9-9B08FA18F387}"/>
+                <a16:creationId xmlns:a16="http://schemas.microsoft.com/office/drawing/2014/main" id="{052CC283-04A8-420A-A1D0-734255E47983}"/>
               </a:ext>
             </a:extLst>
           </p:cNvPr>
@@ -4066,7 +4066,7 @@
           <p:cNvPr id="9" name="">
             <a:extLst xmlns:a="http://schemas.openxmlformats.org/drawingml/2006/main">
               <a:ext uri="{FF2B5EF4-FFF2-40B4-BE49-F238E27FC236}">
-                <a16:creationId xmlns:a16="http://schemas.microsoft.com/office/drawing/2014/main" id="{8835E930-FC48-4563-B24D-F73229277B8C}"/>
+                <a16:creationId xmlns:a16="http://schemas.microsoft.com/office/drawing/2014/main" id="{FB3C58A3-A5EB-4BB8-8580-3CFE214ED49E}"/>
               </a:ext>
             </a:extLst>
           </p:cNvPr>
@@ -4097,7 +4097,7 @@
           <p:cNvPr id="10" name="">
             <a:extLst xmlns:a="http://schemas.openxmlformats.org/drawingml/2006/main">
               <a:ext uri="{FF2B5EF4-FFF2-40B4-BE49-F238E27FC236}">
-                <a16:creationId xmlns:a16="http://schemas.microsoft.com/office/drawing/2014/main" id="{CF49B9E4-9ED2-4D3D-BC8E-65D398FB9F7D}"/>
+                <a16:creationId xmlns:a16="http://schemas.microsoft.com/office/drawing/2014/main" id="{51EB053B-1373-4EBF-A8A3-742B43F8E2E0}"/>
               </a:ext>
             </a:extLst>
           </p:cNvPr>
@@ -4159,7 +4159,7 @@
           <p:cNvPr id="11" name="">
             <a:extLst xmlns:a="http://schemas.openxmlformats.org/drawingml/2006/main">
               <a:ext uri="{FF2B5EF4-FFF2-40B4-BE49-F238E27FC236}">
-                <a16:creationId xmlns:a16="http://schemas.microsoft.com/office/drawing/2014/main" id="{B948A993-599E-4ED2-B3FC-E38FAAC4557A}"/>
+                <a16:creationId xmlns:a16="http://schemas.microsoft.com/office/drawing/2014/main" id="{040A77B8-6D89-4374-8E75-0A021D35F85E}"/>
               </a:ext>
             </a:extLst>
           </p:cNvPr>
@@ -4302,7 +4302,7 @@
           <p:cNvPr id="12" name="">
             <a:extLst xmlns:a="http://schemas.openxmlformats.org/drawingml/2006/main">
               <a:ext uri="{FF2B5EF4-FFF2-40B4-BE49-F238E27FC236}">
-                <a16:creationId xmlns:a16="http://schemas.microsoft.com/office/drawing/2014/main" id="{39A8DFC6-A2D3-42F3-A778-CD74107EE089}"/>
+                <a16:creationId xmlns:a16="http://schemas.microsoft.com/office/drawing/2014/main" id="{32A5D6E4-1A53-442E-AF72-CC8B2FAECEA9}"/>
               </a:ext>
             </a:extLst>
           </p:cNvPr>
@@ -4364,7 +4364,7 @@
           <p:cNvPr id="13" name="">
             <a:extLst xmlns:a="http://schemas.openxmlformats.org/drawingml/2006/main">
               <a:ext uri="{FF2B5EF4-FFF2-40B4-BE49-F238E27FC236}">
-                <a16:creationId xmlns:a16="http://schemas.microsoft.com/office/drawing/2014/main" id="{BF41C819-502E-4A5D-BAB0-8F8FE1F8877D}"/>
+                <a16:creationId xmlns:a16="http://schemas.microsoft.com/office/drawing/2014/main" id="{4011AE8D-754D-42BB-AB9E-DF74D9C99732}"/>
               </a:ext>
             </a:extLst>
           </p:cNvPr>
@@ -4424,7 +4424,7 @@
     </p:spTree>
     <p:extLst>
       <p:ext uri="{BB962C8B-B14F-4D97-AF65-F5344CB8AC3E}">
-        <p14:creationId xmlns:p14="http://schemas.microsoft.com/office/powerpoint/2010/main" val="434605710"/>
+        <p14:creationId xmlns:p14="http://schemas.microsoft.com/office/powerpoint/2010/main" val="1620917499"/>
       </p:ext>
     </p:extLst>
   </p:cSld>
@@ -4452,7 +4452,7 @@
           <p:nvPr/>
         </p:nvPicPr>
         <p:blipFill>
-          <a:blip xmlns:r="http://schemas.openxmlformats.org/officeDocument/2006/relationships" xmlns:a="http://schemas.openxmlformats.org/drawingml/2006/main" r:embed="R76436c29172b4888"/>
+          <a:blip xmlns:r="http://schemas.openxmlformats.org/officeDocument/2006/relationships" xmlns:a="http://schemas.openxmlformats.org/drawingml/2006/main" r:embed="R0ec0473a20b64d34"/>
           <a:srcRect xmlns:a="http://schemas.openxmlformats.org/drawingml/2006/main" l="0" t="0" r="0" b="0"/>
           <a:stretch xmlns:a="http://schemas.openxmlformats.org/drawingml/2006/main">
             <a:fillRect l="0" t="0" r="0" b="0"/>
@@ -4473,7 +4473,7 @@
           <p:cNvPr id="2" name="">
             <a:extLst xmlns:a="http://schemas.openxmlformats.org/drawingml/2006/main">
               <a:ext uri="{FF2B5EF4-FFF2-40B4-BE49-F238E27FC236}">
-                <a16:creationId xmlns:a16="http://schemas.microsoft.com/office/drawing/2014/main" id="{9B5FD567-7F4A-47BB-A4DE-C6834E8EE922}"/>
+                <a16:creationId xmlns:a16="http://schemas.microsoft.com/office/drawing/2014/main" id="{16E65D64-2F66-4411-8795-CE4D1AE8969D}"/>
               </a:ext>
             </a:extLst>
           </p:cNvPr>
@@ -4535,7 +4535,7 @@
           <p:cNvPr id="3" name="">
             <a:extLst xmlns:a="http://schemas.openxmlformats.org/drawingml/2006/main">
               <a:ext uri="{FF2B5EF4-FFF2-40B4-BE49-F238E27FC236}">
-                <a16:creationId xmlns:a16="http://schemas.microsoft.com/office/drawing/2014/main" id="{68AA7208-F7CD-4FD6-B2FC-710AC6624899}"/>
+                <a16:creationId xmlns:a16="http://schemas.microsoft.com/office/drawing/2014/main" id="{3EC2C9F6-A3F5-4704-9B7B-9CD36A84D8F2}"/>
               </a:ext>
             </a:extLst>
           </p:cNvPr>
@@ -4597,7 +4597,7 @@
           <p:cNvPr id="4" name="">
             <a:extLst xmlns:a="http://schemas.openxmlformats.org/drawingml/2006/main">
               <a:ext uri="{FF2B5EF4-FFF2-40B4-BE49-F238E27FC236}">
-                <a16:creationId xmlns:a16="http://schemas.microsoft.com/office/drawing/2014/main" id="{D037C82F-0428-4993-9A1E-01D6689D4E3B}"/>
+                <a16:creationId xmlns:a16="http://schemas.microsoft.com/office/drawing/2014/main" id="{E2242BD1-4913-4758-BD53-78DA5F8AB6B1}"/>
               </a:ext>
             </a:extLst>
           </p:cNvPr>
@@ -4659,7 +4659,7 @@
           <p:cNvPr id="5" name="">
             <a:extLst xmlns:a="http://schemas.openxmlformats.org/drawingml/2006/main">
               <a:ext uri="{FF2B5EF4-FFF2-40B4-BE49-F238E27FC236}">
-                <a16:creationId xmlns:a16="http://schemas.microsoft.com/office/drawing/2014/main" id="{39E7BD6C-F85A-4125-AD23-68519B950257}"/>
+                <a16:creationId xmlns:a16="http://schemas.microsoft.com/office/drawing/2014/main" id="{E5FB961E-7B1F-4888-8D06-ED75B82EB77A}"/>
               </a:ext>
             </a:extLst>
           </p:cNvPr>
@@ -4690,7 +4690,7 @@
           <p:cNvPr id="6" name="">
             <a:extLst xmlns:a="http://schemas.openxmlformats.org/drawingml/2006/main">
               <a:ext uri="{FF2B5EF4-FFF2-40B4-BE49-F238E27FC236}">
-                <a16:creationId xmlns:a16="http://schemas.microsoft.com/office/drawing/2014/main" id="{FC495A71-3E53-407C-A05B-1746D0C26E48}"/>
+                <a16:creationId xmlns:a16="http://schemas.microsoft.com/office/drawing/2014/main" id="{9853D06F-2AB6-44F0-8ABA-5476C1FF5C21}"/>
               </a:ext>
             </a:extLst>
           </p:cNvPr>
@@ -4752,7 +4752,7 @@
           <p:cNvPr id="7" name="">
             <a:extLst xmlns:a="http://schemas.openxmlformats.org/drawingml/2006/main">
               <a:ext uri="{FF2B5EF4-FFF2-40B4-BE49-F238E27FC236}">
-                <a16:creationId xmlns:a16="http://schemas.microsoft.com/office/drawing/2014/main" id="{18553D8C-3F54-4C71-8282-01A14C2111F8}"/>
+                <a16:creationId xmlns:a16="http://schemas.microsoft.com/office/drawing/2014/main" id="{053AB587-C123-4C2F-9956-6FAF341A07DE}"/>
               </a:ext>
             </a:extLst>
           </p:cNvPr>
@@ -4785,7 +4785,7 @@
           <p:cNvPr id="8" name="">
             <a:extLst xmlns:a="http://schemas.openxmlformats.org/drawingml/2006/main">
               <a:ext uri="{FF2B5EF4-FFF2-40B4-BE49-F238E27FC236}">
-                <a16:creationId xmlns:a16="http://schemas.microsoft.com/office/drawing/2014/main" id="{19CB7A31-2559-4147-ACB5-B62D13B67C73}"/>
+                <a16:creationId xmlns:a16="http://schemas.microsoft.com/office/drawing/2014/main" id="{70BC37AE-D24A-4B2F-9562-AAE4BFF2C902}"/>
               </a:ext>
             </a:extLst>
           </p:cNvPr>
@@ -4820,7 +4820,7 @@
           <p:cNvPr id="9" name="">
             <a:extLst xmlns:a="http://schemas.openxmlformats.org/drawingml/2006/main">
               <a:ext uri="{FF2B5EF4-FFF2-40B4-BE49-F238E27FC236}">
-                <a16:creationId xmlns:a16="http://schemas.microsoft.com/office/drawing/2014/main" id="{4FEB2FAD-D3FD-498B-985A-AFB8FD21167C}"/>
+                <a16:creationId xmlns:a16="http://schemas.microsoft.com/office/drawing/2014/main" id="{C6880F74-7270-431F-B5D0-C116A47C5487}"/>
               </a:ext>
             </a:extLst>
           </p:cNvPr>
@@ -4851,7 +4851,7 @@
           <p:cNvPr id="10" name="">
             <a:extLst xmlns:a="http://schemas.openxmlformats.org/drawingml/2006/main">
               <a:ext uri="{FF2B5EF4-FFF2-40B4-BE49-F238E27FC236}">
-                <a16:creationId xmlns:a16="http://schemas.microsoft.com/office/drawing/2014/main" id="{C607411D-A99E-497C-9719-7F0C8B4C5D8F}"/>
+                <a16:creationId xmlns:a16="http://schemas.microsoft.com/office/drawing/2014/main" id="{71258C0F-E60C-4E32-AC4D-683E3DDB8445}"/>
               </a:ext>
             </a:extLst>
           </p:cNvPr>
@@ -4913,7 +4913,7 @@
           <p:cNvPr id="11" name="">
             <a:extLst xmlns:a="http://schemas.openxmlformats.org/drawingml/2006/main">
               <a:ext uri="{FF2B5EF4-FFF2-40B4-BE49-F238E27FC236}">
-                <a16:creationId xmlns:a16="http://schemas.microsoft.com/office/drawing/2014/main" id="{81BBF80A-5348-40FF-B011-50B4568F3268}"/>
+                <a16:creationId xmlns:a16="http://schemas.microsoft.com/office/drawing/2014/main" id="{748134C4-DC7C-444D-8FC0-5986176E3D41}"/>
               </a:ext>
             </a:extLst>
           </p:cNvPr>
@@ -4975,7 +4975,7 @@
           <p:cNvPr id="12" name="">
             <a:extLst xmlns:a="http://schemas.openxmlformats.org/drawingml/2006/main">
               <a:ext uri="{FF2B5EF4-FFF2-40B4-BE49-F238E27FC236}">
-                <a16:creationId xmlns:a16="http://schemas.microsoft.com/office/drawing/2014/main" id="{EBCEA875-1A89-4B2B-84F8-BFB2FBA9A545}"/>
+                <a16:creationId xmlns:a16="http://schemas.microsoft.com/office/drawing/2014/main" id="{8F1D8CF2-6D6C-46E0-840A-7F76A721E637}"/>
               </a:ext>
             </a:extLst>
           </p:cNvPr>
@@ -5008,7 +5008,7 @@
           <p:cNvPr id="13" name="">
             <a:extLst xmlns:a="http://schemas.openxmlformats.org/drawingml/2006/main">
               <a:ext uri="{FF2B5EF4-FFF2-40B4-BE49-F238E27FC236}">
-                <a16:creationId xmlns:a16="http://schemas.microsoft.com/office/drawing/2014/main" id="{2633F0B9-FF09-4AC7-B2BF-4BCEC2F5D8DE}"/>
+                <a16:creationId xmlns:a16="http://schemas.microsoft.com/office/drawing/2014/main" id="{C4C597A4-F17E-4BDB-9154-778C2DD7CEB6}"/>
               </a:ext>
             </a:extLst>
           </p:cNvPr>
@@ -5043,7 +5043,7 @@
           <p:cNvPr id="14" name="">
             <a:extLst xmlns:a="http://schemas.openxmlformats.org/drawingml/2006/main">
               <a:ext uri="{FF2B5EF4-FFF2-40B4-BE49-F238E27FC236}">
-                <a16:creationId xmlns:a16="http://schemas.microsoft.com/office/drawing/2014/main" id="{77955247-2064-49F8-9669-C0E077D8D5A5}"/>
+                <a16:creationId xmlns:a16="http://schemas.microsoft.com/office/drawing/2014/main" id="{4DAF2987-74B1-4C10-BD9E-28558A092595}"/>
               </a:ext>
             </a:extLst>
           </p:cNvPr>
@@ -5074,7 +5074,7 @@
           <p:cNvPr id="15" name="">
             <a:extLst xmlns:a="http://schemas.openxmlformats.org/drawingml/2006/main">
               <a:ext uri="{FF2B5EF4-FFF2-40B4-BE49-F238E27FC236}">
-                <a16:creationId xmlns:a16="http://schemas.microsoft.com/office/drawing/2014/main" id="{8D556454-2EEB-473B-9E16-42E15E058408}"/>
+                <a16:creationId xmlns:a16="http://schemas.microsoft.com/office/drawing/2014/main" id="{389893D0-B801-433A-902A-3176912F3910}"/>
               </a:ext>
             </a:extLst>
           </p:cNvPr>
@@ -5136,7 +5136,7 @@
           <p:cNvPr id="16" name="">
             <a:extLst xmlns:a="http://schemas.openxmlformats.org/drawingml/2006/main">
               <a:ext uri="{FF2B5EF4-FFF2-40B4-BE49-F238E27FC236}">
-                <a16:creationId xmlns:a16="http://schemas.microsoft.com/office/drawing/2014/main" id="{4BE13D8D-3E59-4363-96E5-675ED05C5C96}"/>
+                <a16:creationId xmlns:a16="http://schemas.microsoft.com/office/drawing/2014/main" id="{FB700E17-2532-47A9-A266-AEDB05838F2A}"/>
               </a:ext>
             </a:extLst>
           </p:cNvPr>
@@ -5198,7 +5198,7 @@
           <p:cNvPr id="17" name="">
             <a:extLst xmlns:a="http://schemas.openxmlformats.org/drawingml/2006/main">
               <a:ext uri="{FF2B5EF4-FFF2-40B4-BE49-F238E27FC236}">
-                <a16:creationId xmlns:a16="http://schemas.microsoft.com/office/drawing/2014/main" id="{6850A4BD-0869-4DAC-AEDC-BE5099C9FECC}"/>
+                <a16:creationId xmlns:a16="http://schemas.microsoft.com/office/drawing/2014/main" id="{A5E26587-7A76-4237-A737-4B4787E32651}"/>
               </a:ext>
             </a:extLst>
           </p:cNvPr>
@@ -5231,7 +5231,7 @@
           <p:cNvPr id="18" name="">
             <a:extLst xmlns:a="http://schemas.openxmlformats.org/drawingml/2006/main">
               <a:ext uri="{FF2B5EF4-FFF2-40B4-BE49-F238E27FC236}">
-                <a16:creationId xmlns:a16="http://schemas.microsoft.com/office/drawing/2014/main" id="{58122540-7B96-4F38-A91A-2C34D81AB93C}"/>
+                <a16:creationId xmlns:a16="http://schemas.microsoft.com/office/drawing/2014/main" id="{953F0CE9-C4A5-44A1-A814-591CFE2E76DD}"/>
               </a:ext>
             </a:extLst>
           </p:cNvPr>
@@ -5266,7 +5266,7 @@
           <p:cNvPr id="19" name="">
             <a:extLst xmlns:a="http://schemas.openxmlformats.org/drawingml/2006/main">
               <a:ext uri="{FF2B5EF4-FFF2-40B4-BE49-F238E27FC236}">
-                <a16:creationId xmlns:a16="http://schemas.microsoft.com/office/drawing/2014/main" id="{AEB59DC9-C36C-46F6-94D1-B4A23C846C02}"/>
+                <a16:creationId xmlns:a16="http://schemas.microsoft.com/office/drawing/2014/main" id="{186512C5-7905-4974-A780-8C06D58C94E2}"/>
               </a:ext>
             </a:extLst>
           </p:cNvPr>
@@ -5297,7 +5297,7 @@
           <p:cNvPr id="20" name="">
             <a:extLst xmlns:a="http://schemas.openxmlformats.org/drawingml/2006/main">
               <a:ext uri="{FF2B5EF4-FFF2-40B4-BE49-F238E27FC236}">
-                <a16:creationId xmlns:a16="http://schemas.microsoft.com/office/drawing/2014/main" id="{325E08A0-3E2C-4AD6-B08D-8E7AE63E5BBF}"/>
+                <a16:creationId xmlns:a16="http://schemas.microsoft.com/office/drawing/2014/main" id="{48FD1C3F-C67F-4625-A230-6DAE3BF9B99A}"/>
               </a:ext>
             </a:extLst>
           </p:cNvPr>
@@ -5359,7 +5359,7 @@
           <p:cNvPr id="21" name="">
             <a:extLst xmlns:a="http://schemas.openxmlformats.org/drawingml/2006/main">
               <a:ext uri="{FF2B5EF4-FFF2-40B4-BE49-F238E27FC236}">
-                <a16:creationId xmlns:a16="http://schemas.microsoft.com/office/drawing/2014/main" id="{51B713D8-7E85-4E88-B661-0E3892F0193F}"/>
+                <a16:creationId xmlns:a16="http://schemas.microsoft.com/office/drawing/2014/main" id="{1B34F8C3-B429-4364-8090-3F1DC35364AB}"/>
               </a:ext>
             </a:extLst>
           </p:cNvPr>
@@ -5421,7 +5421,7 @@
           <p:cNvPr id="22" name="">
             <a:extLst xmlns:a="http://schemas.openxmlformats.org/drawingml/2006/main">
               <a:ext uri="{FF2B5EF4-FFF2-40B4-BE49-F238E27FC236}">
-                <a16:creationId xmlns:a16="http://schemas.microsoft.com/office/drawing/2014/main" id="{8EB97FE7-4BC1-427F-92DB-DB1DFAED8D06}"/>
+                <a16:creationId xmlns:a16="http://schemas.microsoft.com/office/drawing/2014/main" id="{FAA4546C-337E-4E93-8E80-2AAB766E1D92}"/>
               </a:ext>
             </a:extLst>
           </p:cNvPr>
@@ -5483,7 +5483,7 @@
           <p:cNvPr id="23" name="">
             <a:extLst xmlns:a="http://schemas.openxmlformats.org/drawingml/2006/main">
               <a:ext uri="{FF2B5EF4-FFF2-40B4-BE49-F238E27FC236}">
-                <a16:creationId xmlns:a16="http://schemas.microsoft.com/office/drawing/2014/main" id="{91FD6C0F-6A5E-46F7-A220-98238A4DD224}"/>
+                <a16:creationId xmlns:a16="http://schemas.microsoft.com/office/drawing/2014/main" id="{B0118891-B56C-42B6-AE9B-0785490954CE}"/>
               </a:ext>
             </a:extLst>
           </p:cNvPr>
@@ -5543,7 +5543,7 @@
     </p:spTree>
     <p:extLst>
       <p:ext uri="{BB962C8B-B14F-4D97-AF65-F5344CB8AC3E}">
-        <p14:creationId xmlns:p14="http://schemas.microsoft.com/office/powerpoint/2010/main" val="2032748447"/>
+        <p14:creationId xmlns:p14="http://schemas.microsoft.com/office/powerpoint/2010/main" val="1469311312"/>
       </p:ext>
     </p:extLst>
   </p:cSld>
@@ -5571,7 +5571,7 @@
           <p:nvPr/>
         </p:nvPicPr>
         <p:blipFill>
-          <a:blip xmlns:r="http://schemas.openxmlformats.org/officeDocument/2006/relationships" xmlns:a="http://schemas.openxmlformats.org/drawingml/2006/main" r:embed="R3cda1e728ac644ba"/>
+          <a:blip xmlns:r="http://schemas.openxmlformats.org/officeDocument/2006/relationships" xmlns:a="http://schemas.openxmlformats.org/drawingml/2006/main" r:embed="R04c970adc5ec415b"/>
           <a:srcRect xmlns:a="http://schemas.openxmlformats.org/drawingml/2006/main" l="0" t="0" r="0" b="0"/>
           <a:stretch xmlns:a="http://schemas.openxmlformats.org/drawingml/2006/main">
             <a:fillRect l="0" t="0" r="0" b="0"/>
@@ -5592,7 +5592,7 @@
           <p:cNvPr id="2" name="">
             <a:extLst xmlns:a="http://schemas.openxmlformats.org/drawingml/2006/main">
               <a:ext uri="{FF2B5EF4-FFF2-40B4-BE49-F238E27FC236}">
-                <a16:creationId xmlns:a16="http://schemas.microsoft.com/office/drawing/2014/main" id="{D959080E-6048-4E27-AB9C-9E1456798888}"/>
+                <a16:creationId xmlns:a16="http://schemas.microsoft.com/office/drawing/2014/main" id="{E4D96DF3-A5E1-46FC-952D-8FF9F2F69943}"/>
               </a:ext>
             </a:extLst>
           </p:cNvPr>
@@ -5654,7 +5654,7 @@
           <p:cNvPr id="3" name="">
             <a:extLst xmlns:a="http://schemas.openxmlformats.org/drawingml/2006/main">
               <a:ext uri="{FF2B5EF4-FFF2-40B4-BE49-F238E27FC236}">
-                <a16:creationId xmlns:a16="http://schemas.microsoft.com/office/drawing/2014/main" id="{0F45F67B-2189-40C5-9536-C4D68E11D1EE}"/>
+                <a16:creationId xmlns:a16="http://schemas.microsoft.com/office/drawing/2014/main" id="{8A65DF14-DA71-4210-A411-E6CE2E5E7C35}"/>
               </a:ext>
             </a:extLst>
           </p:cNvPr>
@@ -5716,7 +5716,7 @@
           <p:cNvPr id="4" name="">
             <a:extLst xmlns:a="http://schemas.openxmlformats.org/drawingml/2006/main">
               <a:ext uri="{FF2B5EF4-FFF2-40B4-BE49-F238E27FC236}">
-                <a16:creationId xmlns:a16="http://schemas.microsoft.com/office/drawing/2014/main" id="{DC9BBF64-8B65-4C5A-B59D-A5FF44892078}"/>
+                <a16:creationId xmlns:a16="http://schemas.microsoft.com/office/drawing/2014/main" id="{F1BF9194-9230-41C7-8C61-227382AADBE7}"/>
               </a:ext>
             </a:extLst>
           </p:cNvPr>
@@ -5778,7 +5778,7 @@
           <p:cNvPr id="5" name="">
             <a:extLst xmlns:a="http://schemas.openxmlformats.org/drawingml/2006/main">
               <a:ext uri="{FF2B5EF4-FFF2-40B4-BE49-F238E27FC236}">
-                <a16:creationId xmlns:a16="http://schemas.microsoft.com/office/drawing/2014/main" id="{6C576D1B-8C52-4BC4-98EC-487D29ECDC9D}"/>
+                <a16:creationId xmlns:a16="http://schemas.microsoft.com/office/drawing/2014/main" id="{E4FA71C4-DA1B-4D82-AAB3-2BEDB1B43D13}"/>
               </a:ext>
             </a:extLst>
           </p:cNvPr>
@@ -5809,7 +5809,7 @@
           <p:cNvPr id="6" name="">
             <a:extLst xmlns:a="http://schemas.openxmlformats.org/drawingml/2006/main">
               <a:ext uri="{FF2B5EF4-FFF2-40B4-BE49-F238E27FC236}">
-                <a16:creationId xmlns:a16="http://schemas.microsoft.com/office/drawing/2014/main" id="{9EE5C160-88DC-42D1-8DE9-9FAFB6B8964F}"/>
+                <a16:creationId xmlns:a16="http://schemas.microsoft.com/office/drawing/2014/main" id="{B2F8ABC0-BDD5-4B80-9351-11DE829B34FF}"/>
               </a:ext>
             </a:extLst>
           </p:cNvPr>
@@ -5871,7 +5871,7 @@
           <p:cNvPr id="7" name="">
             <a:extLst xmlns:a="http://schemas.openxmlformats.org/drawingml/2006/main">
               <a:ext uri="{FF2B5EF4-FFF2-40B4-BE49-F238E27FC236}">
-                <a16:creationId xmlns:a16="http://schemas.microsoft.com/office/drawing/2014/main" id="{7A21BFEF-FF3B-426F-98D5-546B8EE0CC16}"/>
+                <a16:creationId xmlns:a16="http://schemas.microsoft.com/office/drawing/2014/main" id="{A16675D5-2E26-416F-9A5E-939826BB38A9}"/>
               </a:ext>
             </a:extLst>
           </p:cNvPr>
@@ -5904,7 +5904,7 @@
           <p:cNvPr id="8" name="">
             <a:extLst xmlns:a="http://schemas.openxmlformats.org/drawingml/2006/main">
               <a:ext uri="{FF2B5EF4-FFF2-40B4-BE49-F238E27FC236}">
-                <a16:creationId xmlns:a16="http://schemas.microsoft.com/office/drawing/2014/main" id="{F9A912AF-3BBC-402B-9811-9D414EFDBBBA}"/>
+                <a16:creationId xmlns:a16="http://schemas.microsoft.com/office/drawing/2014/main" id="{A7FF0316-FC0C-4A65-A979-544038F4AEDD}"/>
               </a:ext>
             </a:extLst>
           </p:cNvPr>
@@ -5939,7 +5939,7 @@
           <p:cNvPr id="9" name="">
             <a:extLst xmlns:a="http://schemas.openxmlformats.org/drawingml/2006/main">
               <a:ext uri="{FF2B5EF4-FFF2-40B4-BE49-F238E27FC236}">
-                <a16:creationId xmlns:a16="http://schemas.microsoft.com/office/drawing/2014/main" id="{4D1AB325-D4D0-48D9-9093-78750A224930}"/>
+                <a16:creationId xmlns:a16="http://schemas.microsoft.com/office/drawing/2014/main" id="{110C4C99-4293-43DD-9EAA-CF2DEE6A467C}"/>
               </a:ext>
             </a:extLst>
           </p:cNvPr>
@@ -5970,7 +5970,7 @@
           <p:cNvPr id="10" name="">
             <a:extLst xmlns:a="http://schemas.openxmlformats.org/drawingml/2006/main">
               <a:ext uri="{FF2B5EF4-FFF2-40B4-BE49-F238E27FC236}">
-                <a16:creationId xmlns:a16="http://schemas.microsoft.com/office/drawing/2014/main" id="{9C236D4B-8778-4180-B186-05F9D5F9C795}"/>
+                <a16:creationId xmlns:a16="http://schemas.microsoft.com/office/drawing/2014/main" id="{17037289-6EA6-4DCD-905D-98700387E4BF}"/>
               </a:ext>
             </a:extLst>
           </p:cNvPr>
@@ -6032,7 +6032,7 @@
           <p:cNvPr id="11" name="">
             <a:extLst xmlns:a="http://schemas.openxmlformats.org/drawingml/2006/main">
               <a:ext uri="{FF2B5EF4-FFF2-40B4-BE49-F238E27FC236}">
-                <a16:creationId xmlns:a16="http://schemas.microsoft.com/office/drawing/2014/main" id="{4EA2FE3A-4D8F-49B1-A721-854442CDEB73}"/>
+                <a16:creationId xmlns:a16="http://schemas.microsoft.com/office/drawing/2014/main" id="{B051C7F6-E9C2-4D7B-B51C-389A508383D3}"/>
               </a:ext>
             </a:extLst>
           </p:cNvPr>
@@ -6094,7 +6094,7 @@
           <p:cNvPr id="12" name="">
             <a:extLst xmlns:a="http://schemas.openxmlformats.org/drawingml/2006/main">
               <a:ext uri="{FF2B5EF4-FFF2-40B4-BE49-F238E27FC236}">
-                <a16:creationId xmlns:a16="http://schemas.microsoft.com/office/drawing/2014/main" id="{BCEBB433-23BE-473F-B15B-49DF6EB9594B}"/>
+                <a16:creationId xmlns:a16="http://schemas.microsoft.com/office/drawing/2014/main" id="{D08530B7-FDE0-47A7-9ADC-DB0E6FC7B99A}"/>
               </a:ext>
             </a:extLst>
           </p:cNvPr>
@@ -6156,7 +6156,7 @@
           <p:cNvPr id="13" name="">
             <a:extLst xmlns:a="http://schemas.openxmlformats.org/drawingml/2006/main">
               <a:ext uri="{FF2B5EF4-FFF2-40B4-BE49-F238E27FC236}">
-                <a16:creationId xmlns:a16="http://schemas.microsoft.com/office/drawing/2014/main" id="{10BA963D-D23A-45CA-A6FA-EA6D59F0DC64}"/>
+                <a16:creationId xmlns:a16="http://schemas.microsoft.com/office/drawing/2014/main" id="{3E306D1B-FB7E-435D-A62A-6CBC25D85A25}"/>
               </a:ext>
             </a:extLst>
           </p:cNvPr>
@@ -6216,7 +6216,7 @@
     </p:spTree>
     <p:extLst>
       <p:ext uri="{BB962C8B-B14F-4D97-AF65-F5344CB8AC3E}">
-        <p14:creationId xmlns:p14="http://schemas.microsoft.com/office/powerpoint/2010/main" val="253147871"/>
+        <p14:creationId xmlns:p14="http://schemas.microsoft.com/office/powerpoint/2010/main" val="1417190342"/>
       </p:ext>
     </p:extLst>
   </p:cSld>
@@ -6244,7 +6244,7 @@
           <p:nvPr/>
         </p:nvPicPr>
         <p:blipFill>
-          <a:blip xmlns:r="http://schemas.openxmlformats.org/officeDocument/2006/relationships" xmlns:a="http://schemas.openxmlformats.org/drawingml/2006/main" r:embed="Ra795d8d7f77640da"/>
+          <a:blip xmlns:r="http://schemas.openxmlformats.org/officeDocument/2006/relationships" xmlns:a="http://schemas.openxmlformats.org/drawingml/2006/main" r:embed="Rdfd5a4f94a5a4715"/>
           <a:srcRect xmlns:a="http://schemas.openxmlformats.org/drawingml/2006/main" l="0" t="0" r="0" b="0"/>
           <a:stretch xmlns:a="http://schemas.openxmlformats.org/drawingml/2006/main">
             <a:fillRect l="0" t="0" r="0" b="0"/>
@@ -6265,7 +6265,7 @@
           <p:cNvPr id="2" name="">
             <a:extLst xmlns:a="http://schemas.openxmlformats.org/drawingml/2006/main">
               <a:ext uri="{FF2B5EF4-FFF2-40B4-BE49-F238E27FC236}">
-                <a16:creationId xmlns:a16="http://schemas.microsoft.com/office/drawing/2014/main" id="{CBD949F5-83AE-4CF7-A6C4-E63889C6C47F}"/>
+                <a16:creationId xmlns:a16="http://schemas.microsoft.com/office/drawing/2014/main" id="{B507A4D9-42F3-419D-9379-A385BB34CC55}"/>
               </a:ext>
             </a:extLst>
           </p:cNvPr>
@@ -6327,7 +6327,7 @@
           <p:cNvPr id="3" name="">
             <a:extLst xmlns:a="http://schemas.openxmlformats.org/drawingml/2006/main">
               <a:ext uri="{FF2B5EF4-FFF2-40B4-BE49-F238E27FC236}">
-                <a16:creationId xmlns:a16="http://schemas.microsoft.com/office/drawing/2014/main" id="{77A0AA06-F3F6-447F-B088-68772C66CD84}"/>
+                <a16:creationId xmlns:a16="http://schemas.microsoft.com/office/drawing/2014/main" id="{38C2F4ED-2E2C-4E7E-B5D1-DA979B7920A7}"/>
               </a:ext>
             </a:extLst>
           </p:cNvPr>
@@ -6389,7 +6389,7 @@
           <p:cNvPr id="4" name="">
             <a:extLst xmlns:a="http://schemas.openxmlformats.org/drawingml/2006/main">
               <a:ext uri="{FF2B5EF4-FFF2-40B4-BE49-F238E27FC236}">
-                <a16:creationId xmlns:a16="http://schemas.microsoft.com/office/drawing/2014/main" id="{2CCC753B-6ADB-4079-9D17-7118788F25A8}"/>
+                <a16:creationId xmlns:a16="http://schemas.microsoft.com/office/drawing/2014/main" id="{FDC204DE-A1BC-4C27-B747-6319FAC3D585}"/>
               </a:ext>
             </a:extLst>
           </p:cNvPr>
@@ -6451,7 +6451,7 @@
           <p:cNvPr id="5" name="">
             <a:extLst xmlns:a="http://schemas.openxmlformats.org/drawingml/2006/main">
               <a:ext uri="{FF2B5EF4-FFF2-40B4-BE49-F238E27FC236}">
-                <a16:creationId xmlns:a16="http://schemas.microsoft.com/office/drawing/2014/main" id="{DC813578-9646-4887-B5AC-49D44BCA0E08}"/>
+                <a16:creationId xmlns:a16="http://schemas.microsoft.com/office/drawing/2014/main" id="{8983307B-0B45-4930-87DE-7BF8F40F2146}"/>
               </a:ext>
             </a:extLst>
           </p:cNvPr>
@@ -6482,7 +6482,7 @@
           <p:cNvPr id="6" name="">
             <a:extLst xmlns:a="http://schemas.openxmlformats.org/drawingml/2006/main">
               <a:ext uri="{FF2B5EF4-FFF2-40B4-BE49-F238E27FC236}">
-                <a16:creationId xmlns:a16="http://schemas.microsoft.com/office/drawing/2014/main" id="{80870A3A-82F5-4604-A685-8B38549BBD79}"/>
+                <a16:creationId xmlns:a16="http://schemas.microsoft.com/office/drawing/2014/main" id="{2452AD09-6C5A-46E7-9CAC-DEDCEB9910A6}"/>
               </a:ext>
             </a:extLst>
           </p:cNvPr>
@@ -6544,7 +6544,7 @@
           <p:cNvPr id="7" name="">
             <a:extLst xmlns:a="http://schemas.openxmlformats.org/drawingml/2006/main">
               <a:ext uri="{FF2B5EF4-FFF2-40B4-BE49-F238E27FC236}">
-                <a16:creationId xmlns:a16="http://schemas.microsoft.com/office/drawing/2014/main" id="{D91F0C0E-75D4-4FBE-BD7A-671BDB8F91AA}"/>
+                <a16:creationId xmlns:a16="http://schemas.microsoft.com/office/drawing/2014/main" id="{6CCEF6CB-D05F-4602-A4BE-BBAEEF5576E5}"/>
               </a:ext>
             </a:extLst>
           </p:cNvPr>
@@ -6577,7 +6577,7 @@
           <p:cNvPr id="8" name="">
             <a:extLst xmlns:a="http://schemas.openxmlformats.org/drawingml/2006/main">
               <a:ext uri="{FF2B5EF4-FFF2-40B4-BE49-F238E27FC236}">
-                <a16:creationId xmlns:a16="http://schemas.microsoft.com/office/drawing/2014/main" id="{91EE9405-B0D7-4932-A44E-9A9FA9F87FFC}"/>
+                <a16:creationId xmlns:a16="http://schemas.microsoft.com/office/drawing/2014/main" id="{316FC5D7-E395-434C-9ABF-05CA652A475B}"/>
               </a:ext>
             </a:extLst>
           </p:cNvPr>
@@ -6612,7 +6612,7 @@
           <p:cNvPr id="9" name="">
             <a:extLst xmlns:a="http://schemas.openxmlformats.org/drawingml/2006/main">
               <a:ext uri="{FF2B5EF4-FFF2-40B4-BE49-F238E27FC236}">
-                <a16:creationId xmlns:a16="http://schemas.microsoft.com/office/drawing/2014/main" id="{CEA1002D-66A4-453A-81FF-4A0CB0CA4509}"/>
+                <a16:creationId xmlns:a16="http://schemas.microsoft.com/office/drawing/2014/main" id="{12EDE1CE-4C19-438E-A7DB-540715FDFDF9}"/>
               </a:ext>
             </a:extLst>
           </p:cNvPr>
@@ -6643,7 +6643,7 @@
           <p:cNvPr id="10" name="">
             <a:extLst xmlns:a="http://schemas.openxmlformats.org/drawingml/2006/main">
               <a:ext uri="{FF2B5EF4-FFF2-40B4-BE49-F238E27FC236}">
-                <a16:creationId xmlns:a16="http://schemas.microsoft.com/office/drawing/2014/main" id="{5859BE3E-E993-4345-B45C-CFBD2B7D88B7}"/>
+                <a16:creationId xmlns:a16="http://schemas.microsoft.com/office/drawing/2014/main" id="{22AF45CA-D383-4AE3-A2C4-9CAD0D5A6B2A}"/>
               </a:ext>
             </a:extLst>
           </p:cNvPr>
@@ -6705,7 +6705,7 @@
           <p:cNvPr id="11" name="">
             <a:extLst xmlns:a="http://schemas.openxmlformats.org/drawingml/2006/main">
               <a:ext uri="{FF2B5EF4-FFF2-40B4-BE49-F238E27FC236}">
-                <a16:creationId xmlns:a16="http://schemas.microsoft.com/office/drawing/2014/main" id="{6B28A716-5269-4766-997A-9FA180C1FD57}"/>
+                <a16:creationId xmlns:a16="http://schemas.microsoft.com/office/drawing/2014/main" id="{E54EE559-126B-4579-B451-32A276DAF3BE}"/>
               </a:ext>
             </a:extLst>
           </p:cNvPr>
@@ -6767,7 +6767,7 @@
           <p:cNvPr id="12" name="">
             <a:extLst xmlns:a="http://schemas.openxmlformats.org/drawingml/2006/main">
               <a:ext uri="{FF2B5EF4-FFF2-40B4-BE49-F238E27FC236}">
-                <a16:creationId xmlns:a16="http://schemas.microsoft.com/office/drawing/2014/main" id="{BD365712-318C-4A5B-B293-234F928679A8}"/>
+                <a16:creationId xmlns:a16="http://schemas.microsoft.com/office/drawing/2014/main" id="{549F64FA-F908-4317-925D-DFAA37896726}"/>
               </a:ext>
             </a:extLst>
           </p:cNvPr>
@@ -6800,7 +6800,7 @@
           <p:cNvPr id="13" name="">
             <a:extLst xmlns:a="http://schemas.openxmlformats.org/drawingml/2006/main">
               <a:ext uri="{FF2B5EF4-FFF2-40B4-BE49-F238E27FC236}">
-                <a16:creationId xmlns:a16="http://schemas.microsoft.com/office/drawing/2014/main" id="{4E10E94A-01F2-4018-BB06-C6A9A926F3B4}"/>
+                <a16:creationId xmlns:a16="http://schemas.microsoft.com/office/drawing/2014/main" id="{CC5E5011-0572-435D-A910-A427B34BCE85}"/>
               </a:ext>
             </a:extLst>
           </p:cNvPr>
@@ -6835,7 +6835,7 @@
           <p:cNvPr id="14" name="">
             <a:extLst xmlns:a="http://schemas.openxmlformats.org/drawingml/2006/main">
               <a:ext uri="{FF2B5EF4-FFF2-40B4-BE49-F238E27FC236}">
-                <a16:creationId xmlns:a16="http://schemas.microsoft.com/office/drawing/2014/main" id="{48322209-8D2E-40D8-9A85-2BE6E1548FEA}"/>
+                <a16:creationId xmlns:a16="http://schemas.microsoft.com/office/drawing/2014/main" id="{6DF78BB1-968E-4FC0-8C62-E26427A2C49F}"/>
               </a:ext>
             </a:extLst>
           </p:cNvPr>
@@ -6866,7 +6866,7 @@
           <p:cNvPr id="15" name="">
             <a:extLst xmlns:a="http://schemas.openxmlformats.org/drawingml/2006/main">
               <a:ext uri="{FF2B5EF4-FFF2-40B4-BE49-F238E27FC236}">
-                <a16:creationId xmlns:a16="http://schemas.microsoft.com/office/drawing/2014/main" id="{FE521AEE-9E15-4CE3-9770-82073BEC0DE8}"/>
+                <a16:creationId xmlns:a16="http://schemas.microsoft.com/office/drawing/2014/main" id="{1244AC2C-EFD7-47F1-840D-A46D9822F9F5}"/>
               </a:ext>
             </a:extLst>
           </p:cNvPr>
@@ -6928,7 +6928,7 @@
           <p:cNvPr id="16" name="">
             <a:extLst xmlns:a="http://schemas.openxmlformats.org/drawingml/2006/main">
               <a:ext uri="{FF2B5EF4-FFF2-40B4-BE49-F238E27FC236}">
-                <a16:creationId xmlns:a16="http://schemas.microsoft.com/office/drawing/2014/main" id="{4C9E54A3-5C8E-4DC6-9795-AE9651CAAFA8}"/>
+                <a16:creationId xmlns:a16="http://schemas.microsoft.com/office/drawing/2014/main" id="{E91D2183-37F3-46A9-8B0A-C7990D4467B8}"/>
               </a:ext>
             </a:extLst>
           </p:cNvPr>
@@ -6990,7 +6990,7 @@
           <p:cNvPr id="17" name="">
             <a:extLst xmlns:a="http://schemas.openxmlformats.org/drawingml/2006/main">
               <a:ext uri="{FF2B5EF4-FFF2-40B4-BE49-F238E27FC236}">
-                <a16:creationId xmlns:a16="http://schemas.microsoft.com/office/drawing/2014/main" id="{D1D9297C-1C8B-4261-8E8C-38AB5DB27A56}"/>
+                <a16:creationId xmlns:a16="http://schemas.microsoft.com/office/drawing/2014/main" id="{48FE4F56-EF88-43CC-B407-E6F6C141D42E}"/>
               </a:ext>
             </a:extLst>
           </p:cNvPr>
@@ -7052,7 +7052,7 @@
           <p:cNvPr id="18" name="">
             <a:extLst xmlns:a="http://schemas.openxmlformats.org/drawingml/2006/main">
               <a:ext uri="{FF2B5EF4-FFF2-40B4-BE49-F238E27FC236}">
-                <a16:creationId xmlns:a16="http://schemas.microsoft.com/office/drawing/2014/main" id="{3B49890A-2536-44F1-B99E-FE4E48BE73A7}"/>
+                <a16:creationId xmlns:a16="http://schemas.microsoft.com/office/drawing/2014/main" id="{43661EE9-AA43-42CC-BB08-C5397BA11C2A}"/>
               </a:ext>
             </a:extLst>
           </p:cNvPr>
@@ -7112,7 +7112,7 @@
     </p:spTree>
     <p:extLst>
       <p:ext uri="{BB962C8B-B14F-4D97-AF65-F5344CB8AC3E}">
-        <p14:creationId xmlns:p14="http://schemas.microsoft.com/office/powerpoint/2010/main" val="370035648"/>
+        <p14:creationId xmlns:p14="http://schemas.microsoft.com/office/powerpoint/2010/main" val="253157401"/>
       </p:ext>
     </p:extLst>
   </p:cSld>
@@ -7140,7 +7140,7 @@
           <p:nvPr/>
         </p:nvPicPr>
         <p:blipFill>
-          <a:blip xmlns:r="http://schemas.openxmlformats.org/officeDocument/2006/relationships" xmlns:a="http://schemas.openxmlformats.org/drawingml/2006/main" r:embed="Rabbcc05c65204ffd"/>
+          <a:blip xmlns:r="http://schemas.openxmlformats.org/officeDocument/2006/relationships" xmlns:a="http://schemas.openxmlformats.org/drawingml/2006/main" r:embed="Rb50072bae3cb498a"/>
           <a:srcRect xmlns:a="http://schemas.openxmlformats.org/drawingml/2006/main" l="0" t="0" r="0" b="0"/>
           <a:stretch xmlns:a="http://schemas.openxmlformats.org/drawingml/2006/main">
             <a:fillRect l="0" t="0" r="0" b="0"/>
@@ -7161,7 +7161,7 @@
           <p:cNvPr id="2" name="">
             <a:extLst xmlns:a="http://schemas.openxmlformats.org/drawingml/2006/main">
               <a:ext uri="{FF2B5EF4-FFF2-40B4-BE49-F238E27FC236}">
-                <a16:creationId xmlns:a16="http://schemas.microsoft.com/office/drawing/2014/main" id="{6449D01B-671C-492F-9402-517245079764}"/>
+                <a16:creationId xmlns:a16="http://schemas.microsoft.com/office/drawing/2014/main" id="{290F0D7F-9627-412B-9BFA-9B3F5915B315}"/>
               </a:ext>
             </a:extLst>
           </p:cNvPr>
@@ -7223,7 +7223,7 @@
           <p:cNvPr id="3" name="">
             <a:extLst xmlns:a="http://schemas.openxmlformats.org/drawingml/2006/main">
               <a:ext uri="{FF2B5EF4-FFF2-40B4-BE49-F238E27FC236}">
-                <a16:creationId xmlns:a16="http://schemas.microsoft.com/office/drawing/2014/main" id="{168DC122-D8D7-4112-8939-777E4F12D08E}"/>
+                <a16:creationId xmlns:a16="http://schemas.microsoft.com/office/drawing/2014/main" id="{D1A445E4-2685-4879-92E9-F55C728D079A}"/>
               </a:ext>
             </a:extLst>
           </p:cNvPr>
@@ -7285,7 +7285,7 @@
           <p:cNvPr id="4" name="">
             <a:extLst xmlns:a="http://schemas.openxmlformats.org/drawingml/2006/main">
               <a:ext uri="{FF2B5EF4-FFF2-40B4-BE49-F238E27FC236}">
-                <a16:creationId xmlns:a16="http://schemas.microsoft.com/office/drawing/2014/main" id="{8015512B-CBFC-43E0-A65C-1D05E72439DE}"/>
+                <a16:creationId xmlns:a16="http://schemas.microsoft.com/office/drawing/2014/main" id="{4AFB389C-C218-4D05-968E-370746594E28}"/>
               </a:ext>
             </a:extLst>
           </p:cNvPr>
@@ -7347,7 +7347,7 @@
           <p:cNvPr id="5" name="">
             <a:extLst xmlns:a="http://schemas.openxmlformats.org/drawingml/2006/main">
               <a:ext uri="{FF2B5EF4-FFF2-40B4-BE49-F238E27FC236}">
-                <a16:creationId xmlns:a16="http://schemas.microsoft.com/office/drawing/2014/main" id="{D2386243-04CC-4A4B-92BB-7F923D060359}"/>
+                <a16:creationId xmlns:a16="http://schemas.microsoft.com/office/drawing/2014/main" id="{006C9B6E-8A29-469D-B667-EDCEC7BEAC86}"/>
               </a:ext>
             </a:extLst>
           </p:cNvPr>
@@ -7378,7 +7378,7 @@
           <p:cNvPr id="6" name="">
             <a:extLst xmlns:a="http://schemas.openxmlformats.org/drawingml/2006/main">
               <a:ext uri="{FF2B5EF4-FFF2-40B4-BE49-F238E27FC236}">
-                <a16:creationId xmlns:a16="http://schemas.microsoft.com/office/drawing/2014/main" id="{EFF6079C-7740-4EEE-A2DE-1FD9E00B1178}"/>
+                <a16:creationId xmlns:a16="http://schemas.microsoft.com/office/drawing/2014/main" id="{A9F14B60-F71F-4DFA-96D5-BBDA838E1493}"/>
               </a:ext>
             </a:extLst>
           </p:cNvPr>
@@ -7440,7 +7440,7 @@
           <p:cNvPr id="7" name="">
             <a:extLst xmlns:a="http://schemas.openxmlformats.org/drawingml/2006/main">
               <a:ext uri="{FF2B5EF4-FFF2-40B4-BE49-F238E27FC236}">
-                <a16:creationId xmlns:a16="http://schemas.microsoft.com/office/drawing/2014/main" id="{18B335BD-BC6E-432E-A4F2-E416B75A1F52}"/>
+                <a16:creationId xmlns:a16="http://schemas.microsoft.com/office/drawing/2014/main" id="{BFF045DC-5F86-405F-98CC-A6A2F901A173}"/>
               </a:ext>
             </a:extLst>
           </p:cNvPr>
@@ -7473,7 +7473,7 @@
           <p:cNvPr id="8" name="">
             <a:extLst xmlns:a="http://schemas.openxmlformats.org/drawingml/2006/main">
               <a:ext uri="{FF2B5EF4-FFF2-40B4-BE49-F238E27FC236}">
-                <a16:creationId xmlns:a16="http://schemas.microsoft.com/office/drawing/2014/main" id="{FF065153-ACA1-442D-A557-514061835F6E}"/>
+                <a16:creationId xmlns:a16="http://schemas.microsoft.com/office/drawing/2014/main" id="{B6CEE24D-008F-4CFB-BB82-A53CA9B57B1B}"/>
               </a:ext>
             </a:extLst>
           </p:cNvPr>
@@ -7508,7 +7508,7 @@
           <p:cNvPr id="9" name="">
             <a:extLst xmlns:a="http://schemas.openxmlformats.org/drawingml/2006/main">
               <a:ext uri="{FF2B5EF4-FFF2-40B4-BE49-F238E27FC236}">
-                <a16:creationId xmlns:a16="http://schemas.microsoft.com/office/drawing/2014/main" id="{4A0E3F30-A2E1-4D1E-BF57-70CD0AD5624A}"/>
+                <a16:creationId xmlns:a16="http://schemas.microsoft.com/office/drawing/2014/main" id="{10D34870-AFAD-4F5F-83C1-7F9ACCADEFCA}"/>
               </a:ext>
             </a:extLst>
           </p:cNvPr>
@@ -7539,7 +7539,7 @@
           <p:cNvPr id="10" name="">
             <a:extLst xmlns:a="http://schemas.openxmlformats.org/drawingml/2006/main">
               <a:ext uri="{FF2B5EF4-FFF2-40B4-BE49-F238E27FC236}">
-                <a16:creationId xmlns:a16="http://schemas.microsoft.com/office/drawing/2014/main" id="{CC175677-F8EF-4C9B-AF38-054755F3F31A}"/>
+                <a16:creationId xmlns:a16="http://schemas.microsoft.com/office/drawing/2014/main" id="{08CEBABF-E39B-4C1B-98C5-8604AD938EA3}"/>
               </a:ext>
             </a:extLst>
           </p:cNvPr>
@@ -7601,7 +7601,7 @@
           <p:cNvPr id="11" name="">
             <a:extLst xmlns:a="http://schemas.openxmlformats.org/drawingml/2006/main">
               <a:ext uri="{FF2B5EF4-FFF2-40B4-BE49-F238E27FC236}">
-                <a16:creationId xmlns:a16="http://schemas.microsoft.com/office/drawing/2014/main" id="{91BACFA9-13A7-4B5F-9BBB-FE25D7309361}"/>
+                <a16:creationId xmlns:a16="http://schemas.microsoft.com/office/drawing/2014/main" id="{01D6B528-969A-4E57-8E26-28C64AE6C1E8}"/>
               </a:ext>
             </a:extLst>
           </p:cNvPr>
@@ -7663,7 +7663,7 @@
           <p:cNvPr id="12" name="">
             <a:extLst xmlns:a="http://schemas.openxmlformats.org/drawingml/2006/main">
               <a:ext uri="{FF2B5EF4-FFF2-40B4-BE49-F238E27FC236}">
-                <a16:creationId xmlns:a16="http://schemas.microsoft.com/office/drawing/2014/main" id="{D5B4C8D9-D511-406A-AA89-5B82FC4878E0}"/>
+                <a16:creationId xmlns:a16="http://schemas.microsoft.com/office/drawing/2014/main" id="{0797BEEF-819D-4635-9E4D-483BE738A4B3}"/>
               </a:ext>
             </a:extLst>
           </p:cNvPr>
@@ -7696,7 +7696,7 @@
           <p:cNvPr id="13" name="">
             <a:extLst xmlns:a="http://schemas.openxmlformats.org/drawingml/2006/main">
               <a:ext uri="{FF2B5EF4-FFF2-40B4-BE49-F238E27FC236}">
-                <a16:creationId xmlns:a16="http://schemas.microsoft.com/office/drawing/2014/main" id="{8BE73A52-0902-4FAD-B5C5-D36AAD1E5D0A}"/>
+                <a16:creationId xmlns:a16="http://schemas.microsoft.com/office/drawing/2014/main" id="{49EE7163-FBBD-43A1-86C1-3CCEE470C800}"/>
               </a:ext>
             </a:extLst>
           </p:cNvPr>
@@ -7731,7 +7731,7 @@
           <p:cNvPr id="14" name="">
             <a:extLst xmlns:a="http://schemas.openxmlformats.org/drawingml/2006/main">
               <a:ext uri="{FF2B5EF4-FFF2-40B4-BE49-F238E27FC236}">
-                <a16:creationId xmlns:a16="http://schemas.microsoft.com/office/drawing/2014/main" id="{CD7323CC-7AD0-4EBE-BE62-339136DC76ED}"/>
+                <a16:creationId xmlns:a16="http://schemas.microsoft.com/office/drawing/2014/main" id="{3B9BD362-EB64-462F-86EC-30757B9064C3}"/>
               </a:ext>
             </a:extLst>
           </p:cNvPr>
@@ -7762,7 +7762,7 @@
           <p:cNvPr id="15" name="">
             <a:extLst xmlns:a="http://schemas.openxmlformats.org/drawingml/2006/main">
               <a:ext uri="{FF2B5EF4-FFF2-40B4-BE49-F238E27FC236}">
-                <a16:creationId xmlns:a16="http://schemas.microsoft.com/office/drawing/2014/main" id="{90C326F1-F85A-46DB-A7FD-524D9EDB7E8B}"/>
+                <a16:creationId xmlns:a16="http://schemas.microsoft.com/office/drawing/2014/main" id="{83D32DC5-E9B0-4A81-A253-D5964BA9C8F2}"/>
               </a:ext>
             </a:extLst>
           </p:cNvPr>
@@ -7824,7 +7824,7 @@
           <p:cNvPr id="16" name="">
             <a:extLst xmlns:a="http://schemas.openxmlformats.org/drawingml/2006/main">
               <a:ext uri="{FF2B5EF4-FFF2-40B4-BE49-F238E27FC236}">
-                <a16:creationId xmlns:a16="http://schemas.microsoft.com/office/drawing/2014/main" id="{E18654ED-280D-40E5-BCE7-F62501852041}"/>
+                <a16:creationId xmlns:a16="http://schemas.microsoft.com/office/drawing/2014/main" id="{0D8D7ED5-9558-467E-A646-9710FB8D5876}"/>
               </a:ext>
             </a:extLst>
           </p:cNvPr>
@@ -7886,7 +7886,7 @@
           <p:cNvPr id="17" name="">
             <a:extLst xmlns:a="http://schemas.openxmlformats.org/drawingml/2006/main">
               <a:ext uri="{FF2B5EF4-FFF2-40B4-BE49-F238E27FC236}">
-                <a16:creationId xmlns:a16="http://schemas.microsoft.com/office/drawing/2014/main" id="{8F178EA6-D01D-4B5D-8128-5A2D5B8D3288}"/>
+                <a16:creationId xmlns:a16="http://schemas.microsoft.com/office/drawing/2014/main" id="{56904193-EFD3-4A80-9551-1AFCFEDD60F4}"/>
               </a:ext>
             </a:extLst>
           </p:cNvPr>
@@ -7948,7 +7948,7 @@
           <p:cNvPr id="18" name="">
             <a:extLst xmlns:a="http://schemas.openxmlformats.org/drawingml/2006/main">
               <a:ext uri="{FF2B5EF4-FFF2-40B4-BE49-F238E27FC236}">
-                <a16:creationId xmlns:a16="http://schemas.microsoft.com/office/drawing/2014/main" id="{4B270D7F-94A6-4B40-99C0-74B79DCD9D38}"/>
+                <a16:creationId xmlns:a16="http://schemas.microsoft.com/office/drawing/2014/main" id="{19C40062-03B7-486B-9DD5-043DB559EE4A}"/>
               </a:ext>
             </a:extLst>
           </p:cNvPr>
@@ -8008,7 +8008,7 @@
     </p:spTree>
     <p:extLst>
       <p:ext uri="{BB962C8B-B14F-4D97-AF65-F5344CB8AC3E}">
-        <p14:creationId xmlns:p14="http://schemas.microsoft.com/office/powerpoint/2010/main" val="1055194959"/>
+        <p14:creationId xmlns:p14="http://schemas.microsoft.com/office/powerpoint/2010/main" val="1536579073"/>
       </p:ext>
     </p:extLst>
   </p:cSld>
@@ -8036,7 +8036,7 @@
           <p:nvPr/>
         </p:nvPicPr>
         <p:blipFill>
-          <a:blip xmlns:r="http://schemas.openxmlformats.org/officeDocument/2006/relationships" xmlns:a="http://schemas.openxmlformats.org/drawingml/2006/main" r:embed="R2f981990061e465b"/>
+          <a:blip xmlns:r="http://schemas.openxmlformats.org/officeDocument/2006/relationships" xmlns:a="http://schemas.openxmlformats.org/drawingml/2006/main" r:embed="R2ada2f1a57034f58"/>
           <a:srcRect xmlns:a="http://schemas.openxmlformats.org/drawingml/2006/main" l="0" t="0" r="0" b="0"/>
           <a:stretch xmlns:a="http://schemas.openxmlformats.org/drawingml/2006/main">
             <a:fillRect l="0" t="0" r="0" b="0"/>
@@ -8057,7 +8057,7 @@
           <p:cNvPr id="2" name="">
             <a:extLst xmlns:a="http://schemas.openxmlformats.org/drawingml/2006/main">
               <a:ext uri="{FF2B5EF4-FFF2-40B4-BE49-F238E27FC236}">
-                <a16:creationId xmlns:a16="http://schemas.microsoft.com/office/drawing/2014/main" id="{924E2ACE-0622-4532-93DE-7DC5D8C0D370}"/>
+                <a16:creationId xmlns:a16="http://schemas.microsoft.com/office/drawing/2014/main" id="{39354725-7B56-4407-8E5E-F874E7EA8B14}"/>
               </a:ext>
             </a:extLst>
           </p:cNvPr>
@@ -8119,7 +8119,7 @@
           <p:cNvPr id="3" name="">
             <a:extLst xmlns:a="http://schemas.openxmlformats.org/drawingml/2006/main">
               <a:ext uri="{FF2B5EF4-FFF2-40B4-BE49-F238E27FC236}">
-                <a16:creationId xmlns:a16="http://schemas.microsoft.com/office/drawing/2014/main" id="{057BFBF9-1E08-4270-BEA9-BCF2FE9B3D44}"/>
+                <a16:creationId xmlns:a16="http://schemas.microsoft.com/office/drawing/2014/main" id="{DDBC6178-1369-4AF9-9670-E6772287701B}"/>
               </a:ext>
             </a:extLst>
           </p:cNvPr>
@@ -8181,7 +8181,7 @@
           <p:cNvPr id="4" name="">
             <a:extLst xmlns:a="http://schemas.openxmlformats.org/drawingml/2006/main">
               <a:ext uri="{FF2B5EF4-FFF2-40B4-BE49-F238E27FC236}">
-                <a16:creationId xmlns:a16="http://schemas.microsoft.com/office/drawing/2014/main" id="{37F40EF5-916C-488F-B03F-B6F329230B65}"/>
+                <a16:creationId xmlns:a16="http://schemas.microsoft.com/office/drawing/2014/main" id="{50CB578B-7A8A-4DA9-AB37-4F3D4405534D}"/>
               </a:ext>
             </a:extLst>
           </p:cNvPr>
@@ -8243,7 +8243,7 @@
           <p:cNvPr id="5" name="">
             <a:extLst xmlns:a="http://schemas.openxmlformats.org/drawingml/2006/main">
               <a:ext uri="{FF2B5EF4-FFF2-40B4-BE49-F238E27FC236}">
-                <a16:creationId xmlns:a16="http://schemas.microsoft.com/office/drawing/2014/main" id="{6C0CC48A-689F-4709-879A-70AAF555ABD1}"/>
+                <a16:creationId xmlns:a16="http://schemas.microsoft.com/office/drawing/2014/main" id="{4E20AE2A-14AC-4395-B83A-9B2C8D69918E}"/>
               </a:ext>
             </a:extLst>
           </p:cNvPr>
@@ -8274,7 +8274,7 @@
           <p:cNvPr id="6" name="">
             <a:extLst xmlns:a="http://schemas.openxmlformats.org/drawingml/2006/main">
               <a:ext uri="{FF2B5EF4-FFF2-40B4-BE49-F238E27FC236}">
-                <a16:creationId xmlns:a16="http://schemas.microsoft.com/office/drawing/2014/main" id="{0A552BF4-725A-4926-BFE5-5CFFB46E1B9F}"/>
+                <a16:creationId xmlns:a16="http://schemas.microsoft.com/office/drawing/2014/main" id="{EE3CFF4F-AD29-4C93-A18E-AA99690C98E9}"/>
               </a:ext>
             </a:extLst>
           </p:cNvPr>
@@ -8336,7 +8336,7 @@
           <p:cNvPr id="7" name="">
             <a:extLst xmlns:a="http://schemas.openxmlformats.org/drawingml/2006/main">
               <a:ext uri="{FF2B5EF4-FFF2-40B4-BE49-F238E27FC236}">
-                <a16:creationId xmlns:a16="http://schemas.microsoft.com/office/drawing/2014/main" id="{D92BBB8D-7F4F-450D-929E-E6DA187CA25F}"/>
+                <a16:creationId xmlns:a16="http://schemas.microsoft.com/office/drawing/2014/main" id="{A8046A87-7481-4321-AAA6-276076FC471B}"/>
               </a:ext>
             </a:extLst>
           </p:cNvPr>
@@ -8369,7 +8369,7 @@
           <p:cNvPr id="8" name="">
             <a:extLst xmlns:a="http://schemas.openxmlformats.org/drawingml/2006/main">
               <a:ext uri="{FF2B5EF4-FFF2-40B4-BE49-F238E27FC236}">
-                <a16:creationId xmlns:a16="http://schemas.microsoft.com/office/drawing/2014/main" id="{4C8B893F-58B3-4524-B96B-EF08337E045E}"/>
+                <a16:creationId xmlns:a16="http://schemas.microsoft.com/office/drawing/2014/main" id="{BEEB8A6D-3ED3-4CC9-AAF9-8292666D01DB}"/>
               </a:ext>
             </a:extLst>
           </p:cNvPr>
@@ -8404,7 +8404,7 @@
           <p:cNvPr id="9" name="">
             <a:extLst xmlns:a="http://schemas.openxmlformats.org/drawingml/2006/main">
               <a:ext uri="{FF2B5EF4-FFF2-40B4-BE49-F238E27FC236}">
-                <a16:creationId xmlns:a16="http://schemas.microsoft.com/office/drawing/2014/main" id="{6A14650F-7A57-431C-8B25-EBB9AD5E5A33}"/>
+                <a16:creationId xmlns:a16="http://schemas.microsoft.com/office/drawing/2014/main" id="{307836D5-C2B3-4494-B484-1D0B2984C2F9}"/>
               </a:ext>
             </a:extLst>
           </p:cNvPr>
@@ -8435,7 +8435,7 @@
           <p:cNvPr id="10" name="">
             <a:extLst xmlns:a="http://schemas.openxmlformats.org/drawingml/2006/main">
               <a:ext uri="{FF2B5EF4-FFF2-40B4-BE49-F238E27FC236}">
-                <a16:creationId xmlns:a16="http://schemas.microsoft.com/office/drawing/2014/main" id="{BD64A1AD-5857-49FA-B107-B629A5C83D94}"/>
+                <a16:creationId xmlns:a16="http://schemas.microsoft.com/office/drawing/2014/main" id="{866078B2-0FB8-45FE-9D2A-CC0A48B4111D}"/>
               </a:ext>
             </a:extLst>
           </p:cNvPr>
@@ -8497,7 +8497,7 @@
           <p:cNvPr id="11" name="">
             <a:extLst xmlns:a="http://schemas.openxmlformats.org/drawingml/2006/main">
               <a:ext uri="{FF2B5EF4-FFF2-40B4-BE49-F238E27FC236}">
-                <a16:creationId xmlns:a16="http://schemas.microsoft.com/office/drawing/2014/main" id="{479CA2B0-E35E-4F69-9EFC-4B3AE1634FE2}"/>
+                <a16:creationId xmlns:a16="http://schemas.microsoft.com/office/drawing/2014/main" id="{9276C220-9EA4-4824-AD48-A1C6933E9B57}"/>
               </a:ext>
             </a:extLst>
           </p:cNvPr>
@@ -8559,7 +8559,7 @@
           <p:cNvPr id="12" name="">
             <a:extLst xmlns:a="http://schemas.openxmlformats.org/drawingml/2006/main">
               <a:ext uri="{FF2B5EF4-FFF2-40B4-BE49-F238E27FC236}">
-                <a16:creationId xmlns:a16="http://schemas.microsoft.com/office/drawing/2014/main" id="{76C66C23-547F-4BF4-BF6A-2BB55E9B58C6}"/>
+                <a16:creationId xmlns:a16="http://schemas.microsoft.com/office/drawing/2014/main" id="{F995D7A3-D369-41E1-AC2E-F224E5332F2C}"/>
               </a:ext>
             </a:extLst>
           </p:cNvPr>
@@ -8592,7 +8592,7 @@
           <p:cNvPr id="13" name="">
             <a:extLst xmlns:a="http://schemas.openxmlformats.org/drawingml/2006/main">
               <a:ext uri="{FF2B5EF4-FFF2-40B4-BE49-F238E27FC236}">
-                <a16:creationId xmlns:a16="http://schemas.microsoft.com/office/drawing/2014/main" id="{3B0B2D8E-EE1B-47BD-94EC-A12320DFF304}"/>
+                <a16:creationId xmlns:a16="http://schemas.microsoft.com/office/drawing/2014/main" id="{50689284-5EB0-419E-86BA-9EECC546B2C3}"/>
               </a:ext>
             </a:extLst>
           </p:cNvPr>
@@ -8627,7 +8627,7 @@
           <p:cNvPr id="14" name="">
             <a:extLst xmlns:a="http://schemas.openxmlformats.org/drawingml/2006/main">
               <a:ext uri="{FF2B5EF4-FFF2-40B4-BE49-F238E27FC236}">
-                <a16:creationId xmlns:a16="http://schemas.microsoft.com/office/drawing/2014/main" id="{9227BE34-072B-46BE-A682-0981CE2DF00E}"/>
+                <a16:creationId xmlns:a16="http://schemas.microsoft.com/office/drawing/2014/main" id="{42213A1F-0312-4505-8BD3-2A22B5CB18C1}"/>
               </a:ext>
             </a:extLst>
           </p:cNvPr>
@@ -8658,7 +8658,7 @@
           <p:cNvPr id="15" name="">
             <a:extLst xmlns:a="http://schemas.openxmlformats.org/drawingml/2006/main">
               <a:ext uri="{FF2B5EF4-FFF2-40B4-BE49-F238E27FC236}">
-                <a16:creationId xmlns:a16="http://schemas.microsoft.com/office/drawing/2014/main" id="{03703EDB-0069-4481-BE6A-E862081A21A0}"/>
+                <a16:creationId xmlns:a16="http://schemas.microsoft.com/office/drawing/2014/main" id="{B2D6400D-2D45-4D0D-9857-A0B35E0C5043}"/>
               </a:ext>
             </a:extLst>
           </p:cNvPr>
@@ -8720,7 +8720,7 @@
           <p:cNvPr id="16" name="">
             <a:extLst xmlns:a="http://schemas.openxmlformats.org/drawingml/2006/main">
               <a:ext uri="{FF2B5EF4-FFF2-40B4-BE49-F238E27FC236}">
-                <a16:creationId xmlns:a16="http://schemas.microsoft.com/office/drawing/2014/main" id="{C6572FA2-C2D5-4787-ACE8-2BD725A0FBD0}"/>
+                <a16:creationId xmlns:a16="http://schemas.microsoft.com/office/drawing/2014/main" id="{03822B4D-FA30-4247-B08B-686171DD7932}"/>
               </a:ext>
             </a:extLst>
           </p:cNvPr>
@@ -8782,7 +8782,7 @@
           <p:cNvPr id="17" name="">
             <a:extLst xmlns:a="http://schemas.openxmlformats.org/drawingml/2006/main">
               <a:ext uri="{FF2B5EF4-FFF2-40B4-BE49-F238E27FC236}">
-                <a16:creationId xmlns:a16="http://schemas.microsoft.com/office/drawing/2014/main" id="{ADB5B6E2-D9F9-49F0-90F0-57DDDA57DCCD}"/>
+                <a16:creationId xmlns:a16="http://schemas.microsoft.com/office/drawing/2014/main" id="{0E5C6443-8419-4080-B5B5-1EBBFDF91095}"/>
               </a:ext>
             </a:extLst>
           </p:cNvPr>
@@ -8844,7 +8844,7 @@
           <p:cNvPr id="18" name="">
             <a:extLst xmlns:a="http://schemas.openxmlformats.org/drawingml/2006/main">
               <a:ext uri="{FF2B5EF4-FFF2-40B4-BE49-F238E27FC236}">
-                <a16:creationId xmlns:a16="http://schemas.microsoft.com/office/drawing/2014/main" id="{F8C8A54E-5CBF-4311-92EC-93436A332D16}"/>
+                <a16:creationId xmlns:a16="http://schemas.microsoft.com/office/drawing/2014/main" id="{DA4322FB-5E1E-464A-B35F-9FD5F8DA63FE}"/>
               </a:ext>
             </a:extLst>
           </p:cNvPr>
@@ -8904,7 +8904,7 @@
     </p:spTree>
     <p:extLst>
       <p:ext uri="{BB962C8B-B14F-4D97-AF65-F5344CB8AC3E}">
-        <p14:creationId xmlns:p14="http://schemas.microsoft.com/office/powerpoint/2010/main" val="902098233"/>
+        <p14:creationId xmlns:p14="http://schemas.microsoft.com/office/powerpoint/2010/main" val="1169200673"/>
       </p:ext>
     </p:extLst>
   </p:cSld>
@@ -8932,7 +8932,7 @@
           <p:nvPr/>
         </p:nvPicPr>
         <p:blipFill>
-          <a:blip xmlns:r="http://schemas.openxmlformats.org/officeDocument/2006/relationships" xmlns:a="http://schemas.openxmlformats.org/drawingml/2006/main" r:embed="R15433641afed4c87"/>
+          <a:blip xmlns:r="http://schemas.openxmlformats.org/officeDocument/2006/relationships" xmlns:a="http://schemas.openxmlformats.org/drawingml/2006/main" r:embed="Re18f49e87d56412c"/>
           <a:srcRect xmlns:a="http://schemas.openxmlformats.org/drawingml/2006/main" l="0" t="0" r="0" b="0"/>
           <a:stretch xmlns:a="http://schemas.openxmlformats.org/drawingml/2006/main">
             <a:fillRect l="0" t="0" r="0" b="0"/>
@@ -8953,7 +8953,7 @@
           <p:cNvPr id="2" name="">
             <a:extLst xmlns:a="http://schemas.openxmlformats.org/drawingml/2006/main">
               <a:ext uri="{FF2B5EF4-FFF2-40B4-BE49-F238E27FC236}">
-                <a16:creationId xmlns:a16="http://schemas.microsoft.com/office/drawing/2014/main" id="{4EEDCA50-ECD3-4D34-B026-7DCB89E21D4F}"/>
+                <a16:creationId xmlns:a16="http://schemas.microsoft.com/office/drawing/2014/main" id="{ADB277AC-5E2A-422C-B0AB-C99EFB73CCD7}"/>
               </a:ext>
             </a:extLst>
           </p:cNvPr>
@@ -9015,7 +9015,7 @@
           <p:cNvPr id="3" name="">
             <a:extLst xmlns:a="http://schemas.openxmlformats.org/drawingml/2006/main">
               <a:ext uri="{FF2B5EF4-FFF2-40B4-BE49-F238E27FC236}">
-                <a16:creationId xmlns:a16="http://schemas.microsoft.com/office/drawing/2014/main" id="{50B96238-41D5-4095-A43C-E9D0038702AE}"/>
+                <a16:creationId xmlns:a16="http://schemas.microsoft.com/office/drawing/2014/main" id="{149F9AF0-B083-42DD-BB5E-44664DC46664}"/>
               </a:ext>
             </a:extLst>
           </p:cNvPr>
@@ -9077,7 +9077,7 @@
           <p:cNvPr id="4" name="">
             <a:extLst xmlns:a="http://schemas.openxmlformats.org/drawingml/2006/main">
               <a:ext uri="{FF2B5EF4-FFF2-40B4-BE49-F238E27FC236}">
-                <a16:creationId xmlns:a16="http://schemas.microsoft.com/office/drawing/2014/main" id="{EDB8C159-5136-46AC-9AEF-C359ABCA4216}"/>
+                <a16:creationId xmlns:a16="http://schemas.microsoft.com/office/drawing/2014/main" id="{AED6A843-5A0B-48B6-A53D-AD0124BDE0D3}"/>
               </a:ext>
             </a:extLst>
           </p:cNvPr>
@@ -9139,7 +9139,7 @@
           <p:cNvPr id="5" name="">
             <a:extLst xmlns:a="http://schemas.openxmlformats.org/drawingml/2006/main">
               <a:ext uri="{FF2B5EF4-FFF2-40B4-BE49-F238E27FC236}">
-                <a16:creationId xmlns:a16="http://schemas.microsoft.com/office/drawing/2014/main" id="{AFCECC46-3576-4FEE-BF18-7857CC904AF8}"/>
+                <a16:creationId xmlns:a16="http://schemas.microsoft.com/office/drawing/2014/main" id="{C93976D9-33FC-48A0-9858-0EE988ADC178}"/>
               </a:ext>
             </a:extLst>
           </p:cNvPr>
@@ -9170,7 +9170,7 @@
           <p:cNvPr id="6" name="">
             <a:extLst xmlns:a="http://schemas.openxmlformats.org/drawingml/2006/main">
               <a:ext uri="{FF2B5EF4-FFF2-40B4-BE49-F238E27FC236}">
-                <a16:creationId xmlns:a16="http://schemas.microsoft.com/office/drawing/2014/main" id="{70CCB5E0-BFF9-4D6C-A236-9F3C6061EB0F}"/>
+                <a16:creationId xmlns:a16="http://schemas.microsoft.com/office/drawing/2014/main" id="{460D7ACF-20A0-4BFD-B7C5-FA25A85785BE}"/>
               </a:ext>
             </a:extLst>
           </p:cNvPr>
@@ -9232,7 +9232,7 @@
           <p:cNvPr id="7" name="">
             <a:extLst xmlns:a="http://schemas.openxmlformats.org/drawingml/2006/main">
               <a:ext uri="{FF2B5EF4-FFF2-40B4-BE49-F238E27FC236}">
-                <a16:creationId xmlns:a16="http://schemas.microsoft.com/office/drawing/2014/main" id="{C2CAF806-F6DA-46BD-921B-BBAE340FA43E}"/>
+                <a16:creationId xmlns:a16="http://schemas.microsoft.com/office/drawing/2014/main" id="{DBE898BD-D2DD-4918-9197-BECED2A172B4}"/>
               </a:ext>
             </a:extLst>
           </p:cNvPr>
@@ -9265,7 +9265,7 @@
           <p:cNvPr id="8" name="">
             <a:extLst xmlns:a="http://schemas.openxmlformats.org/drawingml/2006/main">
               <a:ext uri="{FF2B5EF4-FFF2-40B4-BE49-F238E27FC236}">
-                <a16:creationId xmlns:a16="http://schemas.microsoft.com/office/drawing/2014/main" id="{5F99D53B-6ED8-464F-9F0C-CC6B4105B29B}"/>
+                <a16:creationId xmlns:a16="http://schemas.microsoft.com/office/drawing/2014/main" id="{08106342-8C2C-4640-907B-0C72D820F5FC}"/>
               </a:ext>
             </a:extLst>
           </p:cNvPr>
@@ -9300,7 +9300,7 @@
           <p:cNvPr id="9" name="">
             <a:extLst xmlns:a="http://schemas.openxmlformats.org/drawingml/2006/main">
               <a:ext uri="{FF2B5EF4-FFF2-40B4-BE49-F238E27FC236}">
-                <a16:creationId xmlns:a16="http://schemas.microsoft.com/office/drawing/2014/main" id="{451B3CE9-B4ED-4BA4-AEFF-8579F71EFEFC}"/>
+                <a16:creationId xmlns:a16="http://schemas.microsoft.com/office/drawing/2014/main" id="{7A5240D4-06D3-4F32-A6A4-072A2563D1BD}"/>
               </a:ext>
             </a:extLst>
           </p:cNvPr>
@@ -9331,7 +9331,7 @@
           <p:cNvPr id="10" name="">
             <a:extLst xmlns:a="http://schemas.openxmlformats.org/drawingml/2006/main">
               <a:ext uri="{FF2B5EF4-FFF2-40B4-BE49-F238E27FC236}">
-                <a16:creationId xmlns:a16="http://schemas.microsoft.com/office/drawing/2014/main" id="{C86A2356-D3AD-4D1C-BC0E-54923C1D830E}"/>
+                <a16:creationId xmlns:a16="http://schemas.microsoft.com/office/drawing/2014/main" id="{9DC2B74B-BCFA-4BEA-AE5F-677A3BA7CD1D}"/>
               </a:ext>
             </a:extLst>
           </p:cNvPr>
@@ -9393,7 +9393,7 @@
           <p:cNvPr id="11" name="">
             <a:extLst xmlns:a="http://schemas.openxmlformats.org/drawingml/2006/main">
               <a:ext uri="{FF2B5EF4-FFF2-40B4-BE49-F238E27FC236}">
-                <a16:creationId xmlns:a16="http://schemas.microsoft.com/office/drawing/2014/main" id="{7714C130-43EB-4827-845D-F976E14D4909}"/>
+                <a16:creationId xmlns:a16="http://schemas.microsoft.com/office/drawing/2014/main" id="{D34740CA-4574-474B-9854-7857E863A916}"/>
               </a:ext>
             </a:extLst>
           </p:cNvPr>
@@ -9455,7 +9455,7 @@
           <p:cNvPr id="12" name="">
             <a:extLst xmlns:a="http://schemas.openxmlformats.org/drawingml/2006/main">
               <a:ext uri="{FF2B5EF4-FFF2-40B4-BE49-F238E27FC236}">
-                <a16:creationId xmlns:a16="http://schemas.microsoft.com/office/drawing/2014/main" id="{2426218C-D34B-42C1-BBBA-5F79D8FBD40B}"/>
+                <a16:creationId xmlns:a16="http://schemas.microsoft.com/office/drawing/2014/main" id="{AF22084E-B846-45FC-931B-FB5270D3C5E0}"/>
               </a:ext>
             </a:extLst>
           </p:cNvPr>
@@ -9517,7 +9517,7 @@
           <p:cNvPr id="13" name="">
             <a:extLst xmlns:a="http://schemas.openxmlformats.org/drawingml/2006/main">
               <a:ext uri="{FF2B5EF4-FFF2-40B4-BE49-F238E27FC236}">
-                <a16:creationId xmlns:a16="http://schemas.microsoft.com/office/drawing/2014/main" id="{C3535EB0-BD47-4298-AA94-7803BCA84C6A}"/>
+                <a16:creationId xmlns:a16="http://schemas.microsoft.com/office/drawing/2014/main" id="{7B2D5E36-596E-424D-8B49-0C98C436B84E}"/>
               </a:ext>
             </a:extLst>
           </p:cNvPr>
@@ -9550,7 +9550,7 @@
           <p:cNvPr id="14" name="">
             <a:extLst xmlns:a="http://schemas.openxmlformats.org/drawingml/2006/main">
               <a:ext uri="{FF2B5EF4-FFF2-40B4-BE49-F238E27FC236}">
-                <a16:creationId xmlns:a16="http://schemas.microsoft.com/office/drawing/2014/main" id="{7FF05BF7-FCAB-4917-BBB4-922E19CC9E49}"/>
+                <a16:creationId xmlns:a16="http://schemas.microsoft.com/office/drawing/2014/main" id="{8CFBEB2E-3D02-4E13-AE73-0449A4514DD2}"/>
               </a:ext>
             </a:extLst>
           </p:cNvPr>
@@ -9585,7 +9585,7 @@
           <p:cNvPr id="15" name="">
             <a:extLst xmlns:a="http://schemas.openxmlformats.org/drawingml/2006/main">
               <a:ext uri="{FF2B5EF4-FFF2-40B4-BE49-F238E27FC236}">
-                <a16:creationId xmlns:a16="http://schemas.microsoft.com/office/drawing/2014/main" id="{522EB28E-1C90-4351-A10A-8291553AF807}"/>
+                <a16:creationId xmlns:a16="http://schemas.microsoft.com/office/drawing/2014/main" id="{9C73B165-B8AE-4669-9B1D-27428D7A1875}"/>
               </a:ext>
             </a:extLst>
           </p:cNvPr>
@@ -9616,7 +9616,7 @@
           <p:cNvPr id="16" name="">
             <a:extLst xmlns:a="http://schemas.openxmlformats.org/drawingml/2006/main">
               <a:ext uri="{FF2B5EF4-FFF2-40B4-BE49-F238E27FC236}">
-                <a16:creationId xmlns:a16="http://schemas.microsoft.com/office/drawing/2014/main" id="{990F1A44-BE27-41F5-A32F-20B82C36AA93}"/>
+                <a16:creationId xmlns:a16="http://schemas.microsoft.com/office/drawing/2014/main" id="{F12C2CB0-F0DC-4B0B-9770-09B79BCCF94A}"/>
               </a:ext>
             </a:extLst>
           </p:cNvPr>
@@ -9678,7 +9678,7 @@
           <p:cNvPr id="17" name="">
             <a:extLst xmlns:a="http://schemas.openxmlformats.org/drawingml/2006/main">
               <a:ext uri="{FF2B5EF4-FFF2-40B4-BE49-F238E27FC236}">
-                <a16:creationId xmlns:a16="http://schemas.microsoft.com/office/drawing/2014/main" id="{5D7E30E2-4C5B-46D9-8252-B1CCBAC233C7}"/>
+                <a16:creationId xmlns:a16="http://schemas.microsoft.com/office/drawing/2014/main" id="{ECAB2442-28D5-4424-BB0A-A9B16D32E757}"/>
               </a:ext>
             </a:extLst>
           </p:cNvPr>
@@ -9740,7 +9740,7 @@
           <p:cNvPr id="18" name="">
             <a:extLst xmlns:a="http://schemas.openxmlformats.org/drawingml/2006/main">
               <a:ext uri="{FF2B5EF4-FFF2-40B4-BE49-F238E27FC236}">
-                <a16:creationId xmlns:a16="http://schemas.microsoft.com/office/drawing/2014/main" id="{3745E228-A174-4F86-8565-4F521F977977}"/>
+                <a16:creationId xmlns:a16="http://schemas.microsoft.com/office/drawing/2014/main" id="{86BD8467-0CFB-4ACD-B3B1-278023242A8D}"/>
               </a:ext>
             </a:extLst>
           </p:cNvPr>
@@ -9802,7 +9802,7 @@
           <p:cNvPr id="19" name="">
             <a:extLst xmlns:a="http://schemas.openxmlformats.org/drawingml/2006/main">
               <a:ext uri="{FF2B5EF4-FFF2-40B4-BE49-F238E27FC236}">
-                <a16:creationId xmlns:a16="http://schemas.microsoft.com/office/drawing/2014/main" id="{F2E45922-A7A2-4792-8368-D49C8E8053F4}"/>
+                <a16:creationId xmlns:a16="http://schemas.microsoft.com/office/drawing/2014/main" id="{1E7A2B5A-8D43-4297-8595-20717F30ADFD}"/>
               </a:ext>
             </a:extLst>
           </p:cNvPr>
@@ -9835,7 +9835,7 @@
           <p:cNvPr id="20" name="">
             <a:extLst xmlns:a="http://schemas.openxmlformats.org/drawingml/2006/main">
               <a:ext uri="{FF2B5EF4-FFF2-40B4-BE49-F238E27FC236}">
-                <a16:creationId xmlns:a16="http://schemas.microsoft.com/office/drawing/2014/main" id="{B8BB3F8B-797E-4C6B-AF30-5D491FF7F62C}"/>
+                <a16:creationId xmlns:a16="http://schemas.microsoft.com/office/drawing/2014/main" id="{DAB11086-07DF-493F-B4B8-98651631DC9A}"/>
               </a:ext>
             </a:extLst>
           </p:cNvPr>
@@ -9870,7 +9870,7 @@
           <p:cNvPr id="21" name="">
             <a:extLst xmlns:a="http://schemas.openxmlformats.org/drawingml/2006/main">
               <a:ext uri="{FF2B5EF4-FFF2-40B4-BE49-F238E27FC236}">
-                <a16:creationId xmlns:a16="http://schemas.microsoft.com/office/drawing/2014/main" id="{794F8C54-C2F8-4DAA-9A1B-078D2C8DC77A}"/>
+                <a16:creationId xmlns:a16="http://schemas.microsoft.com/office/drawing/2014/main" id="{610DF8C5-9C65-406D-9E7D-49E0063B1E4A}"/>
               </a:ext>
             </a:extLst>
           </p:cNvPr>
@@ -9901,7 +9901,7 @@
           <p:cNvPr id="22" name="">
             <a:extLst xmlns:a="http://schemas.openxmlformats.org/drawingml/2006/main">
               <a:ext uri="{FF2B5EF4-FFF2-40B4-BE49-F238E27FC236}">
-                <a16:creationId xmlns:a16="http://schemas.microsoft.com/office/drawing/2014/main" id="{0E059C58-1649-4DB7-A874-16F2CAE2AACD}"/>
+                <a16:creationId xmlns:a16="http://schemas.microsoft.com/office/drawing/2014/main" id="{B1F69993-B8AC-45E1-A6A5-754A530D9F86}"/>
               </a:ext>
             </a:extLst>
           </p:cNvPr>
@@ -9963,7 +9963,7 @@
           <p:cNvPr id="23" name="">
             <a:extLst xmlns:a="http://schemas.openxmlformats.org/drawingml/2006/main">
               <a:ext uri="{FF2B5EF4-FFF2-40B4-BE49-F238E27FC236}">
-                <a16:creationId xmlns:a16="http://schemas.microsoft.com/office/drawing/2014/main" id="{6EAE8E5E-A0E1-4B8D-97B5-1F01800D5E91}"/>
+                <a16:creationId xmlns:a16="http://schemas.microsoft.com/office/drawing/2014/main" id="{FC03E2C7-A9CA-4E9D-97B9-7D533A75D863}"/>
               </a:ext>
             </a:extLst>
           </p:cNvPr>
@@ -10025,7 +10025,7 @@
           <p:cNvPr id="24" name="">
             <a:extLst xmlns:a="http://schemas.openxmlformats.org/drawingml/2006/main">
               <a:ext uri="{FF2B5EF4-FFF2-40B4-BE49-F238E27FC236}">
-                <a16:creationId xmlns:a16="http://schemas.microsoft.com/office/drawing/2014/main" id="{8F4D1AAC-D2BB-4F5B-9435-E0872625D290}"/>
+                <a16:creationId xmlns:a16="http://schemas.microsoft.com/office/drawing/2014/main" id="{5E255379-A3E7-4AC2-9A4D-BF0CC7F0D7F7}"/>
               </a:ext>
             </a:extLst>
           </p:cNvPr>
@@ -10087,7 +10087,7 @@
           <p:cNvPr id="25" name="">
             <a:extLst xmlns:a="http://schemas.openxmlformats.org/drawingml/2006/main">
               <a:ext uri="{FF2B5EF4-FFF2-40B4-BE49-F238E27FC236}">
-                <a16:creationId xmlns:a16="http://schemas.microsoft.com/office/drawing/2014/main" id="{7E147F59-B133-42B3-9C39-9B37815A5326}"/>
+                <a16:creationId xmlns:a16="http://schemas.microsoft.com/office/drawing/2014/main" id="{F72C0B6E-3044-441E-9D71-07CA4E7D057F}"/>
               </a:ext>
             </a:extLst>
           </p:cNvPr>
@@ -10120,7 +10120,7 @@
           <p:cNvPr id="26" name="">
             <a:extLst xmlns:a="http://schemas.openxmlformats.org/drawingml/2006/main">
               <a:ext uri="{FF2B5EF4-FFF2-40B4-BE49-F238E27FC236}">
-                <a16:creationId xmlns:a16="http://schemas.microsoft.com/office/drawing/2014/main" id="{F73B0AD5-09AA-4B55-A2CB-7B68302554DB}"/>
+                <a16:creationId xmlns:a16="http://schemas.microsoft.com/office/drawing/2014/main" id="{7730ADC3-71E6-4162-9F25-F8614ECD38ED}"/>
               </a:ext>
             </a:extLst>
           </p:cNvPr>
@@ -10155,7 +10155,7 @@
           <p:cNvPr id="27" name="">
             <a:extLst xmlns:a="http://schemas.openxmlformats.org/drawingml/2006/main">
               <a:ext uri="{FF2B5EF4-FFF2-40B4-BE49-F238E27FC236}">
-                <a16:creationId xmlns:a16="http://schemas.microsoft.com/office/drawing/2014/main" id="{47B79DC4-EE75-4164-A0BF-30F4EA133062}"/>
+                <a16:creationId xmlns:a16="http://schemas.microsoft.com/office/drawing/2014/main" id="{F48D48BB-DF4F-467E-B812-8EDF598ADADC}"/>
               </a:ext>
             </a:extLst>
           </p:cNvPr>
@@ -10186,7 +10186,7 @@
           <p:cNvPr id="28" name="">
             <a:extLst xmlns:a="http://schemas.openxmlformats.org/drawingml/2006/main">
               <a:ext uri="{FF2B5EF4-FFF2-40B4-BE49-F238E27FC236}">
-                <a16:creationId xmlns:a16="http://schemas.microsoft.com/office/drawing/2014/main" id="{B9AE6300-BF2E-44D4-9E35-6FE3D75C4CBA}"/>
+                <a16:creationId xmlns:a16="http://schemas.microsoft.com/office/drawing/2014/main" id="{BAA99B9E-CBA8-4DE7-AF90-590EBE7C0BCF}"/>
               </a:ext>
             </a:extLst>
           </p:cNvPr>
@@ -10248,7 +10248,7 @@
           <p:cNvPr id="29" name="">
             <a:extLst xmlns:a="http://schemas.openxmlformats.org/drawingml/2006/main">
               <a:ext uri="{FF2B5EF4-FFF2-40B4-BE49-F238E27FC236}">
-                <a16:creationId xmlns:a16="http://schemas.microsoft.com/office/drawing/2014/main" id="{DBC5125C-128D-435F-8C33-4D511DCBBC8E}"/>
+                <a16:creationId xmlns:a16="http://schemas.microsoft.com/office/drawing/2014/main" id="{F5338D45-F2F7-4F89-8DDD-1C00E9056FA3}"/>
               </a:ext>
             </a:extLst>
           </p:cNvPr>
@@ -10310,7 +10310,7 @@
           <p:cNvPr id="30" name="">
             <a:extLst xmlns:a="http://schemas.openxmlformats.org/drawingml/2006/main">
               <a:ext uri="{FF2B5EF4-FFF2-40B4-BE49-F238E27FC236}">
-                <a16:creationId xmlns:a16="http://schemas.microsoft.com/office/drawing/2014/main" id="{546ADA94-5367-425E-A076-AE5490F67AF9}"/>
+                <a16:creationId xmlns:a16="http://schemas.microsoft.com/office/drawing/2014/main" id="{F2589048-DD28-4E11-A16C-F5B11465F432}"/>
               </a:ext>
             </a:extLst>
           </p:cNvPr>
@@ -10372,7 +10372,7 @@
           <p:cNvPr id="31" name="">
             <a:extLst xmlns:a="http://schemas.openxmlformats.org/drawingml/2006/main">
               <a:ext uri="{FF2B5EF4-FFF2-40B4-BE49-F238E27FC236}">
-                <a16:creationId xmlns:a16="http://schemas.microsoft.com/office/drawing/2014/main" id="{636A3D8F-CD55-45F3-BDB5-66D0B51B0B89}"/>
+                <a16:creationId xmlns:a16="http://schemas.microsoft.com/office/drawing/2014/main" id="{3EDE4CC4-8D28-4168-9C7F-E3AF05B88AF1}"/>
               </a:ext>
             </a:extLst>
           </p:cNvPr>
@@ -10434,7 +10434,7 @@
           <p:cNvPr id="32" name="">
             <a:extLst xmlns:a="http://schemas.openxmlformats.org/drawingml/2006/main">
               <a:ext uri="{FF2B5EF4-FFF2-40B4-BE49-F238E27FC236}">
-                <a16:creationId xmlns:a16="http://schemas.microsoft.com/office/drawing/2014/main" id="{D1E0FC25-034D-40B5-97DC-53CDEABADE62}"/>
+                <a16:creationId xmlns:a16="http://schemas.microsoft.com/office/drawing/2014/main" id="{E384BAFB-D40B-4C5B-979D-53D042662F90}"/>
               </a:ext>
             </a:extLst>
           </p:cNvPr>
@@ -10494,7 +10494,7 @@
     </p:spTree>
     <p:extLst>
       <p:ext uri="{BB962C8B-B14F-4D97-AF65-F5344CB8AC3E}">
-        <p14:creationId xmlns:p14="http://schemas.microsoft.com/office/powerpoint/2010/main" val="1012719470"/>
+        <p14:creationId xmlns:p14="http://schemas.microsoft.com/office/powerpoint/2010/main" val="1558052741"/>
       </p:ext>
     </p:extLst>
   </p:cSld>
@@ -10522,7 +10522,7 @@
           <p:nvPr/>
         </p:nvPicPr>
         <p:blipFill>
-          <a:blip xmlns:r="http://schemas.openxmlformats.org/officeDocument/2006/relationships" xmlns:a="http://schemas.openxmlformats.org/drawingml/2006/main" r:embed="Rb3eade03c8884448"/>
+          <a:blip xmlns:r="http://schemas.openxmlformats.org/officeDocument/2006/relationships" xmlns:a="http://schemas.openxmlformats.org/drawingml/2006/main" r:embed="Rcb397815103c47b1"/>
           <a:srcRect xmlns:a="http://schemas.openxmlformats.org/drawingml/2006/main" l="0" t="0" r="0" b="0"/>
           <a:stretch xmlns:a="http://schemas.openxmlformats.org/drawingml/2006/main">
             <a:fillRect l="0" t="0" r="0" b="0"/>
@@ -10543,7 +10543,7 @@
           <p:cNvPr id="2" name="">
             <a:extLst xmlns:a="http://schemas.openxmlformats.org/drawingml/2006/main">
               <a:ext uri="{FF2B5EF4-FFF2-40B4-BE49-F238E27FC236}">
-                <a16:creationId xmlns:a16="http://schemas.microsoft.com/office/drawing/2014/main" id="{6814DF83-620B-405E-90FF-0442AED1C7A9}"/>
+                <a16:creationId xmlns:a16="http://schemas.microsoft.com/office/drawing/2014/main" id="{4205132B-D17B-421C-AE5F-ABF69CA0BFF0}"/>
               </a:ext>
             </a:extLst>
           </p:cNvPr>
@@ -10605,7 +10605,7 @@
           <p:cNvPr id="3" name="">
             <a:extLst xmlns:a="http://schemas.openxmlformats.org/drawingml/2006/main">
               <a:ext uri="{FF2B5EF4-FFF2-40B4-BE49-F238E27FC236}">
-                <a16:creationId xmlns:a16="http://schemas.microsoft.com/office/drawing/2014/main" id="{32511FA2-B690-4A9D-97A6-3C1730BA8208}"/>
+                <a16:creationId xmlns:a16="http://schemas.microsoft.com/office/drawing/2014/main" id="{35B327CD-C786-4B9F-808B-C23C0292A891}"/>
               </a:ext>
             </a:extLst>
           </p:cNvPr>
@@ -10667,7 +10667,7 @@
           <p:cNvPr id="4" name="">
             <a:extLst xmlns:a="http://schemas.openxmlformats.org/drawingml/2006/main">
               <a:ext uri="{FF2B5EF4-FFF2-40B4-BE49-F238E27FC236}">
-                <a16:creationId xmlns:a16="http://schemas.microsoft.com/office/drawing/2014/main" id="{20377189-D26F-4E38-87E4-D8EE870E542F}"/>
+                <a16:creationId xmlns:a16="http://schemas.microsoft.com/office/drawing/2014/main" id="{D16C2E98-658D-48CE-8238-F7445348AE5F}"/>
               </a:ext>
             </a:extLst>
           </p:cNvPr>
@@ -10729,7 +10729,7 @@
           <p:cNvPr id="5" name="">
             <a:extLst xmlns:a="http://schemas.openxmlformats.org/drawingml/2006/main">
               <a:ext uri="{FF2B5EF4-FFF2-40B4-BE49-F238E27FC236}">
-                <a16:creationId xmlns:a16="http://schemas.microsoft.com/office/drawing/2014/main" id="{5FEC39AD-DCD6-4A03-9A24-2744D9AE899C}"/>
+                <a16:creationId xmlns:a16="http://schemas.microsoft.com/office/drawing/2014/main" id="{58F5CDA2-FE72-4653-A9A1-BD9D7F6B0708}"/>
               </a:ext>
             </a:extLst>
           </p:cNvPr>
@@ -10760,7 +10760,7 @@
           <p:cNvPr id="6" name="">
             <a:extLst xmlns:a="http://schemas.openxmlformats.org/drawingml/2006/main">
               <a:ext uri="{FF2B5EF4-FFF2-40B4-BE49-F238E27FC236}">
-                <a16:creationId xmlns:a16="http://schemas.microsoft.com/office/drawing/2014/main" id="{7089062D-9019-4534-A64C-660D854F162C}"/>
+                <a16:creationId xmlns:a16="http://schemas.microsoft.com/office/drawing/2014/main" id="{709D6AB7-35D3-43AF-ADEF-400E98BA9485}"/>
               </a:ext>
             </a:extLst>
           </p:cNvPr>
@@ -10822,7 +10822,7 @@
           <p:cNvPr id="7" name="">
             <a:extLst xmlns:a="http://schemas.openxmlformats.org/drawingml/2006/main">
               <a:ext uri="{FF2B5EF4-FFF2-40B4-BE49-F238E27FC236}">
-                <a16:creationId xmlns:a16="http://schemas.microsoft.com/office/drawing/2014/main" id="{3F9F9AE8-9E34-4D93-8374-AC006EBD84E5}"/>
+                <a16:creationId xmlns:a16="http://schemas.microsoft.com/office/drawing/2014/main" id="{7E326284-83E3-4CF3-BFC9-074BC8F2B7CE}"/>
               </a:ext>
             </a:extLst>
           </p:cNvPr>
@@ -10855,7 +10855,7 @@
           <p:cNvPr id="8" name="">
             <a:extLst xmlns:a="http://schemas.openxmlformats.org/drawingml/2006/main">
               <a:ext uri="{FF2B5EF4-FFF2-40B4-BE49-F238E27FC236}">
-                <a16:creationId xmlns:a16="http://schemas.microsoft.com/office/drawing/2014/main" id="{B79DB3D7-7F42-484B-BD33-05B25F136707}"/>
+                <a16:creationId xmlns:a16="http://schemas.microsoft.com/office/drawing/2014/main" id="{A4AA1F5E-311F-4F50-ADE0-43924F975FD0}"/>
               </a:ext>
             </a:extLst>
           </p:cNvPr>
@@ -10890,7 +10890,7 @@
           <p:cNvPr id="9" name="">
             <a:extLst xmlns:a="http://schemas.openxmlformats.org/drawingml/2006/main">
               <a:ext uri="{FF2B5EF4-FFF2-40B4-BE49-F238E27FC236}">
-                <a16:creationId xmlns:a16="http://schemas.microsoft.com/office/drawing/2014/main" id="{EBFB5BED-F4FA-4AAD-9FC7-739940F1F909}"/>
+                <a16:creationId xmlns:a16="http://schemas.microsoft.com/office/drawing/2014/main" id="{A2ACF4DD-AE02-4B17-95C1-5D2EFFB80B1D}"/>
               </a:ext>
             </a:extLst>
           </p:cNvPr>
@@ -10921,7 +10921,7 @@
           <p:cNvPr id="10" name="">
             <a:extLst xmlns:a="http://schemas.openxmlformats.org/drawingml/2006/main">
               <a:ext uri="{FF2B5EF4-FFF2-40B4-BE49-F238E27FC236}">
-                <a16:creationId xmlns:a16="http://schemas.microsoft.com/office/drawing/2014/main" id="{63708A74-10A2-44B7-A693-8DE4B51FE07B}"/>
+                <a16:creationId xmlns:a16="http://schemas.microsoft.com/office/drawing/2014/main" id="{A1CBEFE4-A564-41C2-99D1-CB7064A67C5E}"/>
               </a:ext>
             </a:extLst>
           </p:cNvPr>
@@ -10983,7 +10983,7 @@
           <p:cNvPr id="11" name="">
             <a:extLst xmlns:a="http://schemas.openxmlformats.org/drawingml/2006/main">
               <a:ext uri="{FF2B5EF4-FFF2-40B4-BE49-F238E27FC236}">
-                <a16:creationId xmlns:a16="http://schemas.microsoft.com/office/drawing/2014/main" id="{F1496063-A3EE-412E-A32F-497F192A1915}"/>
+                <a16:creationId xmlns:a16="http://schemas.microsoft.com/office/drawing/2014/main" id="{F40E3772-D56D-4187-914C-8EAC7556B0EA}"/>
               </a:ext>
             </a:extLst>
           </p:cNvPr>
@@ -11045,7 +11045,7 @@
           <p:cNvPr id="12" name="">
             <a:extLst xmlns:a="http://schemas.openxmlformats.org/drawingml/2006/main">
               <a:ext uri="{FF2B5EF4-FFF2-40B4-BE49-F238E27FC236}">
-                <a16:creationId xmlns:a16="http://schemas.microsoft.com/office/drawing/2014/main" id="{A6361B5E-1EBE-4C4F-9572-569BD500193C}"/>
+                <a16:creationId xmlns:a16="http://schemas.microsoft.com/office/drawing/2014/main" id="{750C4922-958B-4361-B7C7-89A859EDCC3D}"/>
               </a:ext>
             </a:extLst>
           </p:cNvPr>
@@ -11107,7 +11107,7 @@
           <p:cNvPr id="13" name="">
             <a:extLst xmlns:a="http://schemas.openxmlformats.org/drawingml/2006/main">
               <a:ext uri="{FF2B5EF4-FFF2-40B4-BE49-F238E27FC236}">
-                <a16:creationId xmlns:a16="http://schemas.microsoft.com/office/drawing/2014/main" id="{EEF4A64C-A7EA-426D-B12B-F5A52F2565AC}"/>
+                <a16:creationId xmlns:a16="http://schemas.microsoft.com/office/drawing/2014/main" id="{C62F317E-93C1-4AEB-BE90-3FCA6D53CDF9}"/>
               </a:ext>
             </a:extLst>
           </p:cNvPr>
@@ -11167,7 +11167,7 @@
     </p:spTree>
     <p:extLst>
       <p:ext uri="{BB962C8B-B14F-4D97-AF65-F5344CB8AC3E}">
-        <p14:creationId xmlns:p14="http://schemas.microsoft.com/office/powerpoint/2010/main" val="1695108568"/>
+        <p14:creationId xmlns:p14="http://schemas.microsoft.com/office/powerpoint/2010/main" val="1142702522"/>
       </p:ext>
     </p:extLst>
   </p:cSld>
@@ -11195,7 +11195,7 @@
           <p:nvPr/>
         </p:nvPicPr>
         <p:blipFill>
-          <a:blip xmlns:r="http://schemas.openxmlformats.org/officeDocument/2006/relationships" xmlns:a="http://schemas.openxmlformats.org/drawingml/2006/main" r:embed="R323aebf5f073455a"/>
+          <a:blip xmlns:r="http://schemas.openxmlformats.org/officeDocument/2006/relationships" xmlns:a="http://schemas.openxmlformats.org/drawingml/2006/main" r:embed="Rab4750bafdd543d2"/>
           <a:srcRect xmlns:a="http://schemas.openxmlformats.org/drawingml/2006/main" l="0" t="0" r="0" b="0"/>
           <a:stretch xmlns:a="http://schemas.openxmlformats.org/drawingml/2006/main">
             <a:fillRect l="0" t="0" r="0" b="0"/>
@@ -11216,7 +11216,7 @@
           <p:cNvPr id="2" name="">
             <a:extLst xmlns:a="http://schemas.openxmlformats.org/drawingml/2006/main">
               <a:ext uri="{FF2B5EF4-FFF2-40B4-BE49-F238E27FC236}">
-                <a16:creationId xmlns:a16="http://schemas.microsoft.com/office/drawing/2014/main" id="{9C67FD74-0CF5-4CF8-A34B-8C2439DAA2C3}"/>
+                <a16:creationId xmlns:a16="http://schemas.microsoft.com/office/drawing/2014/main" id="{5E6E8B50-054F-44E4-9363-B6E93F2B6F81}"/>
               </a:ext>
             </a:extLst>
           </p:cNvPr>
@@ -11278,7 +11278,7 @@
           <p:cNvPr id="3" name="">
             <a:extLst xmlns:a="http://schemas.openxmlformats.org/drawingml/2006/main">
               <a:ext uri="{FF2B5EF4-FFF2-40B4-BE49-F238E27FC236}">
-                <a16:creationId xmlns:a16="http://schemas.microsoft.com/office/drawing/2014/main" id="{AB82BE5C-844C-4D6C-B5E8-1B7C8CE9691C}"/>
+                <a16:creationId xmlns:a16="http://schemas.microsoft.com/office/drawing/2014/main" id="{BB0B4F26-3369-43AB-AE00-05DBA3C6BD5D}"/>
               </a:ext>
             </a:extLst>
           </p:cNvPr>
@@ -11340,7 +11340,7 @@
           <p:cNvPr id="4" name="">
             <a:extLst xmlns:a="http://schemas.openxmlformats.org/drawingml/2006/main">
               <a:ext uri="{FF2B5EF4-FFF2-40B4-BE49-F238E27FC236}">
-                <a16:creationId xmlns:a16="http://schemas.microsoft.com/office/drawing/2014/main" id="{73E9985E-F5F4-4590-892C-5A74B64F75A5}"/>
+                <a16:creationId xmlns:a16="http://schemas.microsoft.com/office/drawing/2014/main" id="{64D7015E-D138-4255-9F0A-544C631F5EE2}"/>
               </a:ext>
             </a:extLst>
           </p:cNvPr>
@@ -11402,7 +11402,7 @@
           <p:cNvPr id="5" name="">
             <a:extLst xmlns:a="http://schemas.openxmlformats.org/drawingml/2006/main">
               <a:ext uri="{FF2B5EF4-FFF2-40B4-BE49-F238E27FC236}">
-                <a16:creationId xmlns:a16="http://schemas.microsoft.com/office/drawing/2014/main" id="{B152E09B-3389-4DB6-AC1E-519278AE3EF6}"/>
+                <a16:creationId xmlns:a16="http://schemas.microsoft.com/office/drawing/2014/main" id="{9F6A31BE-7EA7-415E-A961-3B091056B42B}"/>
               </a:ext>
             </a:extLst>
           </p:cNvPr>
@@ -11433,7 +11433,7 @@
           <p:cNvPr id="6" name="">
             <a:extLst xmlns:a="http://schemas.openxmlformats.org/drawingml/2006/main">
               <a:ext uri="{FF2B5EF4-FFF2-40B4-BE49-F238E27FC236}">
-                <a16:creationId xmlns:a16="http://schemas.microsoft.com/office/drawing/2014/main" id="{CD597009-7FEB-4EC1-A8FF-79B6884225FC}"/>
+                <a16:creationId xmlns:a16="http://schemas.microsoft.com/office/drawing/2014/main" id="{C77138DB-D2D9-40F4-A339-8D1FE042830A}"/>
               </a:ext>
             </a:extLst>
           </p:cNvPr>
@@ -11495,7 +11495,7 @@
           <p:cNvPr id="7" name="">
             <a:extLst xmlns:a="http://schemas.openxmlformats.org/drawingml/2006/main">
               <a:ext uri="{FF2B5EF4-FFF2-40B4-BE49-F238E27FC236}">
-                <a16:creationId xmlns:a16="http://schemas.microsoft.com/office/drawing/2014/main" id="{6D83F5FA-2576-4C4E-A6DC-BFDAAB49A2CC}"/>
+                <a16:creationId xmlns:a16="http://schemas.microsoft.com/office/drawing/2014/main" id="{C41A1C01-6522-4C64-BBFC-C0C5AEA5E744}"/>
               </a:ext>
             </a:extLst>
           </p:cNvPr>
@@ -11528,7 +11528,7 @@
           <p:cNvPr id="8" name="">
             <a:extLst xmlns:a="http://schemas.openxmlformats.org/drawingml/2006/main">
               <a:ext uri="{FF2B5EF4-FFF2-40B4-BE49-F238E27FC236}">
-                <a16:creationId xmlns:a16="http://schemas.microsoft.com/office/drawing/2014/main" id="{4AA59920-E2CA-4821-96C4-5B8027DAC88E}"/>
+                <a16:creationId xmlns:a16="http://schemas.microsoft.com/office/drawing/2014/main" id="{AE0770F4-9CFB-4A65-96C4-FD1A98CBB190}"/>
               </a:ext>
             </a:extLst>
           </p:cNvPr>
@@ -11563,7 +11563,7 @@
           <p:cNvPr id="9" name="">
             <a:extLst xmlns:a="http://schemas.openxmlformats.org/drawingml/2006/main">
               <a:ext uri="{FF2B5EF4-FFF2-40B4-BE49-F238E27FC236}">
-                <a16:creationId xmlns:a16="http://schemas.microsoft.com/office/drawing/2014/main" id="{7E971B62-0EC0-4E8E-BD7A-D649FE24D348}"/>
+                <a16:creationId xmlns:a16="http://schemas.microsoft.com/office/drawing/2014/main" id="{8C167AF7-8A63-445B-B13C-AA6F63CDE64C}"/>
               </a:ext>
             </a:extLst>
           </p:cNvPr>
@@ -11594,7 +11594,7 @@
           <p:cNvPr id="10" name="">
             <a:extLst xmlns:a="http://schemas.openxmlformats.org/drawingml/2006/main">
               <a:ext uri="{FF2B5EF4-FFF2-40B4-BE49-F238E27FC236}">
-                <a16:creationId xmlns:a16="http://schemas.microsoft.com/office/drawing/2014/main" id="{E84EE91B-5D91-4363-8B37-EFDB004A6E0F}"/>
+                <a16:creationId xmlns:a16="http://schemas.microsoft.com/office/drawing/2014/main" id="{51BF22E2-B4A4-4CFF-B970-16524CFCA06C}"/>
               </a:ext>
             </a:extLst>
           </p:cNvPr>
@@ -11656,7 +11656,7 @@
           <p:cNvPr id="11" name="">
             <a:extLst xmlns:a="http://schemas.openxmlformats.org/drawingml/2006/main">
               <a:ext uri="{FF2B5EF4-FFF2-40B4-BE49-F238E27FC236}">
-                <a16:creationId xmlns:a16="http://schemas.microsoft.com/office/drawing/2014/main" id="{66D04241-F09F-472A-A7B3-0131112EC422}"/>
+                <a16:creationId xmlns:a16="http://schemas.microsoft.com/office/drawing/2014/main" id="{25B14064-8787-43A1-9157-F183289FA85E}"/>
               </a:ext>
             </a:extLst>
           </p:cNvPr>
@@ -11718,7 +11718,7 @@
           <p:cNvPr id="12" name="">
             <a:extLst xmlns:a="http://schemas.openxmlformats.org/drawingml/2006/main">
               <a:ext uri="{FF2B5EF4-FFF2-40B4-BE49-F238E27FC236}">
-                <a16:creationId xmlns:a16="http://schemas.microsoft.com/office/drawing/2014/main" id="{5E651516-9944-4349-BF46-A4F89F3BE4AF}"/>
+                <a16:creationId xmlns:a16="http://schemas.microsoft.com/office/drawing/2014/main" id="{3035D7BF-391D-4E02-934C-8A698874EFA2}"/>
               </a:ext>
             </a:extLst>
           </p:cNvPr>
@@ -11780,7 +11780,7 @@
           <p:cNvPr id="13" name="">
             <a:extLst xmlns:a="http://schemas.openxmlformats.org/drawingml/2006/main">
               <a:ext uri="{FF2B5EF4-FFF2-40B4-BE49-F238E27FC236}">
-                <a16:creationId xmlns:a16="http://schemas.microsoft.com/office/drawing/2014/main" id="{5F7AD0CA-88A2-4921-8F31-FCC1C526DBC8}"/>
+                <a16:creationId xmlns:a16="http://schemas.microsoft.com/office/drawing/2014/main" id="{0806F1E3-FE14-4468-B79F-437B317B55E1}"/>
               </a:ext>
             </a:extLst>
           </p:cNvPr>
@@ -11813,7 +11813,7 @@
           <p:cNvPr id="14" name="">
             <a:extLst xmlns:a="http://schemas.openxmlformats.org/drawingml/2006/main">
               <a:ext uri="{FF2B5EF4-FFF2-40B4-BE49-F238E27FC236}">
-                <a16:creationId xmlns:a16="http://schemas.microsoft.com/office/drawing/2014/main" id="{21DF8FE5-3448-43A4-A288-A08527AFEDFD}"/>
+                <a16:creationId xmlns:a16="http://schemas.microsoft.com/office/drawing/2014/main" id="{A6A92604-6F5C-4421-B467-814C758DFB18}"/>
               </a:ext>
             </a:extLst>
           </p:cNvPr>
@@ -11848,7 +11848,7 @@
           <p:cNvPr id="15" name="">
             <a:extLst xmlns:a="http://schemas.openxmlformats.org/drawingml/2006/main">
               <a:ext uri="{FF2B5EF4-FFF2-40B4-BE49-F238E27FC236}">
-                <a16:creationId xmlns:a16="http://schemas.microsoft.com/office/drawing/2014/main" id="{DE107839-A7E0-4E07-8FE4-E277051D8CCD}"/>
+                <a16:creationId xmlns:a16="http://schemas.microsoft.com/office/drawing/2014/main" id="{60FC7B76-D890-4092-9F6A-67808EC633D7}"/>
               </a:ext>
             </a:extLst>
           </p:cNvPr>
@@ -11879,7 +11879,7 @@
           <p:cNvPr id="16" name="">
             <a:extLst xmlns:a="http://schemas.openxmlformats.org/drawingml/2006/main">
               <a:ext uri="{FF2B5EF4-FFF2-40B4-BE49-F238E27FC236}">
-                <a16:creationId xmlns:a16="http://schemas.microsoft.com/office/drawing/2014/main" id="{863990D4-C87D-43E8-9EA5-D694CE05B35B}"/>
+                <a16:creationId xmlns:a16="http://schemas.microsoft.com/office/drawing/2014/main" id="{F8A48AC7-3BDC-436A-A2B1-151DEF67E8E4}"/>
               </a:ext>
             </a:extLst>
           </p:cNvPr>
@@ -11941,7 +11941,7 @@
           <p:cNvPr id="17" name="">
             <a:extLst xmlns:a="http://schemas.openxmlformats.org/drawingml/2006/main">
               <a:ext uri="{FF2B5EF4-FFF2-40B4-BE49-F238E27FC236}">
-                <a16:creationId xmlns:a16="http://schemas.microsoft.com/office/drawing/2014/main" id="{F8C039AD-A0B2-44B5-8D5C-888F287A0BA8}"/>
+                <a16:creationId xmlns:a16="http://schemas.microsoft.com/office/drawing/2014/main" id="{61908375-733B-45C4-BB70-60EDF6B3B027}"/>
               </a:ext>
             </a:extLst>
           </p:cNvPr>
@@ -12003,7 +12003,7 @@
           <p:cNvPr id="18" name="">
             <a:extLst xmlns:a="http://schemas.openxmlformats.org/drawingml/2006/main">
               <a:ext uri="{FF2B5EF4-FFF2-40B4-BE49-F238E27FC236}">
-                <a16:creationId xmlns:a16="http://schemas.microsoft.com/office/drawing/2014/main" id="{B64D3FC3-7C93-460E-91AB-A61CBF705019}"/>
+                <a16:creationId xmlns:a16="http://schemas.microsoft.com/office/drawing/2014/main" id="{88ADE253-5483-4D75-90FA-F673BA282090}"/>
               </a:ext>
             </a:extLst>
           </p:cNvPr>
@@ -12065,7 +12065,7 @@
           <p:cNvPr id="19" name="">
             <a:extLst xmlns:a="http://schemas.openxmlformats.org/drawingml/2006/main">
               <a:ext uri="{FF2B5EF4-FFF2-40B4-BE49-F238E27FC236}">
-                <a16:creationId xmlns:a16="http://schemas.microsoft.com/office/drawing/2014/main" id="{C87E8103-B36D-42DF-A0FE-5D6E83EB57A5}"/>
+                <a16:creationId xmlns:a16="http://schemas.microsoft.com/office/drawing/2014/main" id="{1631EFAD-1BB0-40B7-A5AA-9BDFD8127170}"/>
               </a:ext>
             </a:extLst>
           </p:cNvPr>
@@ -12098,7 +12098,7 @@
           <p:cNvPr id="20" name="">
             <a:extLst xmlns:a="http://schemas.openxmlformats.org/drawingml/2006/main">
               <a:ext uri="{FF2B5EF4-FFF2-40B4-BE49-F238E27FC236}">
-                <a16:creationId xmlns:a16="http://schemas.microsoft.com/office/drawing/2014/main" id="{B8327258-19FE-4462-BE94-4EA3E5B89943}"/>
+                <a16:creationId xmlns:a16="http://schemas.microsoft.com/office/drawing/2014/main" id="{D40CB6AC-E71E-4FBF-AF42-D5BFFCD8B1C4}"/>
               </a:ext>
             </a:extLst>
           </p:cNvPr>
@@ -12133,7 +12133,7 @@
           <p:cNvPr id="21" name="">
             <a:extLst xmlns:a="http://schemas.openxmlformats.org/drawingml/2006/main">
               <a:ext uri="{FF2B5EF4-FFF2-40B4-BE49-F238E27FC236}">
-                <a16:creationId xmlns:a16="http://schemas.microsoft.com/office/drawing/2014/main" id="{CA7F3F05-AFB5-4704-93A5-A9DA382255D5}"/>
+                <a16:creationId xmlns:a16="http://schemas.microsoft.com/office/drawing/2014/main" id="{04031C88-08D3-45D2-A524-B699961950B1}"/>
               </a:ext>
             </a:extLst>
           </p:cNvPr>
@@ -12164,7 +12164,7 @@
           <p:cNvPr id="22" name="">
             <a:extLst xmlns:a="http://schemas.openxmlformats.org/drawingml/2006/main">
               <a:ext uri="{FF2B5EF4-FFF2-40B4-BE49-F238E27FC236}">
-                <a16:creationId xmlns:a16="http://schemas.microsoft.com/office/drawing/2014/main" id="{548ACEB2-2F90-4E74-B332-9E9554FF7060}"/>
+                <a16:creationId xmlns:a16="http://schemas.microsoft.com/office/drawing/2014/main" id="{2BD627FB-E846-4E1C-8E52-0E9896BB4C18}"/>
               </a:ext>
             </a:extLst>
           </p:cNvPr>
@@ -12226,7 +12226,7 @@
           <p:cNvPr id="23" name="">
             <a:extLst xmlns:a="http://schemas.openxmlformats.org/drawingml/2006/main">
               <a:ext uri="{FF2B5EF4-FFF2-40B4-BE49-F238E27FC236}">
-                <a16:creationId xmlns:a16="http://schemas.microsoft.com/office/drawing/2014/main" id="{D02D9855-6728-42EA-AD09-876B676867FF}"/>
+                <a16:creationId xmlns:a16="http://schemas.microsoft.com/office/drawing/2014/main" id="{E4776D77-4D42-4B44-ACA1-6416BFE6E0B4}"/>
               </a:ext>
             </a:extLst>
           </p:cNvPr>
@@ -12288,7 +12288,7 @@
           <p:cNvPr id="24" name="">
             <a:extLst xmlns:a="http://schemas.openxmlformats.org/drawingml/2006/main">
               <a:ext uri="{FF2B5EF4-FFF2-40B4-BE49-F238E27FC236}">
-                <a16:creationId xmlns:a16="http://schemas.microsoft.com/office/drawing/2014/main" id="{022A1FC7-AA20-44E0-B5D7-F2E3AF187242}"/>
+                <a16:creationId xmlns:a16="http://schemas.microsoft.com/office/drawing/2014/main" id="{9C3A2ADB-A631-457F-B645-2987FEEB0E66}"/>
               </a:ext>
             </a:extLst>
           </p:cNvPr>
@@ -12350,7 +12350,7 @@
           <p:cNvPr id="25" name="">
             <a:extLst xmlns:a="http://schemas.openxmlformats.org/drawingml/2006/main">
               <a:ext uri="{FF2B5EF4-FFF2-40B4-BE49-F238E27FC236}">
-                <a16:creationId xmlns:a16="http://schemas.microsoft.com/office/drawing/2014/main" id="{97FF6145-C892-4615-A4BB-E57D1AAA92D9}"/>
+                <a16:creationId xmlns:a16="http://schemas.microsoft.com/office/drawing/2014/main" id="{9F4D65CA-D8C6-41EB-A7BB-28EF40BBFA24}"/>
               </a:ext>
             </a:extLst>
           </p:cNvPr>
@@ -12383,7 +12383,7 @@
           <p:cNvPr id="26" name="">
             <a:extLst xmlns:a="http://schemas.openxmlformats.org/drawingml/2006/main">
               <a:ext uri="{FF2B5EF4-FFF2-40B4-BE49-F238E27FC236}">
-                <a16:creationId xmlns:a16="http://schemas.microsoft.com/office/drawing/2014/main" id="{B3D05F5F-49F6-4987-8530-2ACD5F9C127B}"/>
+                <a16:creationId xmlns:a16="http://schemas.microsoft.com/office/drawing/2014/main" id="{5D858962-CA18-491B-9E20-C58499103CF0}"/>
               </a:ext>
             </a:extLst>
           </p:cNvPr>
@@ -12418,7 +12418,7 @@
           <p:cNvPr id="27" name="">
             <a:extLst xmlns:a="http://schemas.openxmlformats.org/drawingml/2006/main">
               <a:ext uri="{FF2B5EF4-FFF2-40B4-BE49-F238E27FC236}">
-                <a16:creationId xmlns:a16="http://schemas.microsoft.com/office/drawing/2014/main" id="{167AC025-FDD2-467D-9AE2-6A92E7F473D9}"/>
+                <a16:creationId xmlns:a16="http://schemas.microsoft.com/office/drawing/2014/main" id="{AA572BC7-EFFD-4281-8BF2-2127B53A055B}"/>
               </a:ext>
             </a:extLst>
           </p:cNvPr>
@@ -12449,7 +12449,7 @@
           <p:cNvPr id="28" name="">
             <a:extLst xmlns:a="http://schemas.openxmlformats.org/drawingml/2006/main">
               <a:ext uri="{FF2B5EF4-FFF2-40B4-BE49-F238E27FC236}">
-                <a16:creationId xmlns:a16="http://schemas.microsoft.com/office/drawing/2014/main" id="{F7FA1F35-2CFB-4552-B1CC-ABC7840C8E10}"/>
+                <a16:creationId xmlns:a16="http://schemas.microsoft.com/office/drawing/2014/main" id="{75A653E1-A643-492B-9049-6837AC780E3E}"/>
               </a:ext>
             </a:extLst>
           </p:cNvPr>
@@ -12511,7 +12511,7 @@
           <p:cNvPr id="29" name="">
             <a:extLst xmlns:a="http://schemas.openxmlformats.org/drawingml/2006/main">
               <a:ext uri="{FF2B5EF4-FFF2-40B4-BE49-F238E27FC236}">
-                <a16:creationId xmlns:a16="http://schemas.microsoft.com/office/drawing/2014/main" id="{1AA57039-8B66-4B97-8FFB-311C1418A87A}"/>
+                <a16:creationId xmlns:a16="http://schemas.microsoft.com/office/drawing/2014/main" id="{2D2CECA9-AA23-44FA-9E62-1D4CB4472234}"/>
               </a:ext>
             </a:extLst>
           </p:cNvPr>
@@ -12573,7 +12573,7 @@
           <p:cNvPr id="30" name="">
             <a:extLst xmlns:a="http://schemas.openxmlformats.org/drawingml/2006/main">
               <a:ext uri="{FF2B5EF4-FFF2-40B4-BE49-F238E27FC236}">
-                <a16:creationId xmlns:a16="http://schemas.microsoft.com/office/drawing/2014/main" id="{D7084FA2-2A5A-488A-BA1A-5D20B1694740}"/>
+                <a16:creationId xmlns:a16="http://schemas.microsoft.com/office/drawing/2014/main" id="{85090930-FB34-4B92-B6F1-743AA0E189F7}"/>
               </a:ext>
             </a:extLst>
           </p:cNvPr>
@@ -12635,7 +12635,7 @@
           <p:cNvPr id="31" name="">
             <a:extLst xmlns:a="http://schemas.openxmlformats.org/drawingml/2006/main">
               <a:ext uri="{FF2B5EF4-FFF2-40B4-BE49-F238E27FC236}">
-                <a16:creationId xmlns:a16="http://schemas.microsoft.com/office/drawing/2014/main" id="{0058C5C6-7C1D-48A1-93D9-941CED2F8796}"/>
+                <a16:creationId xmlns:a16="http://schemas.microsoft.com/office/drawing/2014/main" id="{BBCB9963-2B75-4F18-BDF1-D5703017BBFA}"/>
               </a:ext>
             </a:extLst>
           </p:cNvPr>
@@ -12668,7 +12668,7 @@
           <p:cNvPr id="32" name="">
             <a:extLst xmlns:a="http://schemas.openxmlformats.org/drawingml/2006/main">
               <a:ext uri="{FF2B5EF4-FFF2-40B4-BE49-F238E27FC236}">
-                <a16:creationId xmlns:a16="http://schemas.microsoft.com/office/drawing/2014/main" id="{6483677C-F657-4B44-BE08-94B624A3CA35}"/>
+                <a16:creationId xmlns:a16="http://schemas.microsoft.com/office/drawing/2014/main" id="{5DD576CA-37BF-48F6-BE0D-A961D2759615}"/>
               </a:ext>
             </a:extLst>
           </p:cNvPr>
@@ -12703,7 +12703,7 @@
           <p:cNvPr id="33" name="">
             <a:extLst xmlns:a="http://schemas.openxmlformats.org/drawingml/2006/main">
               <a:ext uri="{FF2B5EF4-FFF2-40B4-BE49-F238E27FC236}">
-                <a16:creationId xmlns:a16="http://schemas.microsoft.com/office/drawing/2014/main" id="{FA66CCFA-B5ED-427E-B5BF-473AE4B90607}"/>
+                <a16:creationId xmlns:a16="http://schemas.microsoft.com/office/drawing/2014/main" id="{674E536A-DB57-496F-B4BE-ABBE84E9E4B9}"/>
               </a:ext>
             </a:extLst>
           </p:cNvPr>
@@ -12734,7 +12734,7 @@
           <p:cNvPr id="34" name="">
             <a:extLst xmlns:a="http://schemas.openxmlformats.org/drawingml/2006/main">
               <a:ext uri="{FF2B5EF4-FFF2-40B4-BE49-F238E27FC236}">
-                <a16:creationId xmlns:a16="http://schemas.microsoft.com/office/drawing/2014/main" id="{194B7D96-E8AC-4540-9A71-06C0E328C3B0}"/>
+                <a16:creationId xmlns:a16="http://schemas.microsoft.com/office/drawing/2014/main" id="{15DA1EA9-99CA-486F-9A35-E44E88B0A5CB}"/>
               </a:ext>
             </a:extLst>
           </p:cNvPr>
@@ -12796,7 +12796,7 @@
           <p:cNvPr id="35" name="">
             <a:extLst xmlns:a="http://schemas.openxmlformats.org/drawingml/2006/main">
               <a:ext uri="{FF2B5EF4-FFF2-40B4-BE49-F238E27FC236}">
-                <a16:creationId xmlns:a16="http://schemas.microsoft.com/office/drawing/2014/main" id="{19300357-661B-40CE-85D0-27F18F8D1266}"/>
+                <a16:creationId xmlns:a16="http://schemas.microsoft.com/office/drawing/2014/main" id="{F61D9582-934A-43B7-9370-592FC1A53A0C}"/>
               </a:ext>
             </a:extLst>
           </p:cNvPr>
@@ -12858,7 +12858,7 @@
           <p:cNvPr id="36" name="">
             <a:extLst xmlns:a="http://schemas.openxmlformats.org/drawingml/2006/main">
               <a:ext uri="{FF2B5EF4-FFF2-40B4-BE49-F238E27FC236}">
-                <a16:creationId xmlns:a16="http://schemas.microsoft.com/office/drawing/2014/main" id="{7BFA5EE8-7442-4A54-8E90-3E67E4581AED}"/>
+                <a16:creationId xmlns:a16="http://schemas.microsoft.com/office/drawing/2014/main" id="{547971B8-5661-441E-A16B-ACBA74B0E616}"/>
               </a:ext>
             </a:extLst>
           </p:cNvPr>
@@ -12920,7 +12920,7 @@
           <p:cNvPr id="37" name="">
             <a:extLst xmlns:a="http://schemas.openxmlformats.org/drawingml/2006/main">
               <a:ext uri="{FF2B5EF4-FFF2-40B4-BE49-F238E27FC236}">
-                <a16:creationId xmlns:a16="http://schemas.microsoft.com/office/drawing/2014/main" id="{4F91C603-F68E-4CD8-9097-54B489636F61}"/>
+                <a16:creationId xmlns:a16="http://schemas.microsoft.com/office/drawing/2014/main" id="{749FD458-FA26-4684-9CE4-5A8CD8D5F4CF}"/>
               </a:ext>
             </a:extLst>
           </p:cNvPr>
@@ -12982,7 +12982,7 @@
           <p:cNvPr id="38" name="">
             <a:extLst xmlns:a="http://schemas.openxmlformats.org/drawingml/2006/main">
               <a:ext uri="{FF2B5EF4-FFF2-40B4-BE49-F238E27FC236}">
-                <a16:creationId xmlns:a16="http://schemas.microsoft.com/office/drawing/2014/main" id="{8FC5E32A-04C6-46DA-B8BA-4AFB0F27EB91}"/>
+                <a16:creationId xmlns:a16="http://schemas.microsoft.com/office/drawing/2014/main" id="{8732C90A-6412-48D7-9AF7-78CF3B928751}"/>
               </a:ext>
             </a:extLst>
           </p:cNvPr>
@@ -13042,7 +13042,7 @@
     </p:spTree>
     <p:extLst>
       <p:ext uri="{BB962C8B-B14F-4D97-AF65-F5344CB8AC3E}">
-        <p14:creationId xmlns:p14="http://schemas.microsoft.com/office/powerpoint/2010/main" val="2073415412"/>
+        <p14:creationId xmlns:p14="http://schemas.microsoft.com/office/powerpoint/2010/main" val="1986763412"/>
       </p:ext>
     </p:extLst>
   </p:cSld>
@@ -13070,7 +13070,7 @@
           <p:nvPr/>
         </p:nvPicPr>
         <p:blipFill>
-          <a:blip xmlns:r="http://schemas.openxmlformats.org/officeDocument/2006/relationships" xmlns:a="http://schemas.openxmlformats.org/drawingml/2006/main" r:embed="R7927795a52cb457d"/>
+          <a:blip xmlns:r="http://schemas.openxmlformats.org/officeDocument/2006/relationships" xmlns:a="http://schemas.openxmlformats.org/drawingml/2006/main" r:embed="R9b7426bed1184230"/>
           <a:srcRect xmlns:a="http://schemas.openxmlformats.org/drawingml/2006/main" l="0" t="0" r="0" b="0"/>
           <a:stretch xmlns:a="http://schemas.openxmlformats.org/drawingml/2006/main">
             <a:fillRect l="0" t="0" r="0" b="0"/>
@@ -13091,7 +13091,7 @@
           <p:cNvPr id="2" name="">
             <a:extLst xmlns:a="http://schemas.openxmlformats.org/drawingml/2006/main">
               <a:ext uri="{FF2B5EF4-FFF2-40B4-BE49-F238E27FC236}">
-                <a16:creationId xmlns:a16="http://schemas.microsoft.com/office/drawing/2014/main" id="{6C5040E0-676C-4E28-9087-63AF47E5E924}"/>
+                <a16:creationId xmlns:a16="http://schemas.microsoft.com/office/drawing/2014/main" id="{A5A8E16A-3BCE-4688-8B32-6F6E82FE522A}"/>
               </a:ext>
             </a:extLst>
           </p:cNvPr>
@@ -13153,7 +13153,7 @@
           <p:cNvPr id="3" name="">
             <a:extLst xmlns:a="http://schemas.openxmlformats.org/drawingml/2006/main">
               <a:ext uri="{FF2B5EF4-FFF2-40B4-BE49-F238E27FC236}">
-                <a16:creationId xmlns:a16="http://schemas.microsoft.com/office/drawing/2014/main" id="{6A1BA3CE-7C22-401D-BED1-5B62A224D88F}"/>
+                <a16:creationId xmlns:a16="http://schemas.microsoft.com/office/drawing/2014/main" id="{87A6F53D-E960-44F9-AFC7-82AE5E775CBF}"/>
               </a:ext>
             </a:extLst>
           </p:cNvPr>
@@ -13215,7 +13215,7 @@
           <p:cNvPr id="4" name="">
             <a:extLst xmlns:a="http://schemas.openxmlformats.org/drawingml/2006/main">
               <a:ext uri="{FF2B5EF4-FFF2-40B4-BE49-F238E27FC236}">
-                <a16:creationId xmlns:a16="http://schemas.microsoft.com/office/drawing/2014/main" id="{AE389897-5EBA-40D2-A777-4E4F6F0556B4}"/>
+                <a16:creationId xmlns:a16="http://schemas.microsoft.com/office/drawing/2014/main" id="{529EFE66-3B32-4DA5-8F68-90F3987AFC42}"/>
               </a:ext>
             </a:extLst>
           </p:cNvPr>
@@ -13277,7 +13277,7 @@
           <p:cNvPr id="5" name="">
             <a:extLst xmlns:a="http://schemas.openxmlformats.org/drawingml/2006/main">
               <a:ext uri="{FF2B5EF4-FFF2-40B4-BE49-F238E27FC236}">
-                <a16:creationId xmlns:a16="http://schemas.microsoft.com/office/drawing/2014/main" id="{99C4B8D9-B02A-4689-ACF3-ADF957BE975C}"/>
+                <a16:creationId xmlns:a16="http://schemas.microsoft.com/office/drawing/2014/main" id="{A0677A71-5651-488F-A7F6-2CCE7072AA5A}"/>
               </a:ext>
             </a:extLst>
           </p:cNvPr>
@@ -13339,7 +13339,7 @@
           <p:cNvPr id="6" name="">
             <a:extLst xmlns:a="http://schemas.openxmlformats.org/drawingml/2006/main">
               <a:ext uri="{FF2B5EF4-FFF2-40B4-BE49-F238E27FC236}">
-                <a16:creationId xmlns:a16="http://schemas.microsoft.com/office/drawing/2014/main" id="{BA1CAA3F-F3A6-44C9-9F27-ADAB97976F52}"/>
+                <a16:creationId xmlns:a16="http://schemas.microsoft.com/office/drawing/2014/main" id="{A11DE789-4F8D-4130-9A9E-4B08133AE28D}"/>
               </a:ext>
             </a:extLst>
           </p:cNvPr>
@@ -13399,7 +13399,7 @@
     </p:spTree>
     <p:extLst>
       <p:ext uri="{BB962C8B-B14F-4D97-AF65-F5344CB8AC3E}">
-        <p14:creationId xmlns:p14="http://schemas.microsoft.com/office/powerpoint/2010/main" val="510732758"/>
+        <p14:creationId xmlns:p14="http://schemas.microsoft.com/office/powerpoint/2010/main" val="2132119017"/>
       </p:ext>
     </p:extLst>
   </p:cSld>
@@ -13427,7 +13427,7 @@
           <p:nvPr/>
         </p:nvPicPr>
         <p:blipFill>
-          <a:blip xmlns:r="http://schemas.openxmlformats.org/officeDocument/2006/relationships" xmlns:a="http://schemas.openxmlformats.org/drawingml/2006/main" r:embed="R264e5cd2c33f4ae8"/>
+          <a:blip xmlns:r="http://schemas.openxmlformats.org/officeDocument/2006/relationships" xmlns:a="http://schemas.openxmlformats.org/drawingml/2006/main" r:embed="Rf8ef911f9aa541f0"/>
           <a:srcRect xmlns:a="http://schemas.openxmlformats.org/drawingml/2006/main" l="0" t="0" r="0" b="0"/>
           <a:stretch xmlns:a="http://schemas.openxmlformats.org/drawingml/2006/main">
             <a:fillRect l="0" t="0" r="0" b="0"/>
@@ -13448,7 +13448,7 @@
           <p:cNvPr id="2" name="">
             <a:extLst xmlns:a="http://schemas.openxmlformats.org/drawingml/2006/main">
               <a:ext uri="{FF2B5EF4-FFF2-40B4-BE49-F238E27FC236}">
-                <a16:creationId xmlns:a16="http://schemas.microsoft.com/office/drawing/2014/main" id="{5F07B8D9-6B13-4E58-B3BA-05592EBD3DB1}"/>
+                <a16:creationId xmlns:a16="http://schemas.microsoft.com/office/drawing/2014/main" id="{FA9E9E15-BDC3-4129-88C6-9CDEEB662C24}"/>
               </a:ext>
             </a:extLst>
           </p:cNvPr>
@@ -13510,7 +13510,7 @@
           <p:cNvPr id="3" name="">
             <a:extLst xmlns:a="http://schemas.openxmlformats.org/drawingml/2006/main">
               <a:ext uri="{FF2B5EF4-FFF2-40B4-BE49-F238E27FC236}">
-                <a16:creationId xmlns:a16="http://schemas.microsoft.com/office/drawing/2014/main" id="{0BF915EB-B0AC-4C7A-A3C9-B23A0627BFD0}"/>
+                <a16:creationId xmlns:a16="http://schemas.microsoft.com/office/drawing/2014/main" id="{D8A98C85-35BD-4533-A855-58F76D1FFF2F}"/>
               </a:ext>
             </a:extLst>
           </p:cNvPr>
@@ -13572,7 +13572,7 @@
           <p:cNvPr id="4" name="">
             <a:extLst xmlns:a="http://schemas.openxmlformats.org/drawingml/2006/main">
               <a:ext uri="{FF2B5EF4-FFF2-40B4-BE49-F238E27FC236}">
-                <a16:creationId xmlns:a16="http://schemas.microsoft.com/office/drawing/2014/main" id="{8312BB3D-09A7-4AE3-B150-7E6DB2637FAD}"/>
+                <a16:creationId xmlns:a16="http://schemas.microsoft.com/office/drawing/2014/main" id="{C5008800-3021-4E31-91C8-9BFB75F97035}"/>
               </a:ext>
             </a:extLst>
           </p:cNvPr>
@@ -13634,7 +13634,7 @@
           <p:cNvPr id="5" name="">
             <a:extLst xmlns:a="http://schemas.openxmlformats.org/drawingml/2006/main">
               <a:ext uri="{FF2B5EF4-FFF2-40B4-BE49-F238E27FC236}">
-                <a16:creationId xmlns:a16="http://schemas.microsoft.com/office/drawing/2014/main" id="{45226CD3-BD9F-4B10-AC06-8AF3E4FBC256}"/>
+                <a16:creationId xmlns:a16="http://schemas.microsoft.com/office/drawing/2014/main" id="{0010EB05-7110-4B53-A8C9-4CD8D039B21B}"/>
               </a:ext>
             </a:extLst>
           </p:cNvPr>
@@ -13665,7 +13665,7 @@
           <p:cNvPr id="6" name="">
             <a:extLst xmlns:a="http://schemas.openxmlformats.org/drawingml/2006/main">
               <a:ext uri="{FF2B5EF4-FFF2-40B4-BE49-F238E27FC236}">
-                <a16:creationId xmlns:a16="http://schemas.microsoft.com/office/drawing/2014/main" id="{131DD7A8-5125-431A-9AB7-C3288ECAADC5}"/>
+                <a16:creationId xmlns:a16="http://schemas.microsoft.com/office/drawing/2014/main" id="{484F2534-4FFC-4AD7-B91F-4369C3F3CF86}"/>
               </a:ext>
             </a:extLst>
           </p:cNvPr>
@@ -13727,7 +13727,7 @@
           <p:cNvPr id="7" name="">
             <a:extLst xmlns:a="http://schemas.openxmlformats.org/drawingml/2006/main">
               <a:ext uri="{FF2B5EF4-FFF2-40B4-BE49-F238E27FC236}">
-                <a16:creationId xmlns:a16="http://schemas.microsoft.com/office/drawing/2014/main" id="{5105B859-584A-4981-AC33-4935A2522A91}"/>
+                <a16:creationId xmlns:a16="http://schemas.microsoft.com/office/drawing/2014/main" id="{CE758834-DF9C-4C51-9AD3-86FF04257DE2}"/>
               </a:ext>
             </a:extLst>
           </p:cNvPr>
@@ -13760,7 +13760,7 @@
           <p:cNvPr id="8" name="">
             <a:extLst xmlns:a="http://schemas.openxmlformats.org/drawingml/2006/main">
               <a:ext uri="{FF2B5EF4-FFF2-40B4-BE49-F238E27FC236}">
-                <a16:creationId xmlns:a16="http://schemas.microsoft.com/office/drawing/2014/main" id="{FCDF0AF4-7EE7-4FAE-8730-064232231259}"/>
+                <a16:creationId xmlns:a16="http://schemas.microsoft.com/office/drawing/2014/main" id="{E777D86F-0DA5-448C-BD0F-5AA4892EDB89}"/>
               </a:ext>
             </a:extLst>
           </p:cNvPr>
@@ -13795,7 +13795,7 @@
           <p:cNvPr id="9" name="">
             <a:extLst xmlns:a="http://schemas.openxmlformats.org/drawingml/2006/main">
               <a:ext uri="{FF2B5EF4-FFF2-40B4-BE49-F238E27FC236}">
-                <a16:creationId xmlns:a16="http://schemas.microsoft.com/office/drawing/2014/main" id="{E8F9A7BE-5EBD-4CBC-8120-CB3D07EE01FF}"/>
+                <a16:creationId xmlns:a16="http://schemas.microsoft.com/office/drawing/2014/main" id="{CE44B78D-D878-40BD-B725-BBF60D7E240D}"/>
               </a:ext>
             </a:extLst>
           </p:cNvPr>
@@ -13826,7 +13826,7 @@
           <p:cNvPr id="10" name="">
             <a:extLst xmlns:a="http://schemas.openxmlformats.org/drawingml/2006/main">
               <a:ext uri="{FF2B5EF4-FFF2-40B4-BE49-F238E27FC236}">
-                <a16:creationId xmlns:a16="http://schemas.microsoft.com/office/drawing/2014/main" id="{11D3D7DF-5E5C-41F9-A66C-5BE25BBAEAA8}"/>
+                <a16:creationId xmlns:a16="http://schemas.microsoft.com/office/drawing/2014/main" id="{D5E7867F-9670-422D-B0C1-FF8E800511AD}"/>
               </a:ext>
             </a:extLst>
           </p:cNvPr>
@@ -13888,7 +13888,7 @@
           <p:cNvPr id="11" name="">
             <a:extLst xmlns:a="http://schemas.openxmlformats.org/drawingml/2006/main">
               <a:ext uri="{FF2B5EF4-FFF2-40B4-BE49-F238E27FC236}">
-                <a16:creationId xmlns:a16="http://schemas.microsoft.com/office/drawing/2014/main" id="{C44BB12A-E251-4CE1-91AC-7B6B2A48BB73}"/>
+                <a16:creationId xmlns:a16="http://schemas.microsoft.com/office/drawing/2014/main" id="{F4BB7A73-FAB1-473C-B59D-7AB5D24A18EA}"/>
               </a:ext>
             </a:extLst>
           </p:cNvPr>
@@ -13950,7 +13950,7 @@
           <p:cNvPr id="12" name="">
             <a:extLst xmlns:a="http://schemas.openxmlformats.org/drawingml/2006/main">
               <a:ext uri="{FF2B5EF4-FFF2-40B4-BE49-F238E27FC236}">
-                <a16:creationId xmlns:a16="http://schemas.microsoft.com/office/drawing/2014/main" id="{FB26F00D-9093-4102-826D-2878B138693F}"/>
+                <a16:creationId xmlns:a16="http://schemas.microsoft.com/office/drawing/2014/main" id="{2E0AB453-B739-4B00-A8DA-519DCF4B4518}"/>
               </a:ext>
             </a:extLst>
           </p:cNvPr>
@@ -14012,7 +14012,7 @@
           <p:cNvPr id="13" name="">
             <a:extLst xmlns:a="http://schemas.openxmlformats.org/drawingml/2006/main">
               <a:ext uri="{FF2B5EF4-FFF2-40B4-BE49-F238E27FC236}">
-                <a16:creationId xmlns:a16="http://schemas.microsoft.com/office/drawing/2014/main" id="{2C520D32-1C55-4F6C-BE94-BBEE4369F510}"/>
+                <a16:creationId xmlns:a16="http://schemas.microsoft.com/office/drawing/2014/main" id="{3B384F31-DB5C-49F0-91F0-A2D1388A6171}"/>
               </a:ext>
             </a:extLst>
           </p:cNvPr>
@@ -14045,7 +14045,7 @@
           <p:cNvPr id="14" name="">
             <a:extLst xmlns:a="http://schemas.openxmlformats.org/drawingml/2006/main">
               <a:ext uri="{FF2B5EF4-FFF2-40B4-BE49-F238E27FC236}">
-                <a16:creationId xmlns:a16="http://schemas.microsoft.com/office/drawing/2014/main" id="{4596C007-4E42-4416-BEDF-059514758882}"/>
+                <a16:creationId xmlns:a16="http://schemas.microsoft.com/office/drawing/2014/main" id="{89E3FC1A-3AFA-47CA-9490-611B88538766}"/>
               </a:ext>
             </a:extLst>
           </p:cNvPr>
@@ -14080,7 +14080,7 @@
           <p:cNvPr id="15" name="">
             <a:extLst xmlns:a="http://schemas.openxmlformats.org/drawingml/2006/main">
               <a:ext uri="{FF2B5EF4-FFF2-40B4-BE49-F238E27FC236}">
-                <a16:creationId xmlns:a16="http://schemas.microsoft.com/office/drawing/2014/main" id="{6E8A6147-E10E-49ED-99B9-FF90963150E5}"/>
+                <a16:creationId xmlns:a16="http://schemas.microsoft.com/office/drawing/2014/main" id="{B87A0A6A-D555-46DC-A0AA-4CF35E34D2BC}"/>
               </a:ext>
             </a:extLst>
           </p:cNvPr>
@@ -14111,7 +14111,7 @@
           <p:cNvPr id="16" name="">
             <a:extLst xmlns:a="http://schemas.openxmlformats.org/drawingml/2006/main">
               <a:ext uri="{FF2B5EF4-FFF2-40B4-BE49-F238E27FC236}">
-                <a16:creationId xmlns:a16="http://schemas.microsoft.com/office/drawing/2014/main" id="{080FE245-C705-48F0-AD10-8D7B28CC205E}"/>
+                <a16:creationId xmlns:a16="http://schemas.microsoft.com/office/drawing/2014/main" id="{81F64871-26C1-4F7F-BE33-4BC60D1974E0}"/>
               </a:ext>
             </a:extLst>
           </p:cNvPr>
@@ -14173,7 +14173,7 @@
           <p:cNvPr id="17" name="">
             <a:extLst xmlns:a="http://schemas.openxmlformats.org/drawingml/2006/main">
               <a:ext uri="{FF2B5EF4-FFF2-40B4-BE49-F238E27FC236}">
-                <a16:creationId xmlns:a16="http://schemas.microsoft.com/office/drawing/2014/main" id="{97747094-21DC-44C8-8CBB-9A007280B454}"/>
+                <a16:creationId xmlns:a16="http://schemas.microsoft.com/office/drawing/2014/main" id="{BEB1086A-C7FB-4849-B93B-2EA2E3046EFC}"/>
               </a:ext>
             </a:extLst>
           </p:cNvPr>
@@ -14235,7 +14235,7 @@
           <p:cNvPr id="18" name="">
             <a:extLst xmlns:a="http://schemas.openxmlformats.org/drawingml/2006/main">
               <a:ext uri="{FF2B5EF4-FFF2-40B4-BE49-F238E27FC236}">
-                <a16:creationId xmlns:a16="http://schemas.microsoft.com/office/drawing/2014/main" id="{8A0FFCB6-2516-4794-8250-71D7CDECA69C}"/>
+                <a16:creationId xmlns:a16="http://schemas.microsoft.com/office/drawing/2014/main" id="{BCB47AAD-1501-40F9-BEE7-4F5AAA843060}"/>
               </a:ext>
             </a:extLst>
           </p:cNvPr>
@@ -14297,7 +14297,7 @@
           <p:cNvPr id="19" name="">
             <a:extLst xmlns:a="http://schemas.openxmlformats.org/drawingml/2006/main">
               <a:ext uri="{FF2B5EF4-FFF2-40B4-BE49-F238E27FC236}">
-                <a16:creationId xmlns:a16="http://schemas.microsoft.com/office/drawing/2014/main" id="{C34988EA-1540-48FB-8084-B5FD951ACD15}"/>
+                <a16:creationId xmlns:a16="http://schemas.microsoft.com/office/drawing/2014/main" id="{208EA11D-B5E6-4178-9067-8E18B1258A9F}"/>
               </a:ext>
             </a:extLst>
           </p:cNvPr>
@@ -14330,7 +14330,7 @@
           <p:cNvPr id="20" name="">
             <a:extLst xmlns:a="http://schemas.openxmlformats.org/drawingml/2006/main">
               <a:ext uri="{FF2B5EF4-FFF2-40B4-BE49-F238E27FC236}">
-                <a16:creationId xmlns:a16="http://schemas.microsoft.com/office/drawing/2014/main" id="{00A90E76-2A5D-4A03-81CF-7A1400A73E90}"/>
+                <a16:creationId xmlns:a16="http://schemas.microsoft.com/office/drawing/2014/main" id="{9985E860-F545-4BAC-B908-705973BE6076}"/>
               </a:ext>
             </a:extLst>
           </p:cNvPr>
@@ -14365,7 +14365,7 @@
           <p:cNvPr id="21" name="">
             <a:extLst xmlns:a="http://schemas.openxmlformats.org/drawingml/2006/main">
               <a:ext uri="{FF2B5EF4-FFF2-40B4-BE49-F238E27FC236}">
-                <a16:creationId xmlns:a16="http://schemas.microsoft.com/office/drawing/2014/main" id="{B32E6D39-3A94-4A23-9952-3EFE6633FD69}"/>
+                <a16:creationId xmlns:a16="http://schemas.microsoft.com/office/drawing/2014/main" id="{A3216CD5-4C52-4DF2-8178-268F1E9584A4}"/>
               </a:ext>
             </a:extLst>
           </p:cNvPr>
@@ -14396,7 +14396,7 @@
           <p:cNvPr id="22" name="">
             <a:extLst xmlns:a="http://schemas.openxmlformats.org/drawingml/2006/main">
               <a:ext uri="{FF2B5EF4-FFF2-40B4-BE49-F238E27FC236}">
-                <a16:creationId xmlns:a16="http://schemas.microsoft.com/office/drawing/2014/main" id="{70389EFA-006D-480F-8E62-8182BC794A1B}"/>
+                <a16:creationId xmlns:a16="http://schemas.microsoft.com/office/drawing/2014/main" id="{455263EB-6D2C-41E2-8A9B-9B8CA5542776}"/>
               </a:ext>
             </a:extLst>
           </p:cNvPr>
@@ -14458,7 +14458,7 @@
           <p:cNvPr id="23" name="">
             <a:extLst xmlns:a="http://schemas.openxmlformats.org/drawingml/2006/main">
               <a:ext uri="{FF2B5EF4-FFF2-40B4-BE49-F238E27FC236}">
-                <a16:creationId xmlns:a16="http://schemas.microsoft.com/office/drawing/2014/main" id="{7A35B3DE-CAEE-49CE-8066-79500E49F45A}"/>
+                <a16:creationId xmlns:a16="http://schemas.microsoft.com/office/drawing/2014/main" id="{1DD6B791-5583-4318-89B2-3B84F345850C}"/>
               </a:ext>
             </a:extLst>
           </p:cNvPr>
@@ -14520,7 +14520,7 @@
           <p:cNvPr id="24" name="">
             <a:extLst xmlns:a="http://schemas.openxmlformats.org/drawingml/2006/main">
               <a:ext uri="{FF2B5EF4-FFF2-40B4-BE49-F238E27FC236}">
-                <a16:creationId xmlns:a16="http://schemas.microsoft.com/office/drawing/2014/main" id="{B62A3F02-2844-4FDC-AD23-48BE33EC4BF3}"/>
+                <a16:creationId xmlns:a16="http://schemas.microsoft.com/office/drawing/2014/main" id="{93F5BA91-2022-49BA-AD14-4E473A47CD38}"/>
               </a:ext>
             </a:extLst>
           </p:cNvPr>
@@ -14582,7 +14582,7 @@
           <p:cNvPr id="25" name="">
             <a:extLst xmlns:a="http://schemas.openxmlformats.org/drawingml/2006/main">
               <a:ext uri="{FF2B5EF4-FFF2-40B4-BE49-F238E27FC236}">
-                <a16:creationId xmlns:a16="http://schemas.microsoft.com/office/drawing/2014/main" id="{26390E92-F7E9-4FA8-9622-4553D937601C}"/>
+                <a16:creationId xmlns:a16="http://schemas.microsoft.com/office/drawing/2014/main" id="{3C233A07-3C0E-4EAB-829F-5FE26E70D0C5}"/>
               </a:ext>
             </a:extLst>
           </p:cNvPr>
@@ -14644,7 +14644,7 @@
           <p:cNvPr id="26" name="">
             <a:extLst xmlns:a="http://schemas.openxmlformats.org/drawingml/2006/main">
               <a:ext uri="{FF2B5EF4-FFF2-40B4-BE49-F238E27FC236}">
-                <a16:creationId xmlns:a16="http://schemas.microsoft.com/office/drawing/2014/main" id="{6D35DED4-7BCC-4296-A66D-C3F0960A7FE7}"/>
+                <a16:creationId xmlns:a16="http://schemas.microsoft.com/office/drawing/2014/main" id="{DE7CD5A9-D035-4A09-AE2D-21DCA7B62EAE}"/>
               </a:ext>
             </a:extLst>
           </p:cNvPr>
@@ -14704,7 +14704,7 @@
     </p:spTree>
     <p:extLst>
       <p:ext uri="{BB962C8B-B14F-4D97-AF65-F5344CB8AC3E}">
-        <p14:creationId xmlns:p14="http://schemas.microsoft.com/office/powerpoint/2010/main" val="655218053"/>
+        <p14:creationId xmlns:p14="http://schemas.microsoft.com/office/powerpoint/2010/main" val="27211025"/>
       </p:ext>
     </p:extLst>
   </p:cSld>
@@ -14732,7 +14732,7 @@
           <p:nvPr/>
         </p:nvPicPr>
         <p:blipFill>
-          <a:blip xmlns:r="http://schemas.openxmlformats.org/officeDocument/2006/relationships" xmlns:a="http://schemas.openxmlformats.org/drawingml/2006/main" r:embed="Re14f9ad69b884187"/>
+          <a:blip xmlns:r="http://schemas.openxmlformats.org/officeDocument/2006/relationships" xmlns:a="http://schemas.openxmlformats.org/drawingml/2006/main" r:embed="Ra798279443064f6e"/>
           <a:srcRect xmlns:a="http://schemas.openxmlformats.org/drawingml/2006/main" l="0" t="0" r="0" b="0"/>
           <a:stretch xmlns:a="http://schemas.openxmlformats.org/drawingml/2006/main">
             <a:fillRect l="0" t="0" r="0" b="0"/>
@@ -14753,7 +14753,7 @@
           <p:cNvPr id="2" name="">
             <a:extLst xmlns:a="http://schemas.openxmlformats.org/drawingml/2006/main">
               <a:ext uri="{FF2B5EF4-FFF2-40B4-BE49-F238E27FC236}">
-                <a16:creationId xmlns:a16="http://schemas.microsoft.com/office/drawing/2014/main" id="{376B19F1-2707-4A6C-94D6-BF8963F632E0}"/>
+                <a16:creationId xmlns:a16="http://schemas.microsoft.com/office/drawing/2014/main" id="{FD030A93-495C-490C-8437-332B0CA96B5C}"/>
               </a:ext>
             </a:extLst>
           </p:cNvPr>
@@ -14815,7 +14815,7 @@
           <p:cNvPr id="3" name="">
             <a:extLst xmlns:a="http://schemas.openxmlformats.org/drawingml/2006/main">
               <a:ext uri="{FF2B5EF4-FFF2-40B4-BE49-F238E27FC236}">
-                <a16:creationId xmlns:a16="http://schemas.microsoft.com/office/drawing/2014/main" id="{3E89DA9C-972D-430B-AB43-F8E1C0AED047}"/>
+                <a16:creationId xmlns:a16="http://schemas.microsoft.com/office/drawing/2014/main" id="{115982F4-957F-425D-A616-2CC5B31F3B21}"/>
               </a:ext>
             </a:extLst>
           </p:cNvPr>
@@ -14877,7 +14877,7 @@
           <p:cNvPr id="4" name="">
             <a:extLst xmlns:a="http://schemas.openxmlformats.org/drawingml/2006/main">
               <a:ext uri="{FF2B5EF4-FFF2-40B4-BE49-F238E27FC236}">
-                <a16:creationId xmlns:a16="http://schemas.microsoft.com/office/drawing/2014/main" id="{6B861350-4845-4BEB-97E3-D69A9CF9EB7E}"/>
+                <a16:creationId xmlns:a16="http://schemas.microsoft.com/office/drawing/2014/main" id="{C4BA5BEF-D673-4B09-B583-1BE42583B495}"/>
               </a:ext>
             </a:extLst>
           </p:cNvPr>
@@ -14939,7 +14939,7 @@
           <p:cNvPr id="5" name="">
             <a:extLst xmlns:a="http://schemas.openxmlformats.org/drawingml/2006/main">
               <a:ext uri="{FF2B5EF4-FFF2-40B4-BE49-F238E27FC236}">
-                <a16:creationId xmlns:a16="http://schemas.microsoft.com/office/drawing/2014/main" id="{99430BE6-D446-47C3-9E87-8E63B52F037F}"/>
+                <a16:creationId xmlns:a16="http://schemas.microsoft.com/office/drawing/2014/main" id="{A5BE8D4F-2508-4495-B2EC-7AF6F6006D4D}"/>
               </a:ext>
             </a:extLst>
           </p:cNvPr>
@@ -14970,7 +14970,7 @@
           <p:cNvPr id="6" name="">
             <a:extLst xmlns:a="http://schemas.openxmlformats.org/drawingml/2006/main">
               <a:ext uri="{FF2B5EF4-FFF2-40B4-BE49-F238E27FC236}">
-                <a16:creationId xmlns:a16="http://schemas.microsoft.com/office/drawing/2014/main" id="{E36CDB9F-DC9C-4BC5-AE49-2747949060DD}"/>
+                <a16:creationId xmlns:a16="http://schemas.microsoft.com/office/drawing/2014/main" id="{E48C5287-C214-45C7-B244-A9BB60784FA3}"/>
               </a:ext>
             </a:extLst>
           </p:cNvPr>
@@ -15032,7 +15032,7 @@
           <p:cNvPr id="7" name="">
             <a:extLst xmlns:a="http://schemas.openxmlformats.org/drawingml/2006/main">
               <a:ext uri="{FF2B5EF4-FFF2-40B4-BE49-F238E27FC236}">
-                <a16:creationId xmlns:a16="http://schemas.microsoft.com/office/drawing/2014/main" id="{D90A2E73-AF54-4E96-9C94-391034A4FED4}"/>
+                <a16:creationId xmlns:a16="http://schemas.microsoft.com/office/drawing/2014/main" id="{2AA3BA87-B35E-43A6-AA48-6FF2C992B568}"/>
               </a:ext>
             </a:extLst>
           </p:cNvPr>
@@ -15065,7 +15065,7 @@
           <p:cNvPr id="8" name="">
             <a:extLst xmlns:a="http://schemas.openxmlformats.org/drawingml/2006/main">
               <a:ext uri="{FF2B5EF4-FFF2-40B4-BE49-F238E27FC236}">
-                <a16:creationId xmlns:a16="http://schemas.microsoft.com/office/drawing/2014/main" id="{711C58BD-CCAC-4118-9C66-69BD0D3C96D3}"/>
+                <a16:creationId xmlns:a16="http://schemas.microsoft.com/office/drawing/2014/main" id="{105DC10B-7062-42EB-898D-9F460242944F}"/>
               </a:ext>
             </a:extLst>
           </p:cNvPr>
@@ -15100,7 +15100,7 @@
           <p:cNvPr id="9" name="">
             <a:extLst xmlns:a="http://schemas.openxmlformats.org/drawingml/2006/main">
               <a:ext uri="{FF2B5EF4-FFF2-40B4-BE49-F238E27FC236}">
-                <a16:creationId xmlns:a16="http://schemas.microsoft.com/office/drawing/2014/main" id="{9B8FF2BF-5EB8-4C29-A963-BEF3F98E7C21}"/>
+                <a16:creationId xmlns:a16="http://schemas.microsoft.com/office/drawing/2014/main" id="{10FDB2A0-77FB-40A2-BF4D-1F1916FF7613}"/>
               </a:ext>
             </a:extLst>
           </p:cNvPr>
@@ -15131,7 +15131,7 @@
           <p:cNvPr id="10" name="">
             <a:extLst xmlns:a="http://schemas.openxmlformats.org/drawingml/2006/main">
               <a:ext uri="{FF2B5EF4-FFF2-40B4-BE49-F238E27FC236}">
-                <a16:creationId xmlns:a16="http://schemas.microsoft.com/office/drawing/2014/main" id="{E6B988E7-740E-46B6-8136-2A166BDBA111}"/>
+                <a16:creationId xmlns:a16="http://schemas.microsoft.com/office/drawing/2014/main" id="{FE3D689A-7A9D-4492-87CD-41DE9E60E434}"/>
               </a:ext>
             </a:extLst>
           </p:cNvPr>
@@ -15193,7 +15193,7 @@
           <p:cNvPr id="11" name="">
             <a:extLst xmlns:a="http://schemas.openxmlformats.org/drawingml/2006/main">
               <a:ext uri="{FF2B5EF4-FFF2-40B4-BE49-F238E27FC236}">
-                <a16:creationId xmlns:a16="http://schemas.microsoft.com/office/drawing/2014/main" id="{0965AF0B-30C2-4CF3-9653-C7C102F97003}"/>
+                <a16:creationId xmlns:a16="http://schemas.microsoft.com/office/drawing/2014/main" id="{8F03B50B-FBA4-4F9D-9EFB-837B50FA62FC}"/>
               </a:ext>
             </a:extLst>
           </p:cNvPr>
@@ -15255,7 +15255,7 @@
           <p:cNvPr id="12" name="">
             <a:extLst xmlns:a="http://schemas.openxmlformats.org/drawingml/2006/main">
               <a:ext uri="{FF2B5EF4-FFF2-40B4-BE49-F238E27FC236}">
-                <a16:creationId xmlns:a16="http://schemas.microsoft.com/office/drawing/2014/main" id="{A6160B05-72A4-44FE-85F6-26671B6DA782}"/>
+                <a16:creationId xmlns:a16="http://schemas.microsoft.com/office/drawing/2014/main" id="{39E1BA72-D9E3-410D-955D-092F6D6F766E}"/>
               </a:ext>
             </a:extLst>
           </p:cNvPr>
@@ -15317,7 +15317,7 @@
           <p:cNvPr id="13" name="">
             <a:extLst xmlns:a="http://schemas.openxmlformats.org/drawingml/2006/main">
               <a:ext uri="{FF2B5EF4-FFF2-40B4-BE49-F238E27FC236}">
-                <a16:creationId xmlns:a16="http://schemas.microsoft.com/office/drawing/2014/main" id="{F166396F-3EBE-475C-8506-3BDF20152DFE}"/>
+                <a16:creationId xmlns:a16="http://schemas.microsoft.com/office/drawing/2014/main" id="{99C68236-318D-46A4-B0D1-B14C5A54C181}"/>
               </a:ext>
             </a:extLst>
           </p:cNvPr>
@@ -15350,7 +15350,7 @@
           <p:cNvPr id="14" name="">
             <a:extLst xmlns:a="http://schemas.openxmlformats.org/drawingml/2006/main">
               <a:ext uri="{FF2B5EF4-FFF2-40B4-BE49-F238E27FC236}">
-                <a16:creationId xmlns:a16="http://schemas.microsoft.com/office/drawing/2014/main" id="{A29B22B4-E480-48DC-ACD5-0B9640A77B7B}"/>
+                <a16:creationId xmlns:a16="http://schemas.microsoft.com/office/drawing/2014/main" id="{75F9D524-2984-45D3-9516-7A169A6045A9}"/>
               </a:ext>
             </a:extLst>
           </p:cNvPr>
@@ -15385,7 +15385,7 @@
           <p:cNvPr id="15" name="">
             <a:extLst xmlns:a="http://schemas.openxmlformats.org/drawingml/2006/main">
               <a:ext uri="{FF2B5EF4-FFF2-40B4-BE49-F238E27FC236}">
-                <a16:creationId xmlns:a16="http://schemas.microsoft.com/office/drawing/2014/main" id="{6C82A2BC-F035-49E7-80CA-A13505C7F6BC}"/>
+                <a16:creationId xmlns:a16="http://schemas.microsoft.com/office/drawing/2014/main" id="{DFCA8EBB-0175-45B1-AA22-26CDA7F82A9C}"/>
               </a:ext>
             </a:extLst>
           </p:cNvPr>
@@ -15416,7 +15416,7 @@
           <p:cNvPr id="16" name="">
             <a:extLst xmlns:a="http://schemas.openxmlformats.org/drawingml/2006/main">
               <a:ext uri="{FF2B5EF4-FFF2-40B4-BE49-F238E27FC236}">
-                <a16:creationId xmlns:a16="http://schemas.microsoft.com/office/drawing/2014/main" id="{2E405F04-EA1C-4028-9EA9-1F263B40CD2D}"/>
+                <a16:creationId xmlns:a16="http://schemas.microsoft.com/office/drawing/2014/main" id="{BCD4EE73-B00E-4BCD-A0BA-6FFAAE1182EB}"/>
               </a:ext>
             </a:extLst>
           </p:cNvPr>
@@ -15478,7 +15478,7 @@
           <p:cNvPr id="17" name="">
             <a:extLst xmlns:a="http://schemas.openxmlformats.org/drawingml/2006/main">
               <a:ext uri="{FF2B5EF4-FFF2-40B4-BE49-F238E27FC236}">
-                <a16:creationId xmlns:a16="http://schemas.microsoft.com/office/drawing/2014/main" id="{8370279C-C4CC-4F4E-B11B-61CF79851B0C}"/>
+                <a16:creationId xmlns:a16="http://schemas.microsoft.com/office/drawing/2014/main" id="{22D625B7-1B0A-4349-BAE6-3EF12DE1664D}"/>
               </a:ext>
             </a:extLst>
           </p:cNvPr>
@@ -15540,7 +15540,7 @@
           <p:cNvPr id="18" name="">
             <a:extLst xmlns:a="http://schemas.openxmlformats.org/drawingml/2006/main">
               <a:ext uri="{FF2B5EF4-FFF2-40B4-BE49-F238E27FC236}">
-                <a16:creationId xmlns:a16="http://schemas.microsoft.com/office/drawing/2014/main" id="{25886841-B1A3-49C7-949A-EF562CDCC4CD}"/>
+                <a16:creationId xmlns:a16="http://schemas.microsoft.com/office/drawing/2014/main" id="{1AD4AF64-F45D-4AB4-BF67-FDCB81091B95}"/>
               </a:ext>
             </a:extLst>
           </p:cNvPr>
@@ -15602,7 +15602,7 @@
           <p:cNvPr id="19" name="">
             <a:extLst xmlns:a="http://schemas.openxmlformats.org/drawingml/2006/main">
               <a:ext uri="{FF2B5EF4-FFF2-40B4-BE49-F238E27FC236}">
-                <a16:creationId xmlns:a16="http://schemas.microsoft.com/office/drawing/2014/main" id="{D3266050-1E5D-4EB2-A3C5-653EE63870B1}"/>
+                <a16:creationId xmlns:a16="http://schemas.microsoft.com/office/drawing/2014/main" id="{84D65E15-89CF-4065-9D5C-555A5335BFB0}"/>
               </a:ext>
             </a:extLst>
           </p:cNvPr>
@@ -15635,7 +15635,7 @@
           <p:cNvPr id="20" name="">
             <a:extLst xmlns:a="http://schemas.openxmlformats.org/drawingml/2006/main">
               <a:ext uri="{FF2B5EF4-FFF2-40B4-BE49-F238E27FC236}">
-                <a16:creationId xmlns:a16="http://schemas.microsoft.com/office/drawing/2014/main" id="{C9002DBA-C5BF-4159-8547-F8A89BFD35A6}"/>
+                <a16:creationId xmlns:a16="http://schemas.microsoft.com/office/drawing/2014/main" id="{C2653EF0-E600-4131-93EA-576D80409373}"/>
               </a:ext>
             </a:extLst>
           </p:cNvPr>
@@ -15670,7 +15670,7 @@
           <p:cNvPr id="21" name="">
             <a:extLst xmlns:a="http://schemas.openxmlformats.org/drawingml/2006/main">
               <a:ext uri="{FF2B5EF4-FFF2-40B4-BE49-F238E27FC236}">
-                <a16:creationId xmlns:a16="http://schemas.microsoft.com/office/drawing/2014/main" id="{BE20A26F-4927-43EF-B7CC-B4B3D7D479AA}"/>
+                <a16:creationId xmlns:a16="http://schemas.microsoft.com/office/drawing/2014/main" id="{0DD38D1A-D403-42D6-9816-CE086EC69FAD}"/>
               </a:ext>
             </a:extLst>
           </p:cNvPr>
@@ -15701,7 +15701,7 @@
           <p:cNvPr id="22" name="">
             <a:extLst xmlns:a="http://schemas.openxmlformats.org/drawingml/2006/main">
               <a:ext uri="{FF2B5EF4-FFF2-40B4-BE49-F238E27FC236}">
-                <a16:creationId xmlns:a16="http://schemas.microsoft.com/office/drawing/2014/main" id="{309C6DBF-4FCD-4C0F-BB46-C54F3281DF00}"/>
+                <a16:creationId xmlns:a16="http://schemas.microsoft.com/office/drawing/2014/main" id="{C7F15AE7-8BE0-4904-B401-07B3398C722B}"/>
               </a:ext>
             </a:extLst>
           </p:cNvPr>
@@ -15763,7 +15763,7 @@
           <p:cNvPr id="23" name="">
             <a:extLst xmlns:a="http://schemas.openxmlformats.org/drawingml/2006/main">
               <a:ext uri="{FF2B5EF4-FFF2-40B4-BE49-F238E27FC236}">
-                <a16:creationId xmlns:a16="http://schemas.microsoft.com/office/drawing/2014/main" id="{75BCAD1C-01E0-4FD5-9BAA-2A4263397C07}"/>
+                <a16:creationId xmlns:a16="http://schemas.microsoft.com/office/drawing/2014/main" id="{01E071BB-871C-41CD-B701-BC0AC9E83509}"/>
               </a:ext>
             </a:extLst>
           </p:cNvPr>
@@ -15825,7 +15825,7 @@
           <p:cNvPr id="24" name="">
             <a:extLst xmlns:a="http://schemas.openxmlformats.org/drawingml/2006/main">
               <a:ext uri="{FF2B5EF4-FFF2-40B4-BE49-F238E27FC236}">
-                <a16:creationId xmlns:a16="http://schemas.microsoft.com/office/drawing/2014/main" id="{8E98AB97-7035-48A5-A8C4-C3BAD75A1370}"/>
+                <a16:creationId xmlns:a16="http://schemas.microsoft.com/office/drawing/2014/main" id="{5A85B809-6B69-4714-9A5F-0827E74EDF36}"/>
               </a:ext>
             </a:extLst>
           </p:cNvPr>
@@ -15887,7 +15887,7 @@
           <p:cNvPr id="25" name="">
             <a:extLst xmlns:a="http://schemas.openxmlformats.org/drawingml/2006/main">
               <a:ext uri="{FF2B5EF4-FFF2-40B4-BE49-F238E27FC236}">
-                <a16:creationId xmlns:a16="http://schemas.microsoft.com/office/drawing/2014/main" id="{D40BDBDA-CDF5-4EEF-ADB8-DC0A393C91A8}"/>
+                <a16:creationId xmlns:a16="http://schemas.microsoft.com/office/drawing/2014/main" id="{B8B88512-B174-4B15-9F90-FBE8FCC1E0BC}"/>
               </a:ext>
             </a:extLst>
           </p:cNvPr>
@@ -15949,7 +15949,7 @@
           <p:cNvPr id="26" name="">
             <a:extLst xmlns:a="http://schemas.openxmlformats.org/drawingml/2006/main">
               <a:ext uri="{FF2B5EF4-FFF2-40B4-BE49-F238E27FC236}">
-                <a16:creationId xmlns:a16="http://schemas.microsoft.com/office/drawing/2014/main" id="{83989ED8-07B7-4219-B7D9-3B7723F4D126}"/>
+                <a16:creationId xmlns:a16="http://schemas.microsoft.com/office/drawing/2014/main" id="{FB4D1B63-47CC-46A7-8833-D241918A2223}"/>
               </a:ext>
             </a:extLst>
           </p:cNvPr>
@@ -16009,7 +16009,7 @@
     </p:spTree>
     <p:extLst>
       <p:ext uri="{BB962C8B-B14F-4D97-AF65-F5344CB8AC3E}">
-        <p14:creationId xmlns:p14="http://schemas.microsoft.com/office/powerpoint/2010/main" val="1358558418"/>
+        <p14:creationId xmlns:p14="http://schemas.microsoft.com/office/powerpoint/2010/main" val="1028047239"/>
       </p:ext>
     </p:extLst>
   </p:cSld>
@@ -16037,7 +16037,7 @@
           <p:nvPr/>
         </p:nvPicPr>
         <p:blipFill>
-          <a:blip xmlns:r="http://schemas.openxmlformats.org/officeDocument/2006/relationships" xmlns:a="http://schemas.openxmlformats.org/drawingml/2006/main" r:embed="Rc9a45250d62a46a7"/>
+          <a:blip xmlns:r="http://schemas.openxmlformats.org/officeDocument/2006/relationships" xmlns:a="http://schemas.openxmlformats.org/drawingml/2006/main" r:embed="R85f1011ba64b479a"/>
           <a:srcRect xmlns:a="http://schemas.openxmlformats.org/drawingml/2006/main" l="0" t="0" r="0" b="0"/>
           <a:stretch xmlns:a="http://schemas.openxmlformats.org/drawingml/2006/main">
             <a:fillRect l="0" t="0" r="0" b="0"/>
@@ -16058,7 +16058,7 @@
           <p:cNvPr id="2" name="">
             <a:extLst xmlns:a="http://schemas.openxmlformats.org/drawingml/2006/main">
               <a:ext uri="{FF2B5EF4-FFF2-40B4-BE49-F238E27FC236}">
-                <a16:creationId xmlns:a16="http://schemas.microsoft.com/office/drawing/2014/main" id="{37FCF0D6-D100-470A-9F9E-B7DB7C58C30B}"/>
+                <a16:creationId xmlns:a16="http://schemas.microsoft.com/office/drawing/2014/main" id="{1CB0A97E-8F75-451E-937D-C76D527A9BDF}"/>
               </a:ext>
             </a:extLst>
           </p:cNvPr>
@@ -16120,7 +16120,7 @@
           <p:cNvPr id="3" name="">
             <a:extLst xmlns:a="http://schemas.openxmlformats.org/drawingml/2006/main">
               <a:ext uri="{FF2B5EF4-FFF2-40B4-BE49-F238E27FC236}">
-                <a16:creationId xmlns:a16="http://schemas.microsoft.com/office/drawing/2014/main" id="{2782A1D8-68E0-4C99-ABAA-18BC1CCEB07D}"/>
+                <a16:creationId xmlns:a16="http://schemas.microsoft.com/office/drawing/2014/main" id="{334465B8-C23E-4813-8F18-E03D70EA1574}"/>
               </a:ext>
             </a:extLst>
           </p:cNvPr>
@@ -16182,7 +16182,7 @@
           <p:cNvPr id="4" name="">
             <a:extLst xmlns:a="http://schemas.openxmlformats.org/drawingml/2006/main">
               <a:ext uri="{FF2B5EF4-FFF2-40B4-BE49-F238E27FC236}">
-                <a16:creationId xmlns:a16="http://schemas.microsoft.com/office/drawing/2014/main" id="{4F5BDF96-5774-4AE2-9EA5-D633418D8726}"/>
+                <a16:creationId xmlns:a16="http://schemas.microsoft.com/office/drawing/2014/main" id="{5DD08BE0-7468-40A9-9E6E-8004EF024B67}"/>
               </a:ext>
             </a:extLst>
           </p:cNvPr>
@@ -16244,7 +16244,7 @@
           <p:cNvPr id="5" name="">
             <a:extLst xmlns:a="http://schemas.openxmlformats.org/drawingml/2006/main">
               <a:ext uri="{FF2B5EF4-FFF2-40B4-BE49-F238E27FC236}">
-                <a16:creationId xmlns:a16="http://schemas.microsoft.com/office/drawing/2014/main" id="{DE28DF57-3B41-4529-A8C1-305A9E890EB3}"/>
+                <a16:creationId xmlns:a16="http://schemas.microsoft.com/office/drawing/2014/main" id="{032901B4-3E39-49CB-B563-4E9474AC52C9}"/>
               </a:ext>
             </a:extLst>
           </p:cNvPr>
@@ -16275,7 +16275,7 @@
           <p:cNvPr id="6" name="">
             <a:extLst xmlns:a="http://schemas.openxmlformats.org/drawingml/2006/main">
               <a:ext uri="{FF2B5EF4-FFF2-40B4-BE49-F238E27FC236}">
-                <a16:creationId xmlns:a16="http://schemas.microsoft.com/office/drawing/2014/main" id="{B8670016-8219-470C-875D-E0E068E2D6BC}"/>
+                <a16:creationId xmlns:a16="http://schemas.microsoft.com/office/drawing/2014/main" id="{8F24044B-F5D5-4975-B83B-A2339C47A457}"/>
               </a:ext>
             </a:extLst>
           </p:cNvPr>
@@ -16337,7 +16337,7 @@
           <p:cNvPr id="7" name="">
             <a:extLst xmlns:a="http://schemas.openxmlformats.org/drawingml/2006/main">
               <a:ext uri="{FF2B5EF4-FFF2-40B4-BE49-F238E27FC236}">
-                <a16:creationId xmlns:a16="http://schemas.microsoft.com/office/drawing/2014/main" id="{59B40042-C891-4F31-9B47-EC4AEC77795E}"/>
+                <a16:creationId xmlns:a16="http://schemas.microsoft.com/office/drawing/2014/main" id="{93BEFE73-9D63-4E5F-97CC-1986222E0D91}"/>
               </a:ext>
             </a:extLst>
           </p:cNvPr>
@@ -16370,7 +16370,7 @@
           <p:cNvPr id="8" name="">
             <a:extLst xmlns:a="http://schemas.openxmlformats.org/drawingml/2006/main">
               <a:ext uri="{FF2B5EF4-FFF2-40B4-BE49-F238E27FC236}">
-                <a16:creationId xmlns:a16="http://schemas.microsoft.com/office/drawing/2014/main" id="{47CFB7F7-ADA5-4EF5-A218-02EFE3975B9A}"/>
+                <a16:creationId xmlns:a16="http://schemas.microsoft.com/office/drawing/2014/main" id="{D68BEF5D-7C6F-4BCD-B043-7F8019EF2009}"/>
               </a:ext>
             </a:extLst>
           </p:cNvPr>
@@ -16405,7 +16405,7 @@
           <p:cNvPr id="9" name="">
             <a:extLst xmlns:a="http://schemas.openxmlformats.org/drawingml/2006/main">
               <a:ext uri="{FF2B5EF4-FFF2-40B4-BE49-F238E27FC236}">
-                <a16:creationId xmlns:a16="http://schemas.microsoft.com/office/drawing/2014/main" id="{5C0F7E9D-4C77-43FF-8B83-9524B83DD7C0}"/>
+                <a16:creationId xmlns:a16="http://schemas.microsoft.com/office/drawing/2014/main" id="{AA99ED17-6477-4C34-932A-63EA08149AAA}"/>
               </a:ext>
             </a:extLst>
           </p:cNvPr>
@@ -16436,7 +16436,7 @@
           <p:cNvPr id="10" name="">
             <a:extLst xmlns:a="http://schemas.openxmlformats.org/drawingml/2006/main">
               <a:ext uri="{FF2B5EF4-FFF2-40B4-BE49-F238E27FC236}">
-                <a16:creationId xmlns:a16="http://schemas.microsoft.com/office/drawing/2014/main" id="{171488F0-A913-4A2A-92B9-F33B399B9CAF}"/>
+                <a16:creationId xmlns:a16="http://schemas.microsoft.com/office/drawing/2014/main" id="{651B447B-3763-4C5F-86FD-8CC4DF1387D1}"/>
               </a:ext>
             </a:extLst>
           </p:cNvPr>
@@ -16498,7 +16498,7 @@
           <p:cNvPr id="11" name="">
             <a:extLst xmlns:a="http://schemas.openxmlformats.org/drawingml/2006/main">
               <a:ext uri="{FF2B5EF4-FFF2-40B4-BE49-F238E27FC236}">
-                <a16:creationId xmlns:a16="http://schemas.microsoft.com/office/drawing/2014/main" id="{0AC7DE15-0AFC-4DF6-B495-4FB784522855}"/>
+                <a16:creationId xmlns:a16="http://schemas.microsoft.com/office/drawing/2014/main" id="{620B361B-BFD9-4A26-839A-4C4BAB5364E4}"/>
               </a:ext>
             </a:extLst>
           </p:cNvPr>
@@ -16560,7 +16560,7 @@
           <p:cNvPr id="12" name="">
             <a:extLst xmlns:a="http://schemas.openxmlformats.org/drawingml/2006/main">
               <a:ext uri="{FF2B5EF4-FFF2-40B4-BE49-F238E27FC236}">
-                <a16:creationId xmlns:a16="http://schemas.microsoft.com/office/drawing/2014/main" id="{4F4DE83A-9CE0-4D8A-AD40-779E0B792FD2}"/>
+                <a16:creationId xmlns:a16="http://schemas.microsoft.com/office/drawing/2014/main" id="{DFFC4A8B-27A3-4CA1-8379-36C6FE479F7E}"/>
               </a:ext>
             </a:extLst>
           </p:cNvPr>
@@ -16593,7 +16593,7 @@
           <p:cNvPr id="13" name="">
             <a:extLst xmlns:a="http://schemas.openxmlformats.org/drawingml/2006/main">
               <a:ext uri="{FF2B5EF4-FFF2-40B4-BE49-F238E27FC236}">
-                <a16:creationId xmlns:a16="http://schemas.microsoft.com/office/drawing/2014/main" id="{AC04D8B0-8477-4205-9AB7-7340CB318AA8}"/>
+                <a16:creationId xmlns:a16="http://schemas.microsoft.com/office/drawing/2014/main" id="{5B1C6833-CFEC-43A4-871B-D466088B59B2}"/>
               </a:ext>
             </a:extLst>
           </p:cNvPr>
@@ -16628,7 +16628,7 @@
           <p:cNvPr id="14" name="">
             <a:extLst xmlns:a="http://schemas.openxmlformats.org/drawingml/2006/main">
               <a:ext uri="{FF2B5EF4-FFF2-40B4-BE49-F238E27FC236}">
-                <a16:creationId xmlns:a16="http://schemas.microsoft.com/office/drawing/2014/main" id="{00CBED4A-1CC2-48A5-9562-2676EA0066DB}"/>
+                <a16:creationId xmlns:a16="http://schemas.microsoft.com/office/drawing/2014/main" id="{B428F11C-103E-4AFC-988C-A78497D3330D}"/>
               </a:ext>
             </a:extLst>
           </p:cNvPr>
@@ -16659,7 +16659,7 @@
           <p:cNvPr id="15" name="">
             <a:extLst xmlns:a="http://schemas.openxmlformats.org/drawingml/2006/main">
               <a:ext uri="{FF2B5EF4-FFF2-40B4-BE49-F238E27FC236}">
-                <a16:creationId xmlns:a16="http://schemas.microsoft.com/office/drawing/2014/main" id="{112A2B4A-5AF8-44D5-9E62-A2F3831E85B1}"/>
+                <a16:creationId xmlns:a16="http://schemas.microsoft.com/office/drawing/2014/main" id="{A3028DA3-AF6C-4D01-B8FB-6555D6BCFD3C}"/>
               </a:ext>
             </a:extLst>
           </p:cNvPr>
@@ -16721,7 +16721,7 @@
           <p:cNvPr id="16" name="">
             <a:extLst xmlns:a="http://schemas.openxmlformats.org/drawingml/2006/main">
               <a:ext uri="{FF2B5EF4-FFF2-40B4-BE49-F238E27FC236}">
-                <a16:creationId xmlns:a16="http://schemas.microsoft.com/office/drawing/2014/main" id="{E9AE362C-3927-464B-933E-5CE7CF22901C}"/>
+                <a16:creationId xmlns:a16="http://schemas.microsoft.com/office/drawing/2014/main" id="{BF102510-55FA-4466-9C94-F8A0392FDA1D}"/>
               </a:ext>
             </a:extLst>
           </p:cNvPr>
@@ -16783,7 +16783,7 @@
           <p:cNvPr id="17" name="">
             <a:extLst xmlns:a="http://schemas.openxmlformats.org/drawingml/2006/main">
               <a:ext uri="{FF2B5EF4-FFF2-40B4-BE49-F238E27FC236}">
-                <a16:creationId xmlns:a16="http://schemas.microsoft.com/office/drawing/2014/main" id="{94E845AC-8DFF-47E5-8475-33987159AC13}"/>
+                <a16:creationId xmlns:a16="http://schemas.microsoft.com/office/drawing/2014/main" id="{25556C29-2565-4193-9049-7F3581C7E6A5}"/>
               </a:ext>
             </a:extLst>
           </p:cNvPr>
@@ -16816,7 +16816,7 @@
           <p:cNvPr id="18" name="">
             <a:extLst xmlns:a="http://schemas.openxmlformats.org/drawingml/2006/main">
               <a:ext uri="{FF2B5EF4-FFF2-40B4-BE49-F238E27FC236}">
-                <a16:creationId xmlns:a16="http://schemas.microsoft.com/office/drawing/2014/main" id="{D0DB3F5F-C2CA-463F-97DC-3BF058CC2EA9}"/>
+                <a16:creationId xmlns:a16="http://schemas.microsoft.com/office/drawing/2014/main" id="{F57CE724-B377-46C1-A81D-3FCAAF213B36}"/>
               </a:ext>
             </a:extLst>
           </p:cNvPr>
@@ -16851,7 +16851,7 @@
           <p:cNvPr id="19" name="">
             <a:extLst xmlns:a="http://schemas.openxmlformats.org/drawingml/2006/main">
               <a:ext uri="{FF2B5EF4-FFF2-40B4-BE49-F238E27FC236}">
-                <a16:creationId xmlns:a16="http://schemas.microsoft.com/office/drawing/2014/main" id="{8C239114-287E-4997-9222-8B2E40ED173A}"/>
+                <a16:creationId xmlns:a16="http://schemas.microsoft.com/office/drawing/2014/main" id="{D5189825-9C80-4B10-AA6D-2EAE86832E54}"/>
               </a:ext>
             </a:extLst>
           </p:cNvPr>
@@ -16882,7 +16882,7 @@
           <p:cNvPr id="20" name="">
             <a:extLst xmlns:a="http://schemas.openxmlformats.org/drawingml/2006/main">
               <a:ext uri="{FF2B5EF4-FFF2-40B4-BE49-F238E27FC236}">
-                <a16:creationId xmlns:a16="http://schemas.microsoft.com/office/drawing/2014/main" id="{2ECA9EB3-4955-4C37-810B-D8A7F07B1C04}"/>
+                <a16:creationId xmlns:a16="http://schemas.microsoft.com/office/drawing/2014/main" id="{176B40C3-28F2-4614-B030-E3A45B19ED89}"/>
               </a:ext>
             </a:extLst>
           </p:cNvPr>
@@ -16944,7 +16944,7 @@
           <p:cNvPr id="21" name="">
             <a:extLst xmlns:a="http://schemas.openxmlformats.org/drawingml/2006/main">
               <a:ext uri="{FF2B5EF4-FFF2-40B4-BE49-F238E27FC236}">
-                <a16:creationId xmlns:a16="http://schemas.microsoft.com/office/drawing/2014/main" id="{64174944-1186-477D-A72D-92A7389984D6}"/>
+                <a16:creationId xmlns:a16="http://schemas.microsoft.com/office/drawing/2014/main" id="{9CD0FDE2-F05E-4549-BF2B-A88D9BF0E8B6}"/>
               </a:ext>
             </a:extLst>
           </p:cNvPr>
@@ -17006,7 +17006,7 @@
           <p:cNvPr id="22" name="">
             <a:extLst xmlns:a="http://schemas.openxmlformats.org/drawingml/2006/main">
               <a:ext uri="{FF2B5EF4-FFF2-40B4-BE49-F238E27FC236}">
-                <a16:creationId xmlns:a16="http://schemas.microsoft.com/office/drawing/2014/main" id="{AB77168F-4319-4536-AE5E-E7B7D3E5F2B3}"/>
+                <a16:creationId xmlns:a16="http://schemas.microsoft.com/office/drawing/2014/main" id="{D79594EB-CBFC-439B-B908-6CE576D91195}"/>
               </a:ext>
             </a:extLst>
           </p:cNvPr>
@@ -17068,7 +17068,7 @@
           <p:cNvPr id="23" name="">
             <a:extLst xmlns:a="http://schemas.openxmlformats.org/drawingml/2006/main">
               <a:ext uri="{FF2B5EF4-FFF2-40B4-BE49-F238E27FC236}">
-                <a16:creationId xmlns:a16="http://schemas.microsoft.com/office/drawing/2014/main" id="{D799269E-88AD-4CA6-B220-D659545C1BF3}"/>
+                <a16:creationId xmlns:a16="http://schemas.microsoft.com/office/drawing/2014/main" id="{B92BBD12-FFE1-466C-8202-59CAE155D075}"/>
               </a:ext>
             </a:extLst>
           </p:cNvPr>
@@ -17128,7 +17128,7 @@
     </p:spTree>
     <p:extLst>
       <p:ext uri="{BB962C8B-B14F-4D97-AF65-F5344CB8AC3E}">
-        <p14:creationId xmlns:p14="http://schemas.microsoft.com/office/powerpoint/2010/main" val="1235697276"/>
+        <p14:creationId xmlns:p14="http://schemas.microsoft.com/office/powerpoint/2010/main" val="449941323"/>
       </p:ext>
     </p:extLst>
   </p:cSld>
@@ -17156,7 +17156,7 @@
           <p:nvPr/>
         </p:nvPicPr>
         <p:blipFill>
-          <a:blip xmlns:r="http://schemas.openxmlformats.org/officeDocument/2006/relationships" xmlns:a="http://schemas.openxmlformats.org/drawingml/2006/main" r:embed="Rfad0fe1b7d014f3c"/>
+          <a:blip xmlns:r="http://schemas.openxmlformats.org/officeDocument/2006/relationships" xmlns:a="http://schemas.openxmlformats.org/drawingml/2006/main" r:embed="R2399ff1f13b149c7"/>
           <a:srcRect xmlns:a="http://schemas.openxmlformats.org/drawingml/2006/main" l="0" t="0" r="0" b="0"/>
           <a:stretch xmlns:a="http://schemas.openxmlformats.org/drawingml/2006/main">
             <a:fillRect l="0" t="0" r="0" b="0"/>
@@ -17177,7 +17177,7 @@
           <p:cNvPr id="2" name="">
             <a:extLst xmlns:a="http://schemas.openxmlformats.org/drawingml/2006/main">
               <a:ext uri="{FF2B5EF4-FFF2-40B4-BE49-F238E27FC236}">
-                <a16:creationId xmlns:a16="http://schemas.microsoft.com/office/drawing/2014/main" id="{2BF807E9-46A3-46A5-8E85-1C38736EA91E}"/>
+                <a16:creationId xmlns:a16="http://schemas.microsoft.com/office/drawing/2014/main" id="{D2F25E34-82ED-4A19-A7FA-B11CF76E7AEF}"/>
               </a:ext>
             </a:extLst>
           </p:cNvPr>
@@ -17239,7 +17239,7 @@
           <p:cNvPr id="3" name="">
             <a:extLst xmlns:a="http://schemas.openxmlformats.org/drawingml/2006/main">
               <a:ext uri="{FF2B5EF4-FFF2-40B4-BE49-F238E27FC236}">
-                <a16:creationId xmlns:a16="http://schemas.microsoft.com/office/drawing/2014/main" id="{A503191A-C503-41A8-B143-E4E89CE59B71}"/>
+                <a16:creationId xmlns:a16="http://schemas.microsoft.com/office/drawing/2014/main" id="{8D085F4B-9193-47FE-9383-B413C084A6F1}"/>
               </a:ext>
             </a:extLst>
           </p:cNvPr>
@@ -17301,7 +17301,7 @@
           <p:cNvPr id="4" name="">
             <a:extLst xmlns:a="http://schemas.openxmlformats.org/drawingml/2006/main">
               <a:ext uri="{FF2B5EF4-FFF2-40B4-BE49-F238E27FC236}">
-                <a16:creationId xmlns:a16="http://schemas.microsoft.com/office/drawing/2014/main" id="{12755D10-8FA6-4C57-A1BC-1DA68BF86883}"/>
+                <a16:creationId xmlns:a16="http://schemas.microsoft.com/office/drawing/2014/main" id="{5A74DCF9-7879-48AD-A0E1-FA81A7C7B5CD}"/>
               </a:ext>
             </a:extLst>
           </p:cNvPr>
@@ -17363,7 +17363,7 @@
           <p:cNvPr id="5" name="">
             <a:extLst xmlns:a="http://schemas.openxmlformats.org/drawingml/2006/main">
               <a:ext uri="{FF2B5EF4-FFF2-40B4-BE49-F238E27FC236}">
-                <a16:creationId xmlns:a16="http://schemas.microsoft.com/office/drawing/2014/main" id="{9DAE682D-B18E-493B-97F7-FBB456845FBD}"/>
+                <a16:creationId xmlns:a16="http://schemas.microsoft.com/office/drawing/2014/main" id="{254F1514-C9F7-4CCE-B1D5-E93B6DACE35C}"/>
               </a:ext>
             </a:extLst>
           </p:cNvPr>
@@ -17394,7 +17394,7 @@
           <p:cNvPr id="6" name="">
             <a:extLst xmlns:a="http://schemas.openxmlformats.org/drawingml/2006/main">
               <a:ext uri="{FF2B5EF4-FFF2-40B4-BE49-F238E27FC236}">
-                <a16:creationId xmlns:a16="http://schemas.microsoft.com/office/drawing/2014/main" id="{B405F72A-0C79-4A47-B725-CA793B3534D5}"/>
+                <a16:creationId xmlns:a16="http://schemas.microsoft.com/office/drawing/2014/main" id="{7F118BE0-2A8B-4A81-86AF-ACCD2B021C30}"/>
               </a:ext>
             </a:extLst>
           </p:cNvPr>
@@ -17456,7 +17456,7 @@
           <p:cNvPr id="7" name="">
             <a:extLst xmlns:a="http://schemas.openxmlformats.org/drawingml/2006/main">
               <a:ext uri="{FF2B5EF4-FFF2-40B4-BE49-F238E27FC236}">
-                <a16:creationId xmlns:a16="http://schemas.microsoft.com/office/drawing/2014/main" id="{014EB0C1-7B1B-4AC6-92FB-5302E38D2741}"/>
+                <a16:creationId xmlns:a16="http://schemas.microsoft.com/office/drawing/2014/main" id="{EE898D88-BE96-4366-A909-C06C3AD4A8F0}"/>
               </a:ext>
             </a:extLst>
           </p:cNvPr>
@@ -17489,7 +17489,7 @@
           <p:cNvPr id="8" name="">
             <a:extLst xmlns:a="http://schemas.openxmlformats.org/drawingml/2006/main">
               <a:ext uri="{FF2B5EF4-FFF2-40B4-BE49-F238E27FC236}">
-                <a16:creationId xmlns:a16="http://schemas.microsoft.com/office/drawing/2014/main" id="{64383FA2-18D5-4730-BCDA-50BE60D181F3}"/>
+                <a16:creationId xmlns:a16="http://schemas.microsoft.com/office/drawing/2014/main" id="{8E17D5BD-6DA5-426D-A49F-74DC96F3B455}"/>
               </a:ext>
             </a:extLst>
           </p:cNvPr>
@@ -17524,7 +17524,7 @@
           <p:cNvPr id="9" name="">
             <a:extLst xmlns:a="http://schemas.openxmlformats.org/drawingml/2006/main">
               <a:ext uri="{FF2B5EF4-FFF2-40B4-BE49-F238E27FC236}">
-                <a16:creationId xmlns:a16="http://schemas.microsoft.com/office/drawing/2014/main" id="{11A44067-6DDF-4F9C-A135-4DBD32E163D3}"/>
+                <a16:creationId xmlns:a16="http://schemas.microsoft.com/office/drawing/2014/main" id="{FFE99B83-8125-4375-87B8-F77D8C1003AC}"/>
               </a:ext>
             </a:extLst>
           </p:cNvPr>
@@ -17555,7 +17555,7 @@
           <p:cNvPr id="10" name="">
             <a:extLst xmlns:a="http://schemas.openxmlformats.org/drawingml/2006/main">
               <a:ext uri="{FF2B5EF4-FFF2-40B4-BE49-F238E27FC236}">
-                <a16:creationId xmlns:a16="http://schemas.microsoft.com/office/drawing/2014/main" id="{0ED5AF19-233B-43B5-A636-FAB5C7AE5572}"/>
+                <a16:creationId xmlns:a16="http://schemas.microsoft.com/office/drawing/2014/main" id="{1BE41323-CAF6-48EE-B78A-8D7018A8C092}"/>
               </a:ext>
             </a:extLst>
           </p:cNvPr>
@@ -17617,7 +17617,7 @@
           <p:cNvPr id="11" name="">
             <a:extLst xmlns:a="http://schemas.openxmlformats.org/drawingml/2006/main">
               <a:ext uri="{FF2B5EF4-FFF2-40B4-BE49-F238E27FC236}">
-                <a16:creationId xmlns:a16="http://schemas.microsoft.com/office/drawing/2014/main" id="{DAD51C37-5B00-461D-B20A-EA8E273A0B00}"/>
+                <a16:creationId xmlns:a16="http://schemas.microsoft.com/office/drawing/2014/main" id="{A147C010-A517-48C6-A27E-7159107D346E}"/>
               </a:ext>
             </a:extLst>
           </p:cNvPr>
@@ -17679,7 +17679,7 @@
           <p:cNvPr id="12" name="">
             <a:extLst xmlns:a="http://schemas.openxmlformats.org/drawingml/2006/main">
               <a:ext uri="{FF2B5EF4-FFF2-40B4-BE49-F238E27FC236}">
-                <a16:creationId xmlns:a16="http://schemas.microsoft.com/office/drawing/2014/main" id="{F248F884-13FB-4BD0-A9E4-9C07B6D450CE}"/>
+                <a16:creationId xmlns:a16="http://schemas.microsoft.com/office/drawing/2014/main" id="{00A468B4-B1E5-4ADC-B880-2CD318BA4A38}"/>
               </a:ext>
             </a:extLst>
           </p:cNvPr>
@@ -17712,7 +17712,7 @@
           <p:cNvPr id="13" name="">
             <a:extLst xmlns:a="http://schemas.openxmlformats.org/drawingml/2006/main">
               <a:ext uri="{FF2B5EF4-FFF2-40B4-BE49-F238E27FC236}">
-                <a16:creationId xmlns:a16="http://schemas.microsoft.com/office/drawing/2014/main" id="{17A1BFCF-23DF-428B-98D0-34E8CB871E8D}"/>
+                <a16:creationId xmlns:a16="http://schemas.microsoft.com/office/drawing/2014/main" id="{E37C3BA5-1382-4B0B-86D6-C4F46E5EBD3A}"/>
               </a:ext>
             </a:extLst>
           </p:cNvPr>
@@ -17747,7 +17747,7 @@
           <p:cNvPr id="14" name="">
             <a:extLst xmlns:a="http://schemas.openxmlformats.org/drawingml/2006/main">
               <a:ext uri="{FF2B5EF4-FFF2-40B4-BE49-F238E27FC236}">
-                <a16:creationId xmlns:a16="http://schemas.microsoft.com/office/drawing/2014/main" id="{E91E5560-E8F1-47BE-971A-A8325C7A8C07}"/>
+                <a16:creationId xmlns:a16="http://schemas.microsoft.com/office/drawing/2014/main" id="{FD7586C2-E6BE-475B-96DF-2760C2270CF8}"/>
               </a:ext>
             </a:extLst>
           </p:cNvPr>
@@ -17778,7 +17778,7 @@
           <p:cNvPr id="15" name="">
             <a:extLst xmlns:a="http://schemas.openxmlformats.org/drawingml/2006/main">
               <a:ext uri="{FF2B5EF4-FFF2-40B4-BE49-F238E27FC236}">
-                <a16:creationId xmlns:a16="http://schemas.microsoft.com/office/drawing/2014/main" id="{8167F5A4-F5F9-4116-8921-19E835CCFD2E}"/>
+                <a16:creationId xmlns:a16="http://schemas.microsoft.com/office/drawing/2014/main" id="{63A0330C-38FC-4A82-A671-48541F39164C}"/>
               </a:ext>
             </a:extLst>
           </p:cNvPr>
@@ -17840,7 +17840,7 @@
           <p:cNvPr id="16" name="">
             <a:extLst xmlns:a="http://schemas.openxmlformats.org/drawingml/2006/main">
               <a:ext uri="{FF2B5EF4-FFF2-40B4-BE49-F238E27FC236}">
-                <a16:creationId xmlns:a16="http://schemas.microsoft.com/office/drawing/2014/main" id="{E44515A7-FDC5-4F09-BD86-80A9DAB4C967}"/>
+                <a16:creationId xmlns:a16="http://schemas.microsoft.com/office/drawing/2014/main" id="{04D60355-B807-4D2A-8CE4-FFC082CAAD63}"/>
               </a:ext>
             </a:extLst>
           </p:cNvPr>
@@ -17902,7 +17902,7 @@
           <p:cNvPr id="17" name="">
             <a:extLst xmlns:a="http://schemas.openxmlformats.org/drawingml/2006/main">
               <a:ext uri="{FF2B5EF4-FFF2-40B4-BE49-F238E27FC236}">
-                <a16:creationId xmlns:a16="http://schemas.microsoft.com/office/drawing/2014/main" id="{3D854A9E-03A9-499A-83D9-DD3F881D98C5}"/>
+                <a16:creationId xmlns:a16="http://schemas.microsoft.com/office/drawing/2014/main" id="{D7881FB3-83CD-47EB-8916-508843B89C56}"/>
               </a:ext>
             </a:extLst>
           </p:cNvPr>
@@ -17964,7 +17964,7 @@
           <p:cNvPr id="18" name="">
             <a:extLst xmlns:a="http://schemas.openxmlformats.org/drawingml/2006/main">
               <a:ext uri="{FF2B5EF4-FFF2-40B4-BE49-F238E27FC236}">
-                <a16:creationId xmlns:a16="http://schemas.microsoft.com/office/drawing/2014/main" id="{5C0A7E7C-A7D7-4E88-9C26-CDBDEF7B1FE3}"/>
+                <a16:creationId xmlns:a16="http://schemas.microsoft.com/office/drawing/2014/main" id="{B448B975-EF35-492E-B6E0-2B92B52EA67D}"/>
               </a:ext>
             </a:extLst>
           </p:cNvPr>
@@ -18024,7 +18024,7 @@
     </p:spTree>
     <p:extLst>
       <p:ext uri="{BB962C8B-B14F-4D97-AF65-F5344CB8AC3E}">
-        <p14:creationId xmlns:p14="http://schemas.microsoft.com/office/powerpoint/2010/main" val="1520776583"/>
+        <p14:creationId xmlns:p14="http://schemas.microsoft.com/office/powerpoint/2010/main" val="1113067211"/>
       </p:ext>
     </p:extLst>
   </p:cSld>
@@ -18052,7 +18052,7 @@
           <p:nvPr/>
         </p:nvPicPr>
         <p:blipFill>
-          <a:blip xmlns:r="http://schemas.openxmlformats.org/officeDocument/2006/relationships" xmlns:a="http://schemas.openxmlformats.org/drawingml/2006/main" r:embed="R87f4264dc7094e7f"/>
+          <a:blip xmlns:r="http://schemas.openxmlformats.org/officeDocument/2006/relationships" xmlns:a="http://schemas.openxmlformats.org/drawingml/2006/main" r:embed="R6b8fff67573a42d6"/>
           <a:srcRect xmlns:a="http://schemas.openxmlformats.org/drawingml/2006/main" l="0" t="0" r="0" b="0"/>
           <a:stretch xmlns:a="http://schemas.openxmlformats.org/drawingml/2006/main">
             <a:fillRect l="0" t="0" r="0" b="0"/>
@@ -18073,7 +18073,7 @@
           <p:cNvPr id="2" name="">
             <a:extLst xmlns:a="http://schemas.openxmlformats.org/drawingml/2006/main">
               <a:ext uri="{FF2B5EF4-FFF2-40B4-BE49-F238E27FC236}">
-                <a16:creationId xmlns:a16="http://schemas.microsoft.com/office/drawing/2014/main" id="{FEE9198C-DCB6-48B5-8417-C71F8A01A282}"/>
+                <a16:creationId xmlns:a16="http://schemas.microsoft.com/office/drawing/2014/main" id="{FC6D75F7-3A6E-4A9F-835C-B5182C339065}"/>
               </a:ext>
             </a:extLst>
           </p:cNvPr>
@@ -18135,7 +18135,7 @@
           <p:cNvPr id="3" name="">
             <a:extLst xmlns:a="http://schemas.openxmlformats.org/drawingml/2006/main">
               <a:ext uri="{FF2B5EF4-FFF2-40B4-BE49-F238E27FC236}">
-                <a16:creationId xmlns:a16="http://schemas.microsoft.com/office/drawing/2014/main" id="{4AAA9A54-55C3-4787-8388-31C93DFE3E59}"/>
+                <a16:creationId xmlns:a16="http://schemas.microsoft.com/office/drawing/2014/main" id="{52D231C6-4EF8-4857-BEED-9B07FE2B3B24}"/>
               </a:ext>
             </a:extLst>
           </p:cNvPr>
@@ -18197,7 +18197,7 @@
           <p:cNvPr id="4" name="">
             <a:extLst xmlns:a="http://schemas.openxmlformats.org/drawingml/2006/main">
               <a:ext uri="{FF2B5EF4-FFF2-40B4-BE49-F238E27FC236}">
-                <a16:creationId xmlns:a16="http://schemas.microsoft.com/office/drawing/2014/main" id="{9B575777-2510-40A0-A724-8D672680DA06}"/>
+                <a16:creationId xmlns:a16="http://schemas.microsoft.com/office/drawing/2014/main" id="{5CD308FF-2D67-4D54-9DF7-2A193010659C}"/>
               </a:ext>
             </a:extLst>
           </p:cNvPr>
@@ -18259,7 +18259,7 @@
           <p:cNvPr id="5" name="">
             <a:extLst xmlns:a="http://schemas.openxmlformats.org/drawingml/2006/main">
               <a:ext uri="{FF2B5EF4-FFF2-40B4-BE49-F238E27FC236}">
-                <a16:creationId xmlns:a16="http://schemas.microsoft.com/office/drawing/2014/main" id="{D0615238-8E0D-44E5-A3F6-FB9EE2EDD3BE}"/>
+                <a16:creationId xmlns:a16="http://schemas.microsoft.com/office/drawing/2014/main" id="{2D58D47E-30A1-41F8-B327-5B997C0142F4}"/>
               </a:ext>
             </a:extLst>
           </p:cNvPr>
@@ -18290,7 +18290,7 @@
           <p:cNvPr id="6" name="">
             <a:extLst xmlns:a="http://schemas.openxmlformats.org/drawingml/2006/main">
               <a:ext uri="{FF2B5EF4-FFF2-40B4-BE49-F238E27FC236}">
-                <a16:creationId xmlns:a16="http://schemas.microsoft.com/office/drawing/2014/main" id="{974ADD4A-803B-4296-80BC-8AF232645F1E}"/>
+                <a16:creationId xmlns:a16="http://schemas.microsoft.com/office/drawing/2014/main" id="{60785357-CBF7-48E8-B9B6-CB0E740E3BCF}"/>
               </a:ext>
             </a:extLst>
           </p:cNvPr>
@@ -18352,7 +18352,7 @@
           <p:cNvPr id="7" name="">
             <a:extLst xmlns:a="http://schemas.openxmlformats.org/drawingml/2006/main">
               <a:ext uri="{FF2B5EF4-FFF2-40B4-BE49-F238E27FC236}">
-                <a16:creationId xmlns:a16="http://schemas.microsoft.com/office/drawing/2014/main" id="{FE3F2C56-DDDC-4C1D-BEC9-6A1B738273B1}"/>
+                <a16:creationId xmlns:a16="http://schemas.microsoft.com/office/drawing/2014/main" id="{FE738F69-A4CC-4C6B-869C-FE4787004F24}"/>
               </a:ext>
             </a:extLst>
           </p:cNvPr>
@@ -18385,7 +18385,7 @@
           <p:cNvPr id="8" name="">
             <a:extLst xmlns:a="http://schemas.openxmlformats.org/drawingml/2006/main">
               <a:ext uri="{FF2B5EF4-FFF2-40B4-BE49-F238E27FC236}">
-                <a16:creationId xmlns:a16="http://schemas.microsoft.com/office/drawing/2014/main" id="{753B204F-951A-4A2B-96C7-A7D80750D7F0}"/>
+                <a16:creationId xmlns:a16="http://schemas.microsoft.com/office/drawing/2014/main" id="{2B4DA819-D8C9-418D-911C-18290920495B}"/>
               </a:ext>
             </a:extLst>
           </p:cNvPr>
@@ -18420,7 +18420,7 @@
           <p:cNvPr id="9" name="">
             <a:extLst xmlns:a="http://schemas.openxmlformats.org/drawingml/2006/main">
               <a:ext uri="{FF2B5EF4-FFF2-40B4-BE49-F238E27FC236}">
-                <a16:creationId xmlns:a16="http://schemas.microsoft.com/office/drawing/2014/main" id="{4DF60F39-AC01-469D-BF2C-ABB47AF3575E}"/>
+                <a16:creationId xmlns:a16="http://schemas.microsoft.com/office/drawing/2014/main" id="{8EC3875B-9429-4C4B-BD87-6074DF89C0D8}"/>
               </a:ext>
             </a:extLst>
           </p:cNvPr>
@@ -18451,7 +18451,7 @@
           <p:cNvPr id="10" name="">
             <a:extLst xmlns:a="http://schemas.openxmlformats.org/drawingml/2006/main">
               <a:ext uri="{FF2B5EF4-FFF2-40B4-BE49-F238E27FC236}">
-                <a16:creationId xmlns:a16="http://schemas.microsoft.com/office/drawing/2014/main" id="{3EBE4944-1F11-4980-8859-A75D421E6E03}"/>
+                <a16:creationId xmlns:a16="http://schemas.microsoft.com/office/drawing/2014/main" id="{27E11531-0F9A-410C-8061-87E82B167F4D}"/>
               </a:ext>
             </a:extLst>
           </p:cNvPr>
@@ -18513,7 +18513,7 @@
           <p:cNvPr id="11" name="">
             <a:extLst xmlns:a="http://schemas.openxmlformats.org/drawingml/2006/main">
               <a:ext uri="{FF2B5EF4-FFF2-40B4-BE49-F238E27FC236}">
-                <a16:creationId xmlns:a16="http://schemas.microsoft.com/office/drawing/2014/main" id="{17FE8094-8E00-41F4-8BD1-F7521F83557E}"/>
+                <a16:creationId xmlns:a16="http://schemas.microsoft.com/office/drawing/2014/main" id="{23637BC4-C58F-4743-AAF6-4615658A79B9}"/>
               </a:ext>
             </a:extLst>
           </p:cNvPr>
@@ -18575,7 +18575,7 @@
           <p:cNvPr id="12" name="">
             <a:extLst xmlns:a="http://schemas.openxmlformats.org/drawingml/2006/main">
               <a:ext uri="{FF2B5EF4-FFF2-40B4-BE49-F238E27FC236}">
-                <a16:creationId xmlns:a16="http://schemas.microsoft.com/office/drawing/2014/main" id="{6F5161C1-2D8C-41EB-AECC-1AE6413B98CB}"/>
+                <a16:creationId xmlns:a16="http://schemas.microsoft.com/office/drawing/2014/main" id="{A99B0933-F00D-47B0-9AB5-2D2E3E1B126B}"/>
               </a:ext>
             </a:extLst>
           </p:cNvPr>
@@ -18637,7 +18637,7 @@
           <p:cNvPr id="13" name="">
             <a:extLst xmlns:a="http://schemas.openxmlformats.org/drawingml/2006/main">
               <a:ext uri="{FF2B5EF4-FFF2-40B4-BE49-F238E27FC236}">
-                <a16:creationId xmlns:a16="http://schemas.microsoft.com/office/drawing/2014/main" id="{9ECA5A0D-0C1C-4A74-BF9B-2BD385FB8C49}"/>
+                <a16:creationId xmlns:a16="http://schemas.microsoft.com/office/drawing/2014/main" id="{2280874B-ACFE-431C-933C-21351C19AEC0}"/>
               </a:ext>
             </a:extLst>
           </p:cNvPr>
@@ -18670,7 +18670,7 @@
           <p:cNvPr id="14" name="">
             <a:extLst xmlns:a="http://schemas.openxmlformats.org/drawingml/2006/main">
               <a:ext uri="{FF2B5EF4-FFF2-40B4-BE49-F238E27FC236}">
-                <a16:creationId xmlns:a16="http://schemas.microsoft.com/office/drawing/2014/main" id="{AC2304E6-F97D-4036-BF06-F041C9692422}"/>
+                <a16:creationId xmlns:a16="http://schemas.microsoft.com/office/drawing/2014/main" id="{092DE216-C9AA-4E6C-9D4F-CB21D3D0F751}"/>
               </a:ext>
             </a:extLst>
           </p:cNvPr>
@@ -18705,7 +18705,7 @@
           <p:cNvPr id="15" name="">
             <a:extLst xmlns:a="http://schemas.openxmlformats.org/drawingml/2006/main">
               <a:ext uri="{FF2B5EF4-FFF2-40B4-BE49-F238E27FC236}">
-                <a16:creationId xmlns:a16="http://schemas.microsoft.com/office/drawing/2014/main" id="{182F8DEE-6BCA-4810-8245-645341BEF964}"/>
+                <a16:creationId xmlns:a16="http://schemas.microsoft.com/office/drawing/2014/main" id="{95E1299B-E772-4A43-8AE9-B6C3AA46700E}"/>
               </a:ext>
             </a:extLst>
           </p:cNvPr>
@@ -18736,7 +18736,7 @@
           <p:cNvPr id="16" name="">
             <a:extLst xmlns:a="http://schemas.openxmlformats.org/drawingml/2006/main">
               <a:ext uri="{FF2B5EF4-FFF2-40B4-BE49-F238E27FC236}">
-                <a16:creationId xmlns:a16="http://schemas.microsoft.com/office/drawing/2014/main" id="{22D7E200-75EF-40B1-B71A-A496B6F48EF4}"/>
+                <a16:creationId xmlns:a16="http://schemas.microsoft.com/office/drawing/2014/main" id="{8278CE48-4F6A-4D15-BA0E-279478976A0C}"/>
               </a:ext>
             </a:extLst>
           </p:cNvPr>
@@ -18798,7 +18798,7 @@
           <p:cNvPr id="17" name="">
             <a:extLst xmlns:a="http://schemas.openxmlformats.org/drawingml/2006/main">
               <a:ext uri="{FF2B5EF4-FFF2-40B4-BE49-F238E27FC236}">
-                <a16:creationId xmlns:a16="http://schemas.microsoft.com/office/drawing/2014/main" id="{69E954FE-AB38-432C-9E9A-C98CA1AAD57D}"/>
+                <a16:creationId xmlns:a16="http://schemas.microsoft.com/office/drawing/2014/main" id="{DC332B5E-51F1-492D-A64B-BA017F9CA7C9}"/>
               </a:ext>
             </a:extLst>
           </p:cNvPr>
@@ -18860,7 +18860,7 @@
           <p:cNvPr id="18" name="">
             <a:extLst xmlns:a="http://schemas.openxmlformats.org/drawingml/2006/main">
               <a:ext uri="{FF2B5EF4-FFF2-40B4-BE49-F238E27FC236}">
-                <a16:creationId xmlns:a16="http://schemas.microsoft.com/office/drawing/2014/main" id="{C623D76C-C9CA-4997-8F45-C6E6D19CCB45}"/>
+                <a16:creationId xmlns:a16="http://schemas.microsoft.com/office/drawing/2014/main" id="{FA5FB576-12AC-4B3A-BF5B-B20520AFAB49}"/>
               </a:ext>
             </a:extLst>
           </p:cNvPr>
@@ -18922,7 +18922,7 @@
           <p:cNvPr id="19" name="">
             <a:extLst xmlns:a="http://schemas.openxmlformats.org/drawingml/2006/main">
               <a:ext uri="{FF2B5EF4-FFF2-40B4-BE49-F238E27FC236}">
-                <a16:creationId xmlns:a16="http://schemas.microsoft.com/office/drawing/2014/main" id="{47B5F551-BA63-46AE-A77B-5CABB51F93BF}"/>
+                <a16:creationId xmlns:a16="http://schemas.microsoft.com/office/drawing/2014/main" id="{6DEAD915-FAA7-4DC8-A677-9B785247E0D9}"/>
               </a:ext>
             </a:extLst>
           </p:cNvPr>
@@ -18955,7 +18955,7 @@
           <p:cNvPr id="20" name="">
             <a:extLst xmlns:a="http://schemas.openxmlformats.org/drawingml/2006/main">
               <a:ext uri="{FF2B5EF4-FFF2-40B4-BE49-F238E27FC236}">
-                <a16:creationId xmlns:a16="http://schemas.microsoft.com/office/drawing/2014/main" id="{8F57BC35-E56A-48AA-97A8-E48F2024DFD5}"/>
+                <a16:creationId xmlns:a16="http://schemas.microsoft.com/office/drawing/2014/main" id="{99BAB471-2AF2-4602-AF25-60D520441478}"/>
               </a:ext>
             </a:extLst>
           </p:cNvPr>
@@ -18990,7 +18990,7 @@
           <p:cNvPr id="21" name="">
             <a:extLst xmlns:a="http://schemas.openxmlformats.org/drawingml/2006/main">
               <a:ext uri="{FF2B5EF4-FFF2-40B4-BE49-F238E27FC236}">
-                <a16:creationId xmlns:a16="http://schemas.microsoft.com/office/drawing/2014/main" id="{351EF06E-37DE-4E3B-B0B2-913B2D8BF206}"/>
+                <a16:creationId xmlns:a16="http://schemas.microsoft.com/office/drawing/2014/main" id="{B545DAF8-1727-48FC-8197-391314265E4C}"/>
               </a:ext>
             </a:extLst>
           </p:cNvPr>
@@ -19021,7 +19021,7 @@
           <p:cNvPr id="22" name="">
             <a:extLst xmlns:a="http://schemas.openxmlformats.org/drawingml/2006/main">
               <a:ext uri="{FF2B5EF4-FFF2-40B4-BE49-F238E27FC236}">
-                <a16:creationId xmlns:a16="http://schemas.microsoft.com/office/drawing/2014/main" id="{97F24822-9EA6-437A-A03C-421E32DDD293}"/>
+                <a16:creationId xmlns:a16="http://schemas.microsoft.com/office/drawing/2014/main" id="{33935606-BF46-4460-ACD2-4785A98A7334}"/>
               </a:ext>
             </a:extLst>
           </p:cNvPr>
@@ -19083,7 +19083,7 @@
           <p:cNvPr id="23" name="">
             <a:extLst xmlns:a="http://schemas.openxmlformats.org/drawingml/2006/main">
               <a:ext uri="{FF2B5EF4-FFF2-40B4-BE49-F238E27FC236}">
-                <a16:creationId xmlns:a16="http://schemas.microsoft.com/office/drawing/2014/main" id="{C193E18F-94BD-4A42-8F36-93A8270F9323}"/>
+                <a16:creationId xmlns:a16="http://schemas.microsoft.com/office/drawing/2014/main" id="{34D76E44-EDDF-4BCA-9D9E-CB6F33C9158E}"/>
               </a:ext>
             </a:extLst>
           </p:cNvPr>
@@ -19145,7 +19145,7 @@
           <p:cNvPr id="24" name="">
             <a:extLst xmlns:a="http://schemas.openxmlformats.org/drawingml/2006/main">
               <a:ext uri="{FF2B5EF4-FFF2-40B4-BE49-F238E27FC236}">
-                <a16:creationId xmlns:a16="http://schemas.microsoft.com/office/drawing/2014/main" id="{E2D23F97-A57D-4456-BB19-DA5A194EA95F}"/>
+                <a16:creationId xmlns:a16="http://schemas.microsoft.com/office/drawing/2014/main" id="{1FF22BAE-93FA-48B2-B573-5EB287F48A96}"/>
               </a:ext>
             </a:extLst>
           </p:cNvPr>
@@ -19207,7 +19207,7 @@
           <p:cNvPr id="25" name="">
             <a:extLst xmlns:a="http://schemas.openxmlformats.org/drawingml/2006/main">
               <a:ext uri="{FF2B5EF4-FFF2-40B4-BE49-F238E27FC236}">
-                <a16:creationId xmlns:a16="http://schemas.microsoft.com/office/drawing/2014/main" id="{D6431D9A-CE39-4630-87D0-B151A5FAC8FE}"/>
+                <a16:creationId xmlns:a16="http://schemas.microsoft.com/office/drawing/2014/main" id="{F3B99FE6-2FFA-4742-B83F-F8E0227463EC}"/>
               </a:ext>
             </a:extLst>
           </p:cNvPr>
@@ -19240,7 +19240,7 @@
           <p:cNvPr id="26" name="">
             <a:extLst xmlns:a="http://schemas.openxmlformats.org/drawingml/2006/main">
               <a:ext uri="{FF2B5EF4-FFF2-40B4-BE49-F238E27FC236}">
-                <a16:creationId xmlns:a16="http://schemas.microsoft.com/office/drawing/2014/main" id="{266458CC-DACA-4D3C-A94A-3825A1B331C4}"/>
+                <a16:creationId xmlns:a16="http://schemas.microsoft.com/office/drawing/2014/main" id="{BB18A6C1-7A84-48E3-BA97-E945194E1829}"/>
               </a:ext>
             </a:extLst>
           </p:cNvPr>
@@ -19275,7 +19275,7 @@
           <p:cNvPr id="27" name="">
             <a:extLst xmlns:a="http://schemas.openxmlformats.org/drawingml/2006/main">
               <a:ext uri="{FF2B5EF4-FFF2-40B4-BE49-F238E27FC236}">
-                <a16:creationId xmlns:a16="http://schemas.microsoft.com/office/drawing/2014/main" id="{F481C0C9-23AC-4D36-B61A-EF245B571DFB}"/>
+                <a16:creationId xmlns:a16="http://schemas.microsoft.com/office/drawing/2014/main" id="{51515DD8-BC5B-41AD-87A4-720D0CA490D7}"/>
               </a:ext>
             </a:extLst>
           </p:cNvPr>
@@ -19306,7 +19306,7 @@
           <p:cNvPr id="28" name="">
             <a:extLst xmlns:a="http://schemas.openxmlformats.org/drawingml/2006/main">
               <a:ext uri="{FF2B5EF4-FFF2-40B4-BE49-F238E27FC236}">
-                <a16:creationId xmlns:a16="http://schemas.microsoft.com/office/drawing/2014/main" id="{28E0E7F6-B5E8-4CF7-B789-93F15DD87AF8}"/>
+                <a16:creationId xmlns:a16="http://schemas.microsoft.com/office/drawing/2014/main" id="{270518F5-E481-4965-B800-E20AFE7297F6}"/>
               </a:ext>
             </a:extLst>
           </p:cNvPr>
@@ -19368,7 +19368,7 @@
           <p:cNvPr id="29" name="">
             <a:extLst xmlns:a="http://schemas.openxmlformats.org/drawingml/2006/main">
               <a:ext uri="{FF2B5EF4-FFF2-40B4-BE49-F238E27FC236}">
-                <a16:creationId xmlns:a16="http://schemas.microsoft.com/office/drawing/2014/main" id="{80810081-A283-40A5-8C55-B870DB22D3F0}"/>
+                <a16:creationId xmlns:a16="http://schemas.microsoft.com/office/drawing/2014/main" id="{C7FA3766-F692-4652-814B-3A21D65CE24E}"/>
               </a:ext>
             </a:extLst>
           </p:cNvPr>
@@ -19430,7 +19430,7 @@
           <p:cNvPr id="30" name="">
             <a:extLst xmlns:a="http://schemas.openxmlformats.org/drawingml/2006/main">
               <a:ext uri="{FF2B5EF4-FFF2-40B4-BE49-F238E27FC236}">
-                <a16:creationId xmlns:a16="http://schemas.microsoft.com/office/drawing/2014/main" id="{DAE0B09B-8835-4BFF-B110-AB55349B6F01}"/>
+                <a16:creationId xmlns:a16="http://schemas.microsoft.com/office/drawing/2014/main" id="{E71FFD28-C19E-4372-9BC1-4EFC2A15E910}"/>
               </a:ext>
             </a:extLst>
           </p:cNvPr>
@@ -19492,7 +19492,7 @@
           <p:cNvPr id="31" name="">
             <a:extLst xmlns:a="http://schemas.openxmlformats.org/drawingml/2006/main">
               <a:ext uri="{FF2B5EF4-FFF2-40B4-BE49-F238E27FC236}">
-                <a16:creationId xmlns:a16="http://schemas.microsoft.com/office/drawing/2014/main" id="{10EEADB6-7EC4-437E-A42E-B95F2926E409}"/>
+                <a16:creationId xmlns:a16="http://schemas.microsoft.com/office/drawing/2014/main" id="{18174F5A-B41C-45E6-A9C9-2DD2E1138780}"/>
               </a:ext>
             </a:extLst>
           </p:cNvPr>
@@ -19554,7 +19554,7 @@
           <p:cNvPr id="32" name="">
             <a:extLst xmlns:a="http://schemas.openxmlformats.org/drawingml/2006/main">
               <a:ext uri="{FF2B5EF4-FFF2-40B4-BE49-F238E27FC236}">
-                <a16:creationId xmlns:a16="http://schemas.microsoft.com/office/drawing/2014/main" id="{58A21942-82D7-4740-9828-B1710ABFC165}"/>
+                <a16:creationId xmlns:a16="http://schemas.microsoft.com/office/drawing/2014/main" id="{2BAFF6B8-FAB7-40D8-84FF-CC1DFFC6562A}"/>
               </a:ext>
             </a:extLst>
           </p:cNvPr>
@@ -19614,7 +19614,7 @@
     </p:spTree>
     <p:extLst>
       <p:ext uri="{BB962C8B-B14F-4D97-AF65-F5344CB8AC3E}">
-        <p14:creationId xmlns:p14="http://schemas.microsoft.com/office/powerpoint/2010/main" val="1253386418"/>
+        <p14:creationId xmlns:p14="http://schemas.microsoft.com/office/powerpoint/2010/main" val="511094413"/>
       </p:ext>
     </p:extLst>
   </p:cSld>
@@ -19642,7 +19642,7 @@
           <p:nvPr/>
         </p:nvPicPr>
         <p:blipFill>
-          <a:blip xmlns:r="http://schemas.openxmlformats.org/officeDocument/2006/relationships" xmlns:a="http://schemas.openxmlformats.org/drawingml/2006/main" r:embed="R4f124a1be1cd4984"/>
+          <a:blip xmlns:r="http://schemas.openxmlformats.org/officeDocument/2006/relationships" xmlns:a="http://schemas.openxmlformats.org/drawingml/2006/main" r:embed="Rc2e66ac0edfd4253"/>
           <a:srcRect xmlns:a="http://schemas.openxmlformats.org/drawingml/2006/main" l="0" t="0" r="0" b="0"/>
           <a:stretch xmlns:a="http://schemas.openxmlformats.org/drawingml/2006/main">
             <a:fillRect l="0" t="0" r="0" b="0"/>
@@ -19663,7 +19663,7 @@
           <p:cNvPr id="2" name="">
             <a:extLst xmlns:a="http://schemas.openxmlformats.org/drawingml/2006/main">
               <a:ext uri="{FF2B5EF4-FFF2-40B4-BE49-F238E27FC236}">
-                <a16:creationId xmlns:a16="http://schemas.microsoft.com/office/drawing/2014/main" id="{60063553-CA01-4572-B995-B278FC886A37}"/>
+                <a16:creationId xmlns:a16="http://schemas.microsoft.com/office/drawing/2014/main" id="{0BFA5412-9629-4A2A-8CA6-9DB66D2FDB75}"/>
               </a:ext>
             </a:extLst>
           </p:cNvPr>
@@ -19725,7 +19725,7 @@
           <p:cNvPr id="3" name="">
             <a:extLst xmlns:a="http://schemas.openxmlformats.org/drawingml/2006/main">
               <a:ext uri="{FF2B5EF4-FFF2-40B4-BE49-F238E27FC236}">
-                <a16:creationId xmlns:a16="http://schemas.microsoft.com/office/drawing/2014/main" id="{A7878628-AB97-407D-90C8-3B3664923AF7}"/>
+                <a16:creationId xmlns:a16="http://schemas.microsoft.com/office/drawing/2014/main" id="{17943C48-3485-4B34-B39C-53C7328A0BFA}"/>
               </a:ext>
             </a:extLst>
           </p:cNvPr>
@@ -19787,7 +19787,7 @@
           <p:cNvPr id="4" name="">
             <a:extLst xmlns:a="http://schemas.openxmlformats.org/drawingml/2006/main">
               <a:ext uri="{FF2B5EF4-FFF2-40B4-BE49-F238E27FC236}">
-                <a16:creationId xmlns:a16="http://schemas.microsoft.com/office/drawing/2014/main" id="{2746E460-3451-4140-9355-3E9D8FD38D42}"/>
+                <a16:creationId xmlns:a16="http://schemas.microsoft.com/office/drawing/2014/main" id="{950F34AF-681B-4C2B-AE01-3E8897194FD4}"/>
               </a:ext>
             </a:extLst>
           </p:cNvPr>
@@ -19849,7 +19849,7 @@
           <p:cNvPr id="5" name="">
             <a:extLst xmlns:a="http://schemas.openxmlformats.org/drawingml/2006/main">
               <a:ext uri="{FF2B5EF4-FFF2-40B4-BE49-F238E27FC236}">
-                <a16:creationId xmlns:a16="http://schemas.microsoft.com/office/drawing/2014/main" id="{CFBF5878-8242-45E3-BE8E-1939190C9AC9}"/>
+                <a16:creationId xmlns:a16="http://schemas.microsoft.com/office/drawing/2014/main" id="{57E2F060-3C21-43F3-B02D-E79A84E7B9E7}"/>
               </a:ext>
             </a:extLst>
           </p:cNvPr>
@@ -19880,7 +19880,7 @@
           <p:cNvPr id="6" name="">
             <a:extLst xmlns:a="http://schemas.openxmlformats.org/drawingml/2006/main">
               <a:ext uri="{FF2B5EF4-FFF2-40B4-BE49-F238E27FC236}">
-                <a16:creationId xmlns:a16="http://schemas.microsoft.com/office/drawing/2014/main" id="{00191A70-0771-4543-AEE1-B97B23F6C33E}"/>
+                <a16:creationId xmlns:a16="http://schemas.microsoft.com/office/drawing/2014/main" id="{2B2E647F-0315-48B7-8738-D7A0189D5C32}"/>
               </a:ext>
             </a:extLst>
           </p:cNvPr>
@@ -19942,7 +19942,7 @@
           <p:cNvPr id="7" name="">
             <a:extLst xmlns:a="http://schemas.openxmlformats.org/drawingml/2006/main">
               <a:ext uri="{FF2B5EF4-FFF2-40B4-BE49-F238E27FC236}">
-                <a16:creationId xmlns:a16="http://schemas.microsoft.com/office/drawing/2014/main" id="{DA6F47F3-107D-4B2B-99C9-8577F2CB15AC}"/>
+                <a16:creationId xmlns:a16="http://schemas.microsoft.com/office/drawing/2014/main" id="{3E96F10A-49D4-4A55-93E3-F4EB7366A1A0}"/>
               </a:ext>
             </a:extLst>
           </p:cNvPr>
@@ -19975,7 +19975,7 @@
           <p:cNvPr id="8" name="">
             <a:extLst xmlns:a="http://schemas.openxmlformats.org/drawingml/2006/main">
               <a:ext uri="{FF2B5EF4-FFF2-40B4-BE49-F238E27FC236}">
-                <a16:creationId xmlns:a16="http://schemas.microsoft.com/office/drawing/2014/main" id="{6C00EED9-D725-467A-82D1-CD18B3B5A6BF}"/>
+                <a16:creationId xmlns:a16="http://schemas.microsoft.com/office/drawing/2014/main" id="{DC41B360-5555-4FD8-8B00-226CDE9D10EE}"/>
               </a:ext>
             </a:extLst>
           </p:cNvPr>
@@ -20010,7 +20010,7 @@
           <p:cNvPr id="9" name="">
             <a:extLst xmlns:a="http://schemas.openxmlformats.org/drawingml/2006/main">
               <a:ext uri="{FF2B5EF4-FFF2-40B4-BE49-F238E27FC236}">
-                <a16:creationId xmlns:a16="http://schemas.microsoft.com/office/drawing/2014/main" id="{B75D52BC-76A4-4ABC-9098-FD1FFA973761}"/>
+                <a16:creationId xmlns:a16="http://schemas.microsoft.com/office/drawing/2014/main" id="{CD3B2EC3-20EE-4745-9C8A-BEE87322C19E}"/>
               </a:ext>
             </a:extLst>
           </p:cNvPr>
@@ -20041,7 +20041,7 @@
           <p:cNvPr id="10" name="">
             <a:extLst xmlns:a="http://schemas.openxmlformats.org/drawingml/2006/main">
               <a:ext uri="{FF2B5EF4-FFF2-40B4-BE49-F238E27FC236}">
-                <a16:creationId xmlns:a16="http://schemas.microsoft.com/office/drawing/2014/main" id="{03451E8C-2910-48CD-9A6A-703E7FD04836}"/>
+                <a16:creationId xmlns:a16="http://schemas.microsoft.com/office/drawing/2014/main" id="{F55188FC-3235-4D22-8B72-01E0A187F1F0}"/>
               </a:ext>
             </a:extLst>
           </p:cNvPr>
@@ -20103,7 +20103,7 @@
           <p:cNvPr id="11" name="">
             <a:extLst xmlns:a="http://schemas.openxmlformats.org/drawingml/2006/main">
               <a:ext uri="{FF2B5EF4-FFF2-40B4-BE49-F238E27FC236}">
-                <a16:creationId xmlns:a16="http://schemas.microsoft.com/office/drawing/2014/main" id="{7094826B-D9D1-4C87-BE95-63C8C96C6B08}"/>
+                <a16:creationId xmlns:a16="http://schemas.microsoft.com/office/drawing/2014/main" id="{B5A10034-8CC4-4EE8-B942-0443AF3069A0}"/>
               </a:ext>
             </a:extLst>
           </p:cNvPr>
@@ -20165,7 +20165,7 @@
           <p:cNvPr id="12" name="">
             <a:extLst xmlns:a="http://schemas.openxmlformats.org/drawingml/2006/main">
               <a:ext uri="{FF2B5EF4-FFF2-40B4-BE49-F238E27FC236}">
-                <a16:creationId xmlns:a16="http://schemas.microsoft.com/office/drawing/2014/main" id="{BD8FD4B9-1FBA-4FFD-8726-95E7B0406146}"/>
+                <a16:creationId xmlns:a16="http://schemas.microsoft.com/office/drawing/2014/main" id="{BA54660C-0D7E-448F-A5DE-A7AA1480EAAA}"/>
               </a:ext>
             </a:extLst>
           </p:cNvPr>
@@ -20198,7 +20198,7 @@
           <p:cNvPr id="13" name="">
             <a:extLst xmlns:a="http://schemas.openxmlformats.org/drawingml/2006/main">
               <a:ext uri="{FF2B5EF4-FFF2-40B4-BE49-F238E27FC236}">
-                <a16:creationId xmlns:a16="http://schemas.microsoft.com/office/drawing/2014/main" id="{6D73BD72-6CEF-4DCC-9EE8-9236BA693C3D}"/>
+                <a16:creationId xmlns:a16="http://schemas.microsoft.com/office/drawing/2014/main" id="{32A5AF69-4D20-455B-BF6B-0998F9FA0962}"/>
               </a:ext>
             </a:extLst>
           </p:cNvPr>
@@ -20233,7 +20233,7 @@
           <p:cNvPr id="14" name="">
             <a:extLst xmlns:a="http://schemas.openxmlformats.org/drawingml/2006/main">
               <a:ext uri="{FF2B5EF4-FFF2-40B4-BE49-F238E27FC236}">
-                <a16:creationId xmlns:a16="http://schemas.microsoft.com/office/drawing/2014/main" id="{93CE7C9F-4E3D-460C-9C2A-CD596F90D689}"/>
+                <a16:creationId xmlns:a16="http://schemas.microsoft.com/office/drawing/2014/main" id="{071B7E1F-DFBA-48E7-B5CE-155A757DF0ED}"/>
               </a:ext>
             </a:extLst>
           </p:cNvPr>
@@ -20264,7 +20264,7 @@
           <p:cNvPr id="15" name="">
             <a:extLst xmlns:a="http://schemas.openxmlformats.org/drawingml/2006/main">
               <a:ext uri="{FF2B5EF4-FFF2-40B4-BE49-F238E27FC236}">
-                <a16:creationId xmlns:a16="http://schemas.microsoft.com/office/drawing/2014/main" id="{8D3D9AC3-51AC-49CD-8456-BF6AEC7A682E}"/>
+                <a16:creationId xmlns:a16="http://schemas.microsoft.com/office/drawing/2014/main" id="{8A07B014-2FA7-47EC-97CF-F39721532C6B}"/>
               </a:ext>
             </a:extLst>
           </p:cNvPr>
@@ -20326,7 +20326,7 @@
           <p:cNvPr id="16" name="">
             <a:extLst xmlns:a="http://schemas.openxmlformats.org/drawingml/2006/main">
               <a:ext uri="{FF2B5EF4-FFF2-40B4-BE49-F238E27FC236}">
-                <a16:creationId xmlns:a16="http://schemas.microsoft.com/office/drawing/2014/main" id="{7D8AFC9A-D876-4E1F-9873-F60576B08785}"/>
+                <a16:creationId xmlns:a16="http://schemas.microsoft.com/office/drawing/2014/main" id="{67DDD137-998B-4337-BED4-52BB19618D9F}"/>
               </a:ext>
             </a:extLst>
           </p:cNvPr>
@@ -20388,7 +20388,7 @@
           <p:cNvPr id="17" name="">
             <a:extLst xmlns:a="http://schemas.openxmlformats.org/drawingml/2006/main">
               <a:ext uri="{FF2B5EF4-FFF2-40B4-BE49-F238E27FC236}">
-                <a16:creationId xmlns:a16="http://schemas.microsoft.com/office/drawing/2014/main" id="{BF5B87B5-7CAA-4969-9A73-EFD8EA8D49C7}"/>
+                <a16:creationId xmlns:a16="http://schemas.microsoft.com/office/drawing/2014/main" id="{F450543D-263E-42D3-BF4B-B78BAAA3AF8C}"/>
               </a:ext>
             </a:extLst>
           </p:cNvPr>
@@ -20421,7 +20421,7 @@
           <p:cNvPr id="18" name="">
             <a:extLst xmlns:a="http://schemas.openxmlformats.org/drawingml/2006/main">
               <a:ext uri="{FF2B5EF4-FFF2-40B4-BE49-F238E27FC236}">
-                <a16:creationId xmlns:a16="http://schemas.microsoft.com/office/drawing/2014/main" id="{398BE92A-286E-4321-8788-8D7CF374670D}"/>
+                <a16:creationId xmlns:a16="http://schemas.microsoft.com/office/drawing/2014/main" id="{2FF97AAA-FF30-4AF9-9758-F3733B421F2D}"/>
               </a:ext>
             </a:extLst>
           </p:cNvPr>
@@ -20456,7 +20456,7 @@
           <p:cNvPr id="19" name="">
             <a:extLst xmlns:a="http://schemas.openxmlformats.org/drawingml/2006/main">
               <a:ext uri="{FF2B5EF4-FFF2-40B4-BE49-F238E27FC236}">
-                <a16:creationId xmlns:a16="http://schemas.microsoft.com/office/drawing/2014/main" id="{4D2F69E0-4101-4CCA-9D21-8E3F5FA5F0B2}"/>
+                <a16:creationId xmlns:a16="http://schemas.microsoft.com/office/drawing/2014/main" id="{1108800D-88D8-474F-AEE8-74E5BD8CDB9D}"/>
               </a:ext>
             </a:extLst>
           </p:cNvPr>
@@ -20487,7 +20487,7 @@
           <p:cNvPr id="20" name="">
             <a:extLst xmlns:a="http://schemas.openxmlformats.org/drawingml/2006/main">
               <a:ext uri="{FF2B5EF4-FFF2-40B4-BE49-F238E27FC236}">
-                <a16:creationId xmlns:a16="http://schemas.microsoft.com/office/drawing/2014/main" id="{CBAA0531-6B63-4B7E-8FDE-E967C8BD3B3C}"/>
+                <a16:creationId xmlns:a16="http://schemas.microsoft.com/office/drawing/2014/main" id="{830C8537-D531-476A-9CDE-A9333D1A1AD2}"/>
               </a:ext>
             </a:extLst>
           </p:cNvPr>
@@ -20549,7 +20549,7 @@
           <p:cNvPr id="21" name="">
             <a:extLst xmlns:a="http://schemas.openxmlformats.org/drawingml/2006/main">
               <a:ext uri="{FF2B5EF4-FFF2-40B4-BE49-F238E27FC236}">
-                <a16:creationId xmlns:a16="http://schemas.microsoft.com/office/drawing/2014/main" id="{7E08E9E1-27D9-4F3E-86B9-E3F1565AB0D2}"/>
+                <a16:creationId xmlns:a16="http://schemas.microsoft.com/office/drawing/2014/main" id="{294D7E14-B549-4128-AFF1-B5BF1662982C}"/>
               </a:ext>
             </a:extLst>
           </p:cNvPr>
@@ -20611,7 +20611,7 @@
           <p:cNvPr id="22" name="">
             <a:extLst xmlns:a="http://schemas.openxmlformats.org/drawingml/2006/main">
               <a:ext uri="{FF2B5EF4-FFF2-40B4-BE49-F238E27FC236}">
-                <a16:creationId xmlns:a16="http://schemas.microsoft.com/office/drawing/2014/main" id="{61384E66-4000-411D-8C3F-CF9522E3855C}"/>
+                <a16:creationId xmlns:a16="http://schemas.microsoft.com/office/drawing/2014/main" id="{9600AA1C-9DA3-4D0E-9B98-3AF0091227A4}"/>
               </a:ext>
             </a:extLst>
           </p:cNvPr>
@@ -20673,7 +20673,7 @@
           <p:cNvPr id="23" name="">
             <a:extLst xmlns:a="http://schemas.openxmlformats.org/drawingml/2006/main">
               <a:ext uri="{FF2B5EF4-FFF2-40B4-BE49-F238E27FC236}">
-                <a16:creationId xmlns:a16="http://schemas.microsoft.com/office/drawing/2014/main" id="{8BA5B615-5DD3-44BB-BB7F-69D2279E050A}"/>
+                <a16:creationId xmlns:a16="http://schemas.microsoft.com/office/drawing/2014/main" id="{F99D062F-59AC-42B1-AD7E-0862EBE60929}"/>
               </a:ext>
             </a:extLst>
           </p:cNvPr>
@@ -20733,7 +20733,7 @@
     </p:spTree>
     <p:extLst>
       <p:ext uri="{BB962C8B-B14F-4D97-AF65-F5344CB8AC3E}">
-        <p14:creationId xmlns:p14="http://schemas.microsoft.com/office/powerpoint/2010/main" val="1855406844"/>
+        <p14:creationId xmlns:p14="http://schemas.microsoft.com/office/powerpoint/2010/main" val="24518330"/>
       </p:ext>
     </p:extLst>
   </p:cSld>
